--- a/LearningPath/Project-01-Foundation/slides/Project_1_Car_Rental_Microservices_Foundation_Updated_Structure.pptx
+++ b/LearningPath/Project-01-Foundation/slides/Project_1_Car_Rental_Microservices_Foundation_Updated_Structure.pptx
@@ -5,29 +5,29 @@
     <p:sldMasterId id="2147483648" r:id="rId1"/>
   </p:sldMasterIdLst>
   <p:sldIdLst>
-    <p:sldId id="256" r:id="rId7"/>
-    <p:sldId id="257" r:id="rId8"/>
-    <p:sldId id="258" r:id="rId9"/>
-    <p:sldId id="259" r:id="rId10"/>
-    <p:sldId id="260" r:id="rId11"/>
-    <p:sldId id="261" r:id="rId12"/>
-    <p:sldId id="262" r:id="rId13"/>
-    <p:sldId id="263" r:id="rId14"/>
-    <p:sldId id="264" r:id="rId15"/>
-    <p:sldId id="265" r:id="rId16"/>
-    <p:sldId id="266" r:id="rId17"/>
-    <p:sldId id="267" r:id="rId18"/>
-    <p:sldId id="268" r:id="rId19"/>
-    <p:sldId id="269" r:id="rId20"/>
-    <p:sldId id="270" r:id="rId21"/>
-    <p:sldId id="271" r:id="rId22"/>
-    <p:sldId id="272" r:id="rId23"/>
-    <p:sldId id="273" r:id="rId24"/>
-    <p:sldId id="274" r:id="rId25"/>
-    <p:sldId id="275" r:id="rId26"/>
-    <p:sldId id="276" r:id="rId27"/>
+    <p:sldId id="256" r:id="rId2"/>
+    <p:sldId id="257" r:id="rId3"/>
+    <p:sldId id="258" r:id="rId4"/>
+    <p:sldId id="259" r:id="rId5"/>
+    <p:sldId id="260" r:id="rId6"/>
+    <p:sldId id="261" r:id="rId7"/>
+    <p:sldId id="262" r:id="rId8"/>
+    <p:sldId id="263" r:id="rId9"/>
+    <p:sldId id="264" r:id="rId10"/>
+    <p:sldId id="265" r:id="rId11"/>
+    <p:sldId id="266" r:id="rId12"/>
+    <p:sldId id="267" r:id="rId13"/>
+    <p:sldId id="268" r:id="rId14"/>
+    <p:sldId id="269" r:id="rId15"/>
+    <p:sldId id="270" r:id="rId16"/>
+    <p:sldId id="271" r:id="rId17"/>
+    <p:sldId id="272" r:id="rId18"/>
+    <p:sldId id="273" r:id="rId19"/>
+    <p:sldId id="274" r:id="rId20"/>
+    <p:sldId id="275" r:id="rId21"/>
+    <p:sldId id="276" r:id="rId22"/>
   </p:sldIdLst>
-  <p:sldSz cx="12191695" cy="6858000" type="screen4x3"/>
+  <p:sldSz cx="12192000" cy="6858000"/>
   <p:notesSz cx="6858000" cy="9144000"/>
   <p:defaultTextStyle>
     <a:defPPr>
@@ -124,6 +124,22 @@
       </a:defRPr>
     </a:lvl9pPr>
   </p:defaultTextStyle>
+  <p:extLst>
+    <p:ext uri="{EFAFB233-063F-42B5-8137-9DF3F51BA10A}">
+      <p15:sldGuideLst xmlns:p15="http://schemas.microsoft.com/office/powerpoint/2012/main">
+        <p15:guide id="1" orient="horz" pos="2160">
+          <p15:clr>
+            <a:srgbClr val="A4A3A4"/>
+          </p15:clr>
+        </p15:guide>
+        <p15:guide id="2" pos="2880">
+          <p15:clr>
+            <a:srgbClr val="A4A3A4"/>
+          </p15:clr>
+        </p15:guide>
+      </p15:sldGuideLst>
+    </p:ext>
+  </p:extLst>
 </p:presentation>
 </file>
 
@@ -165,10 +181,9 @@
           <a:lstStyle/>
           <a:p>
             <a:r>
-              <a:rPr lang="en-US" smtClean="0"/>
+              <a:rPr lang="en-US"/>
               <a:t>Click to edit Master title style</a:t>
             </a:r>
-            <a:endParaRPr lang="en-US"/>
           </a:p>
         </p:txBody>
       </p:sp>
@@ -284,10 +299,9 @@
           </a:lstStyle>
           <a:p>
             <a:r>
-              <a:rPr lang="en-US" smtClean="0"/>
+              <a:rPr lang="en-US"/>
               <a:t>Click to edit Master subtitle style</a:t>
             </a:r>
-            <a:endParaRPr lang="en-US"/>
           </a:p>
         </p:txBody>
       </p:sp>
@@ -308,7 +322,7 @@
           <a:p>
             <a:fld id="{5BCAD085-E8A6-8845-BD4E-CB4CCA059FC4}" type="datetimeFigureOut">
               <a:rPr lang="en-US" smtClean="0"/>
-              <a:t>1/27/13</a:t>
+              <a:t>10/1/2026</a:t>
             </a:fld>
             <a:endParaRPr lang="en-US"/>
           </a:p>
@@ -402,10 +416,9 @@
           <a:lstStyle/>
           <a:p>
             <a:r>
-              <a:rPr lang="en-US" smtClean="0"/>
+              <a:rPr lang="en-US"/>
               <a:t>Click to edit Master title style</a:t>
             </a:r>
-            <a:endParaRPr lang="en-US"/>
           </a:p>
         </p:txBody>
       </p:sp>
@@ -426,38 +439,37 @@
           <a:p>
             <a:pPr lvl="0"/>
             <a:r>
-              <a:rPr lang="en-US" smtClean="0"/>
+              <a:rPr lang="en-US"/>
               <a:t>Click to edit Master text styles</a:t>
             </a:r>
           </a:p>
           <a:p>
             <a:pPr lvl="1"/>
             <a:r>
-              <a:rPr lang="en-US" smtClean="0"/>
+              <a:rPr lang="en-US"/>
               <a:t>Second level</a:t>
             </a:r>
           </a:p>
           <a:p>
             <a:pPr lvl="2"/>
             <a:r>
-              <a:rPr lang="en-US" smtClean="0"/>
+              <a:rPr lang="en-US"/>
               <a:t>Third level</a:t>
             </a:r>
           </a:p>
           <a:p>
             <a:pPr lvl="3"/>
             <a:r>
-              <a:rPr lang="en-US" smtClean="0"/>
+              <a:rPr lang="en-US"/>
               <a:t>Fourth level</a:t>
             </a:r>
           </a:p>
           <a:p>
             <a:pPr lvl="4"/>
             <a:r>
-              <a:rPr lang="en-US" smtClean="0"/>
+              <a:rPr lang="en-US"/>
               <a:t>Fifth level</a:t>
             </a:r>
-            <a:endParaRPr lang="en-US"/>
           </a:p>
         </p:txBody>
       </p:sp>
@@ -478,7 +490,7 @@
           <a:p>
             <a:fld id="{5BCAD085-E8A6-8845-BD4E-CB4CCA059FC4}" type="datetimeFigureOut">
               <a:rPr lang="en-US" smtClean="0"/>
-              <a:t>1/27/13</a:t>
+              <a:t>10/1/2026</a:t>
             </a:fld>
             <a:endParaRPr lang="en-US"/>
           </a:p>
@@ -577,10 +589,9 @@
           <a:lstStyle/>
           <a:p>
             <a:r>
-              <a:rPr lang="en-US" smtClean="0"/>
+              <a:rPr lang="en-US"/>
               <a:t>Click to edit Master title style</a:t>
             </a:r>
-            <a:endParaRPr lang="en-US"/>
           </a:p>
         </p:txBody>
       </p:sp>
@@ -606,38 +617,37 @@
           <a:p>
             <a:pPr lvl="0"/>
             <a:r>
-              <a:rPr lang="en-US" smtClean="0"/>
+              <a:rPr lang="en-US"/>
               <a:t>Click to edit Master text styles</a:t>
             </a:r>
           </a:p>
           <a:p>
             <a:pPr lvl="1"/>
             <a:r>
-              <a:rPr lang="en-US" smtClean="0"/>
+              <a:rPr lang="en-US"/>
               <a:t>Second level</a:t>
             </a:r>
           </a:p>
           <a:p>
             <a:pPr lvl="2"/>
             <a:r>
-              <a:rPr lang="en-US" smtClean="0"/>
+              <a:rPr lang="en-US"/>
               <a:t>Third level</a:t>
             </a:r>
           </a:p>
           <a:p>
             <a:pPr lvl="3"/>
             <a:r>
-              <a:rPr lang="en-US" smtClean="0"/>
+              <a:rPr lang="en-US"/>
               <a:t>Fourth level</a:t>
             </a:r>
           </a:p>
           <a:p>
             <a:pPr lvl="4"/>
             <a:r>
-              <a:rPr lang="en-US" smtClean="0"/>
+              <a:rPr lang="en-US"/>
               <a:t>Fifth level</a:t>
             </a:r>
-            <a:endParaRPr lang="en-US"/>
           </a:p>
         </p:txBody>
       </p:sp>
@@ -658,7 +668,7 @@
           <a:p>
             <a:fld id="{5BCAD085-E8A6-8845-BD4E-CB4CCA059FC4}" type="datetimeFigureOut">
               <a:rPr lang="en-US" smtClean="0"/>
-              <a:t>1/27/13</a:t>
+              <a:t>10/1/2026</a:t>
             </a:fld>
             <a:endParaRPr lang="en-US"/>
           </a:p>
@@ -752,10 +762,9 @@
           <a:lstStyle/>
           <a:p>
             <a:r>
-              <a:rPr lang="en-US" smtClean="0"/>
+              <a:rPr lang="en-US"/>
               <a:t>Click to edit Master title style</a:t>
             </a:r>
-            <a:endParaRPr lang="en-US"/>
           </a:p>
         </p:txBody>
       </p:sp>
@@ -776,38 +785,37 @@
           <a:p>
             <a:pPr lvl="0"/>
             <a:r>
-              <a:rPr lang="en-US" smtClean="0"/>
+              <a:rPr lang="en-US"/>
               <a:t>Click to edit Master text styles</a:t>
             </a:r>
           </a:p>
           <a:p>
             <a:pPr lvl="1"/>
             <a:r>
-              <a:rPr lang="en-US" smtClean="0"/>
+              <a:rPr lang="en-US"/>
               <a:t>Second level</a:t>
             </a:r>
           </a:p>
           <a:p>
             <a:pPr lvl="2"/>
             <a:r>
-              <a:rPr lang="en-US" smtClean="0"/>
+              <a:rPr lang="en-US"/>
               <a:t>Third level</a:t>
             </a:r>
           </a:p>
           <a:p>
             <a:pPr lvl="3"/>
             <a:r>
-              <a:rPr lang="en-US" smtClean="0"/>
+              <a:rPr lang="en-US"/>
               <a:t>Fourth level</a:t>
             </a:r>
           </a:p>
           <a:p>
             <a:pPr lvl="4"/>
             <a:r>
-              <a:rPr lang="en-US" smtClean="0"/>
+              <a:rPr lang="en-US"/>
               <a:t>Fifth level</a:t>
             </a:r>
-            <a:endParaRPr lang="en-US"/>
           </a:p>
         </p:txBody>
       </p:sp>
@@ -828,7 +836,7 @@
           <a:p>
             <a:fld id="{5BCAD085-E8A6-8845-BD4E-CB4CCA059FC4}" type="datetimeFigureOut">
               <a:rPr lang="en-US" smtClean="0"/>
-              <a:t>1/27/13</a:t>
+              <a:t>10/1/2026</a:t>
             </a:fld>
             <a:endParaRPr lang="en-US"/>
           </a:p>
@@ -931,10 +939,9 @@
           </a:lstStyle>
           <a:p>
             <a:r>
-              <a:rPr lang="en-US" smtClean="0"/>
+              <a:rPr lang="en-US"/>
               <a:t>Click to edit Master title style</a:t>
             </a:r>
-            <a:endParaRPr lang="en-US"/>
           </a:p>
         </p:txBody>
       </p:sp>
@@ -1051,7 +1058,7 @@
           <a:p>
             <a:pPr lvl="0"/>
             <a:r>
-              <a:rPr lang="en-US" smtClean="0"/>
+              <a:rPr lang="en-US"/>
               <a:t>Click to edit Master text styles</a:t>
             </a:r>
           </a:p>
@@ -1074,7 +1081,7 @@
           <a:p>
             <a:fld id="{5BCAD085-E8A6-8845-BD4E-CB4CCA059FC4}" type="datetimeFigureOut">
               <a:rPr lang="en-US" smtClean="0"/>
-              <a:t>1/27/13</a:t>
+              <a:t>10/1/2026</a:t>
             </a:fld>
             <a:endParaRPr lang="en-US"/>
           </a:p>
@@ -1168,10 +1175,9 @@
           <a:lstStyle/>
           <a:p>
             <a:r>
-              <a:rPr lang="en-US" smtClean="0"/>
+              <a:rPr lang="en-US"/>
               <a:t>Click to edit Master title style</a:t>
             </a:r>
-            <a:endParaRPr lang="en-US"/>
           </a:p>
         </p:txBody>
       </p:sp>
@@ -1225,38 +1231,37 @@
           <a:p>
             <a:pPr lvl="0"/>
             <a:r>
-              <a:rPr lang="en-US" smtClean="0"/>
+              <a:rPr lang="en-US"/>
               <a:t>Click to edit Master text styles</a:t>
             </a:r>
           </a:p>
           <a:p>
             <a:pPr lvl="1"/>
             <a:r>
-              <a:rPr lang="en-US" smtClean="0"/>
+              <a:rPr lang="en-US"/>
               <a:t>Second level</a:t>
             </a:r>
           </a:p>
           <a:p>
             <a:pPr lvl="2"/>
             <a:r>
-              <a:rPr lang="en-US" smtClean="0"/>
+              <a:rPr lang="en-US"/>
               <a:t>Third level</a:t>
             </a:r>
           </a:p>
           <a:p>
             <a:pPr lvl="3"/>
             <a:r>
-              <a:rPr lang="en-US" smtClean="0"/>
+              <a:rPr lang="en-US"/>
               <a:t>Fourth level</a:t>
             </a:r>
           </a:p>
           <a:p>
             <a:pPr lvl="4"/>
             <a:r>
-              <a:rPr lang="en-US" smtClean="0"/>
+              <a:rPr lang="en-US"/>
               <a:t>Fifth level</a:t>
             </a:r>
-            <a:endParaRPr lang="en-US"/>
           </a:p>
         </p:txBody>
       </p:sp>
@@ -1310,38 +1315,37 @@
           <a:p>
             <a:pPr lvl="0"/>
             <a:r>
-              <a:rPr lang="en-US" smtClean="0"/>
+              <a:rPr lang="en-US"/>
               <a:t>Click to edit Master text styles</a:t>
             </a:r>
           </a:p>
           <a:p>
             <a:pPr lvl="1"/>
             <a:r>
-              <a:rPr lang="en-US" smtClean="0"/>
+              <a:rPr lang="en-US"/>
               <a:t>Second level</a:t>
             </a:r>
           </a:p>
           <a:p>
             <a:pPr lvl="2"/>
             <a:r>
-              <a:rPr lang="en-US" smtClean="0"/>
+              <a:rPr lang="en-US"/>
               <a:t>Third level</a:t>
             </a:r>
           </a:p>
           <a:p>
             <a:pPr lvl="3"/>
             <a:r>
-              <a:rPr lang="en-US" smtClean="0"/>
+              <a:rPr lang="en-US"/>
               <a:t>Fourth level</a:t>
             </a:r>
           </a:p>
           <a:p>
             <a:pPr lvl="4"/>
             <a:r>
-              <a:rPr lang="en-US" smtClean="0"/>
+              <a:rPr lang="en-US"/>
               <a:t>Fifth level</a:t>
             </a:r>
-            <a:endParaRPr lang="en-US"/>
           </a:p>
         </p:txBody>
       </p:sp>
@@ -1362,7 +1366,7 @@
           <a:p>
             <a:fld id="{5BCAD085-E8A6-8845-BD4E-CB4CCA059FC4}" type="datetimeFigureOut">
               <a:rPr lang="en-US" smtClean="0"/>
-              <a:t>1/27/13</a:t>
+              <a:t>10/1/2026</a:t>
             </a:fld>
             <a:endParaRPr lang="en-US"/>
           </a:p>
@@ -1460,10 +1464,9 @@
           </a:lstStyle>
           <a:p>
             <a:r>
-              <a:rPr lang="en-US" smtClean="0"/>
+              <a:rPr lang="en-US"/>
               <a:t>Click to edit Master title style</a:t>
             </a:r>
-            <a:endParaRPr lang="en-US"/>
           </a:p>
         </p:txBody>
       </p:sp>
@@ -1526,7 +1529,7 @@
           <a:p>
             <a:pPr lvl="0"/>
             <a:r>
-              <a:rPr lang="en-US" smtClean="0"/>
+              <a:rPr lang="en-US"/>
               <a:t>Click to edit Master text styles</a:t>
             </a:r>
           </a:p>
@@ -1582,38 +1585,37 @@
           <a:p>
             <a:pPr lvl="0"/>
             <a:r>
-              <a:rPr lang="en-US" smtClean="0"/>
+              <a:rPr lang="en-US"/>
               <a:t>Click to edit Master text styles</a:t>
             </a:r>
           </a:p>
           <a:p>
             <a:pPr lvl="1"/>
             <a:r>
-              <a:rPr lang="en-US" smtClean="0"/>
+              <a:rPr lang="en-US"/>
               <a:t>Second level</a:t>
             </a:r>
           </a:p>
           <a:p>
             <a:pPr lvl="2"/>
             <a:r>
-              <a:rPr lang="en-US" smtClean="0"/>
+              <a:rPr lang="en-US"/>
               <a:t>Third level</a:t>
             </a:r>
           </a:p>
           <a:p>
             <a:pPr lvl="3"/>
             <a:r>
-              <a:rPr lang="en-US" smtClean="0"/>
+              <a:rPr lang="en-US"/>
               <a:t>Fourth level</a:t>
             </a:r>
           </a:p>
           <a:p>
             <a:pPr lvl="4"/>
             <a:r>
-              <a:rPr lang="en-US" smtClean="0"/>
+              <a:rPr lang="en-US"/>
               <a:t>Fifth level</a:t>
             </a:r>
-            <a:endParaRPr lang="en-US"/>
           </a:p>
         </p:txBody>
       </p:sp>
@@ -1676,7 +1678,7 @@
           <a:p>
             <a:pPr lvl="0"/>
             <a:r>
-              <a:rPr lang="en-US" smtClean="0"/>
+              <a:rPr lang="en-US"/>
               <a:t>Click to edit Master text styles</a:t>
             </a:r>
           </a:p>
@@ -1732,38 +1734,37 @@
           <a:p>
             <a:pPr lvl="0"/>
             <a:r>
-              <a:rPr lang="en-US" smtClean="0"/>
+              <a:rPr lang="en-US"/>
               <a:t>Click to edit Master text styles</a:t>
             </a:r>
           </a:p>
           <a:p>
             <a:pPr lvl="1"/>
             <a:r>
-              <a:rPr lang="en-US" smtClean="0"/>
+              <a:rPr lang="en-US"/>
               <a:t>Second level</a:t>
             </a:r>
           </a:p>
           <a:p>
             <a:pPr lvl="2"/>
             <a:r>
-              <a:rPr lang="en-US" smtClean="0"/>
+              <a:rPr lang="en-US"/>
               <a:t>Third level</a:t>
             </a:r>
           </a:p>
           <a:p>
             <a:pPr lvl="3"/>
             <a:r>
-              <a:rPr lang="en-US" smtClean="0"/>
+              <a:rPr lang="en-US"/>
               <a:t>Fourth level</a:t>
             </a:r>
           </a:p>
           <a:p>
             <a:pPr lvl="4"/>
             <a:r>
-              <a:rPr lang="en-US" smtClean="0"/>
+              <a:rPr lang="en-US"/>
               <a:t>Fifth level</a:t>
             </a:r>
-            <a:endParaRPr lang="en-US"/>
           </a:p>
         </p:txBody>
       </p:sp>
@@ -1784,7 +1785,7 @@
           <a:p>
             <a:fld id="{5BCAD085-E8A6-8845-BD4E-CB4CCA059FC4}" type="datetimeFigureOut">
               <a:rPr lang="en-US" smtClean="0"/>
-              <a:t>1/27/13</a:t>
+              <a:t>10/1/2026</a:t>
             </a:fld>
             <a:endParaRPr lang="en-US"/>
           </a:p>
@@ -1878,10 +1879,9 @@
           <a:lstStyle/>
           <a:p>
             <a:r>
-              <a:rPr lang="en-US" smtClean="0"/>
+              <a:rPr lang="en-US"/>
               <a:t>Click to edit Master title style</a:t>
             </a:r>
-            <a:endParaRPr lang="en-US"/>
           </a:p>
         </p:txBody>
       </p:sp>
@@ -1902,7 +1902,7 @@
           <a:p>
             <a:fld id="{5BCAD085-E8A6-8845-BD4E-CB4CCA059FC4}" type="datetimeFigureOut">
               <a:rPr lang="en-US" smtClean="0"/>
-              <a:t>1/27/13</a:t>
+              <a:t>10/1/2026</a:t>
             </a:fld>
             <a:endParaRPr lang="en-US"/>
           </a:p>
@@ -1997,7 +1997,7 @@
           <a:p>
             <a:fld id="{5BCAD085-E8A6-8845-BD4E-CB4CCA059FC4}" type="datetimeFigureOut">
               <a:rPr lang="en-US" smtClean="0"/>
-              <a:t>1/27/13</a:t>
+              <a:t>10/1/2026</a:t>
             </a:fld>
             <a:endParaRPr lang="en-US"/>
           </a:p>
@@ -2100,10 +2100,9 @@
           </a:lstStyle>
           <a:p>
             <a:r>
-              <a:rPr lang="en-US" smtClean="0"/>
+              <a:rPr lang="en-US"/>
               <a:t>Click to edit Master title style</a:t>
             </a:r>
-            <a:endParaRPr lang="en-US"/>
           </a:p>
         </p:txBody>
       </p:sp>
@@ -2157,38 +2156,37 @@
           <a:p>
             <a:pPr lvl="0"/>
             <a:r>
-              <a:rPr lang="en-US" smtClean="0"/>
+              <a:rPr lang="en-US"/>
               <a:t>Click to edit Master text styles</a:t>
             </a:r>
           </a:p>
           <a:p>
             <a:pPr lvl="1"/>
             <a:r>
-              <a:rPr lang="en-US" smtClean="0"/>
+              <a:rPr lang="en-US"/>
               <a:t>Second level</a:t>
             </a:r>
           </a:p>
           <a:p>
             <a:pPr lvl="2"/>
             <a:r>
-              <a:rPr lang="en-US" smtClean="0"/>
+              <a:rPr lang="en-US"/>
               <a:t>Third level</a:t>
             </a:r>
           </a:p>
           <a:p>
             <a:pPr lvl="3"/>
             <a:r>
-              <a:rPr lang="en-US" smtClean="0"/>
+              <a:rPr lang="en-US"/>
               <a:t>Fourth level</a:t>
             </a:r>
           </a:p>
           <a:p>
             <a:pPr lvl="4"/>
             <a:r>
-              <a:rPr lang="en-US" smtClean="0"/>
+              <a:rPr lang="en-US"/>
               <a:t>Fifth level</a:t>
             </a:r>
-            <a:endParaRPr lang="en-US"/>
           </a:p>
         </p:txBody>
       </p:sp>
@@ -2251,7 +2249,7 @@
           <a:p>
             <a:pPr lvl="0"/>
             <a:r>
-              <a:rPr lang="en-US" smtClean="0"/>
+              <a:rPr lang="en-US"/>
               <a:t>Click to edit Master text styles</a:t>
             </a:r>
           </a:p>
@@ -2274,7 +2272,7 @@
           <a:p>
             <a:fld id="{5BCAD085-E8A6-8845-BD4E-CB4CCA059FC4}" type="datetimeFigureOut">
               <a:rPr lang="en-US" smtClean="0"/>
-              <a:t>1/27/13</a:t>
+              <a:t>10/1/2026</a:t>
             </a:fld>
             <a:endParaRPr lang="en-US"/>
           </a:p>
@@ -2377,10 +2375,9 @@
           </a:lstStyle>
           <a:p>
             <a:r>
-              <a:rPr lang="en-US" smtClean="0"/>
+              <a:rPr lang="en-US"/>
               <a:t>Click to edit Master title style</a:t>
             </a:r>
-            <a:endParaRPr lang="en-US"/>
           </a:p>
         </p:txBody>
       </p:sp>
@@ -2504,7 +2501,7 @@
           <a:p>
             <a:pPr lvl="0"/>
             <a:r>
-              <a:rPr lang="en-US" smtClean="0"/>
+              <a:rPr lang="en-US"/>
               <a:t>Click to edit Master text styles</a:t>
             </a:r>
           </a:p>
@@ -2527,7 +2524,7 @@
           <a:p>
             <a:fld id="{5BCAD085-E8A6-8845-BD4E-CB4CCA059FC4}" type="datetimeFigureOut">
               <a:rPr lang="en-US" smtClean="0"/>
-              <a:t>1/27/13</a:t>
+              <a:t>10/1/2026</a:t>
             </a:fld>
             <a:endParaRPr lang="en-US"/>
           </a:p>
@@ -2636,10 +2633,9 @@
           <a:lstStyle/>
           <a:p>
             <a:r>
-              <a:rPr lang="en-US" smtClean="0"/>
+              <a:rPr lang="en-US"/>
               <a:t>Click to edit Master title style</a:t>
             </a:r>
-            <a:endParaRPr lang="en-US"/>
           </a:p>
         </p:txBody>
       </p:sp>
@@ -2670,38 +2666,37 @@
           <a:p>
             <a:pPr lvl="0"/>
             <a:r>
-              <a:rPr lang="en-US" smtClean="0"/>
+              <a:rPr lang="en-US"/>
               <a:t>Click to edit Master text styles</a:t>
             </a:r>
           </a:p>
           <a:p>
             <a:pPr lvl="1"/>
             <a:r>
-              <a:rPr lang="en-US" smtClean="0"/>
+              <a:rPr lang="en-US"/>
               <a:t>Second level</a:t>
             </a:r>
           </a:p>
           <a:p>
             <a:pPr lvl="2"/>
             <a:r>
-              <a:rPr lang="en-US" smtClean="0"/>
+              <a:rPr lang="en-US"/>
               <a:t>Third level</a:t>
             </a:r>
           </a:p>
           <a:p>
             <a:pPr lvl="3"/>
             <a:r>
-              <a:rPr lang="en-US" smtClean="0"/>
+              <a:rPr lang="en-US"/>
               <a:t>Fourth level</a:t>
             </a:r>
           </a:p>
           <a:p>
             <a:pPr lvl="4"/>
             <a:r>
-              <a:rPr lang="en-US" smtClean="0"/>
+              <a:rPr lang="en-US"/>
               <a:t>Fifth level</a:t>
             </a:r>
-            <a:endParaRPr lang="en-US"/>
           </a:p>
         </p:txBody>
       </p:sp>
@@ -2740,7 +2735,7 @@
           <a:p>
             <a:fld id="{5BCAD085-E8A6-8845-BD4E-CB4CCA059FC4}" type="datetimeFigureOut">
               <a:rPr lang="en-US" smtClean="0"/>
-              <a:t>1/27/13</a:t>
+              <a:t>10/1/2026</a:t>
             </a:fld>
             <a:endParaRPr lang="en-US"/>
           </a:p>
@@ -3099,7 +3094,7 @@
 </file>
 
 <file path=ppt/slides/slide1.xml><?xml version="1.0" encoding="utf-8"?>
-<p:sld xmlns:a="http://schemas.openxmlformats.org/drawingml/2006/main" xmlns:p="http://schemas.openxmlformats.org/presentationml/2006/main" xmlns:r="http://schemas.openxmlformats.org/officeDocument/2006/relationships">
+<p:sld xmlns:a="http://schemas.openxmlformats.org/drawingml/2006/main" xmlns:r="http://schemas.openxmlformats.org/officeDocument/2006/relationships" xmlns:p="http://schemas.openxmlformats.org/presentationml/2006/main">
   <p:cSld>
     <p:bg>
       <p:bgPr>
@@ -3115,7 +3110,14 @@
         <p:cNvGrpSpPr/>
         <p:nvPr/>
       </p:nvGrpSpPr>
-      <p:grpSpPr/>
+      <p:grpSpPr>
+        <a:xfrm>
+          <a:off x="0" y="0"/>
+          <a:ext cx="0" cy="0"/>
+          <a:chOff x="0" y="0"/>
+          <a:chExt cx="0" cy="0"/>
+        </a:xfrm>
+      </p:grpSpPr>
       <p:sp>
         <p:nvSpPr>
           <p:cNvPr id="2" name="TextBox 1"/>
@@ -3219,7 +3221,7 @@
 </file>
 
 <file path=ppt/slides/slide10.xml><?xml version="1.0" encoding="utf-8"?>
-<p:sld xmlns:a="http://schemas.openxmlformats.org/drawingml/2006/main" xmlns:p="http://schemas.openxmlformats.org/presentationml/2006/main" xmlns:r="http://schemas.openxmlformats.org/officeDocument/2006/relationships">
+<p:sld xmlns:a="http://schemas.openxmlformats.org/drawingml/2006/main" xmlns:r="http://schemas.openxmlformats.org/officeDocument/2006/relationships" xmlns:p="http://schemas.openxmlformats.org/presentationml/2006/main">
   <p:cSld>
     <p:bg>
       <p:bgPr>
@@ -3235,7 +3237,14 @@
         <p:cNvGrpSpPr/>
         <p:nvPr/>
       </p:nvGrpSpPr>
-      <p:grpSpPr/>
+      <p:grpSpPr>
+        <a:xfrm>
+          <a:off x="0" y="0"/>
+          <a:ext cx="0" cy="0"/>
+          <a:chOff x="0" y="0"/>
+          <a:chExt cx="0" cy="0"/>
+        </a:xfrm>
+      </p:grpSpPr>
       <p:sp>
         <p:nvSpPr>
           <p:cNvPr id="2" name="TextBox 1"/>
@@ -3311,6 +3320,7 @@
           <a:lstStyle/>
           <a:p>
             <a:pPr algn="ctr"/>
+            <a:endParaRPr/>
           </a:p>
         </p:txBody>
       </p:sp>
@@ -3387,131 +3397,411 @@
           </a:fontRef>
         </p:style>
         <p:txBody>
-          <a:bodyPr rtlCol="0" anchor="ctr" wrap="square"/>
-          <a:lstStyle/>
-          <a:p>
-            <a:r>
+          <a:bodyPr wrap="square" rtlCol="0" anchor="ctr"/>
+          <a:lstStyle/>
+          <a:p>
+            <a:r>
+              <a:rPr dirty="0">
+                <a:highlight>
+                  <a:srgbClr val="000080"/>
+                </a:highlight>
+              </a:rPr>
               <a:t># Python</a:t>
             </a:r>
           </a:p>
           <a:p>
             <a:r>
-              <a:t>__pycache__/</a:t>
-            </a:r>
-          </a:p>
-          <a:p>
-            <a:r>
-              <a:t>*.py[cod]</a:t>
-            </a:r>
-          </a:p>
-          <a:p/>
-          <a:p>
-            <a:r>
+              <a:rPr dirty="0">
+                <a:highlight>
+                  <a:srgbClr val="000080"/>
+                </a:highlight>
+              </a:rPr>
+              <a:t>__</a:t>
+            </a:r>
+            <a:r>
+              <a:rPr dirty="0" err="1">
+                <a:highlight>
+                  <a:srgbClr val="000080"/>
+                </a:highlight>
+              </a:rPr>
+              <a:t>pycache</a:t>
+            </a:r>
+            <a:r>
+              <a:rPr dirty="0">
+                <a:highlight>
+                  <a:srgbClr val="000080"/>
+                </a:highlight>
+              </a:rPr>
+              <a:t>__/</a:t>
+            </a:r>
+          </a:p>
+          <a:p>
+            <a:r>
+              <a:rPr dirty="0">
+                <a:highlight>
+                  <a:srgbClr val="000080"/>
+                </a:highlight>
+              </a:rPr>
+              <a:t>*.</a:t>
+            </a:r>
+            <a:r>
+              <a:rPr dirty="0" err="1">
+                <a:highlight>
+                  <a:srgbClr val="000080"/>
+                </a:highlight>
+              </a:rPr>
+              <a:t>py</a:t>
+            </a:r>
+            <a:r>
+              <a:rPr dirty="0">
+                <a:highlight>
+                  <a:srgbClr val="000080"/>
+                </a:highlight>
+              </a:rPr>
+              <a:t>[cod]</a:t>
+            </a:r>
+          </a:p>
+          <a:p>
+            <a:endParaRPr dirty="0">
+              <a:highlight>
+                <a:srgbClr val="000080"/>
+              </a:highlight>
+            </a:endParaRPr>
+          </a:p>
+          <a:p>
+            <a:r>
+              <a:rPr dirty="0">
+                <a:highlight>
+                  <a:srgbClr val="000080"/>
+                </a:highlight>
+              </a:rPr>
               <a:t># Virtual environments</a:t>
             </a:r>
           </a:p>
           <a:p>
             <a:r>
-              <a:t>.venv/</a:t>
-            </a:r>
-          </a:p>
-          <a:p>
-            <a:r>
-              <a:t>venv/</a:t>
-            </a:r>
-          </a:p>
-          <a:p>
-            <a:r>
+              <a:rPr dirty="0">
+                <a:highlight>
+                  <a:srgbClr val="000080"/>
+                </a:highlight>
+              </a:rPr>
+              <a:t>.</a:t>
+            </a:r>
+            <a:r>
+              <a:rPr dirty="0" err="1">
+                <a:highlight>
+                  <a:srgbClr val="000080"/>
+                </a:highlight>
+              </a:rPr>
+              <a:t>venv</a:t>
+            </a:r>
+            <a:r>
+              <a:rPr dirty="0">
+                <a:highlight>
+                  <a:srgbClr val="000080"/>
+                </a:highlight>
+              </a:rPr>
+              <a:t>/</a:t>
+            </a:r>
+          </a:p>
+          <a:p>
+            <a:r>
+              <a:rPr dirty="0" err="1">
+                <a:highlight>
+                  <a:srgbClr val="000080"/>
+                </a:highlight>
+              </a:rPr>
+              <a:t>venv</a:t>
+            </a:r>
+            <a:r>
+              <a:rPr dirty="0">
+                <a:highlight>
+                  <a:srgbClr val="000080"/>
+                </a:highlight>
+              </a:rPr>
+              <a:t>/</a:t>
+            </a:r>
+          </a:p>
+          <a:p>
+            <a:r>
+              <a:rPr dirty="0">
+                <a:highlight>
+                  <a:srgbClr val="000080"/>
+                </a:highlight>
+              </a:rPr>
               <a:t>env/</a:t>
             </a:r>
           </a:p>
-          <a:p/>
-          <a:p>
-            <a:r>
+          <a:p>
+            <a:endParaRPr dirty="0">
+              <a:highlight>
+                <a:srgbClr val="000080"/>
+              </a:highlight>
+            </a:endParaRPr>
+          </a:p>
+          <a:p>
+            <a:r>
+              <a:rPr dirty="0">
+                <a:highlight>
+                  <a:srgbClr val="000080"/>
+                </a:highlight>
+              </a:rPr>
               <a:t># Secrets / environment variables</a:t>
             </a:r>
           </a:p>
           <a:p>
             <a:r>
+              <a:rPr dirty="0">
+                <a:highlight>
+                  <a:srgbClr val="000080"/>
+                </a:highlight>
+              </a:rPr>
               <a:t>.env</a:t>
             </a:r>
           </a:p>
           <a:p>
             <a:r>
+              <a:rPr dirty="0">
+                <a:highlight>
+                  <a:srgbClr val="000080"/>
+                </a:highlight>
+              </a:rPr>
               <a:t>.env.*</a:t>
             </a:r>
           </a:p>
-          <a:p/>
-          <a:p>
-            <a:r>
+          <a:p>
+            <a:endParaRPr dirty="0">
+              <a:highlight>
+                <a:srgbClr val="000080"/>
+              </a:highlight>
+            </a:endParaRPr>
+          </a:p>
+          <a:p>
+            <a:r>
+              <a:rPr dirty="0">
+                <a:highlight>
+                  <a:srgbClr val="000080"/>
+                </a:highlight>
+              </a:rPr>
               <a:t># Microsoft Office temporary lock files</a:t>
             </a:r>
           </a:p>
           <a:p>
             <a:r>
+              <a:rPr dirty="0">
+                <a:highlight>
+                  <a:srgbClr val="000080"/>
+                </a:highlight>
+              </a:rPr>
               <a:t>~$*</a:t>
             </a:r>
           </a:p>
-          <a:p/>
-          <a:p>
-            <a:r>
+          <a:p>
+            <a:endParaRPr dirty="0">
+              <a:highlight>
+                <a:srgbClr val="000080"/>
+              </a:highlight>
+            </a:endParaRPr>
+          </a:p>
+          <a:p>
+            <a:r>
+              <a:rPr dirty="0">
+                <a:highlight>
+                  <a:srgbClr val="000080"/>
+                </a:highlight>
+              </a:rPr>
               <a:t># Terraform</a:t>
             </a:r>
           </a:p>
           <a:p>
             <a:r>
+              <a:rPr dirty="0">
+                <a:highlight>
+                  <a:srgbClr val="000080"/>
+                </a:highlight>
+              </a:rPr>
               <a:t>.terraform/</a:t>
             </a:r>
           </a:p>
           <a:p>
             <a:r>
-              <a:t>*.tfstate</a:t>
-            </a:r>
-          </a:p>
-          <a:p>
-            <a:r>
-              <a:t>*.tfstate.*</a:t>
-            </a:r>
-          </a:p>
-          <a:p>
-            <a:r>
-              <a:t>*.tfvars</a:t>
-            </a:r>
-          </a:p>
-          <a:p/>
-          <a:p>
-            <a:r>
+              <a:rPr dirty="0">
+                <a:highlight>
+                  <a:srgbClr val="000080"/>
+                </a:highlight>
+              </a:rPr>
+              <a:t>*.</a:t>
+            </a:r>
+            <a:r>
+              <a:rPr dirty="0" err="1">
+                <a:highlight>
+                  <a:srgbClr val="000080"/>
+                </a:highlight>
+              </a:rPr>
+              <a:t>tfstate</a:t>
+            </a:r>
+            <a:endParaRPr dirty="0">
+              <a:highlight>
+                <a:srgbClr val="000080"/>
+              </a:highlight>
+            </a:endParaRPr>
+          </a:p>
+          <a:p>
+            <a:r>
+              <a:rPr dirty="0">
+                <a:highlight>
+                  <a:srgbClr val="000080"/>
+                </a:highlight>
+              </a:rPr>
+              <a:t>*.</a:t>
+            </a:r>
+            <a:r>
+              <a:rPr dirty="0" err="1">
+                <a:highlight>
+                  <a:srgbClr val="000080"/>
+                </a:highlight>
+              </a:rPr>
+              <a:t>tfstate</a:t>
+            </a:r>
+            <a:r>
+              <a:rPr dirty="0">
+                <a:highlight>
+                  <a:srgbClr val="000080"/>
+                </a:highlight>
+              </a:rPr>
+              <a:t>.*</a:t>
+            </a:r>
+          </a:p>
+          <a:p>
+            <a:r>
+              <a:rPr dirty="0">
+                <a:highlight>
+                  <a:srgbClr val="000080"/>
+                </a:highlight>
+              </a:rPr>
+              <a:t>*.</a:t>
+            </a:r>
+            <a:r>
+              <a:rPr dirty="0" err="1">
+                <a:highlight>
+                  <a:srgbClr val="000080"/>
+                </a:highlight>
+              </a:rPr>
+              <a:t>tfvars</a:t>
+            </a:r>
+            <a:endParaRPr dirty="0">
+              <a:highlight>
+                <a:srgbClr val="000080"/>
+              </a:highlight>
+            </a:endParaRPr>
+          </a:p>
+          <a:p>
+            <a:endParaRPr dirty="0">
+              <a:highlight>
+                <a:srgbClr val="000080"/>
+              </a:highlight>
+            </a:endParaRPr>
+          </a:p>
+          <a:p>
+            <a:r>
+              <a:rPr dirty="0">
+                <a:highlight>
+                  <a:srgbClr val="000080"/>
+                </a:highlight>
+              </a:rPr>
               <a:t># Node / Next.js</a:t>
             </a:r>
           </a:p>
           <a:p>
             <a:r>
-              <a:t>node_modules/</a:t>
-            </a:r>
-          </a:p>
-          <a:p>
-            <a:r>
+              <a:rPr dirty="0" err="1">
+                <a:highlight>
+                  <a:srgbClr val="000080"/>
+                </a:highlight>
+              </a:rPr>
+              <a:t>node_modules</a:t>
+            </a:r>
+            <a:r>
+              <a:rPr dirty="0">
+                <a:highlight>
+                  <a:srgbClr val="000080"/>
+                </a:highlight>
+              </a:rPr>
+              <a:t>/</a:t>
+            </a:r>
+          </a:p>
+          <a:p>
+            <a:r>
+              <a:rPr dirty="0">
+                <a:highlight>
+                  <a:srgbClr val="000080"/>
+                </a:highlight>
+              </a:rPr>
               <a:t>.next/</a:t>
             </a:r>
           </a:p>
-          <a:p/>
-          <a:p>
-            <a:r>
+          <a:p>
+            <a:endParaRPr dirty="0">
+              <a:highlight>
+                <a:srgbClr val="000080"/>
+              </a:highlight>
+            </a:endParaRPr>
+          </a:p>
+          <a:p>
+            <a:r>
+              <a:rPr dirty="0">
+                <a:highlight>
+                  <a:srgbClr val="000080"/>
+                </a:highlight>
+              </a:rPr>
               <a:t># OS / logs</a:t>
             </a:r>
           </a:p>
           <a:p>
             <a:r>
+              <a:rPr dirty="0" err="1">
+                <a:highlight>
+                  <a:srgbClr val="000080"/>
+                </a:highlight>
+              </a:rPr>
               <a:t>Thumbs.db</a:t>
             </a:r>
-          </a:p>
-          <a:p>
-            <a:r>
-              <a:t>.DS_Store</a:t>
-            </a:r>
-          </a:p>
-          <a:p>
-            <a:r>
+            <a:endParaRPr dirty="0">
+              <a:highlight>
+                <a:srgbClr val="000080"/>
+              </a:highlight>
+            </a:endParaRPr>
+          </a:p>
+          <a:p>
+            <a:r>
+              <a:rPr dirty="0">
+                <a:highlight>
+                  <a:srgbClr val="000080"/>
+                </a:highlight>
+              </a:rPr>
+              <a:t>.</a:t>
+            </a:r>
+            <a:r>
+              <a:rPr dirty="0" err="1">
+                <a:highlight>
+                  <a:srgbClr val="000080"/>
+                </a:highlight>
+              </a:rPr>
+              <a:t>DS_Store</a:t>
+            </a:r>
+            <a:endParaRPr dirty="0">
+              <a:highlight>
+                <a:srgbClr val="000080"/>
+              </a:highlight>
+            </a:endParaRPr>
+          </a:p>
+          <a:p>
+            <a:r>
+              <a:rPr dirty="0">
+                <a:highlight>
+                  <a:srgbClr val="000080"/>
+                </a:highlight>
+              </a:rPr>
               <a:t>*.log</a:t>
             </a:r>
           </a:p>
@@ -3526,7 +3816,7 @@
 </file>
 
 <file path=ppt/slides/slide11.xml><?xml version="1.0" encoding="utf-8"?>
-<p:sld xmlns:a="http://schemas.openxmlformats.org/drawingml/2006/main" xmlns:p="http://schemas.openxmlformats.org/presentationml/2006/main" xmlns:r="http://schemas.openxmlformats.org/officeDocument/2006/relationships">
+<p:sld xmlns:a="http://schemas.openxmlformats.org/drawingml/2006/main" xmlns:r="http://schemas.openxmlformats.org/officeDocument/2006/relationships" xmlns:p="http://schemas.openxmlformats.org/presentationml/2006/main">
   <p:cSld>
     <p:bg>
       <p:bgPr>
@@ -3542,7 +3832,14 @@
         <p:cNvGrpSpPr/>
         <p:nvPr/>
       </p:nvGrpSpPr>
-      <p:grpSpPr/>
+      <p:grpSpPr>
+        <a:xfrm>
+          <a:off x="0" y="0"/>
+          <a:ext cx="0" cy="0"/>
+          <a:chOff x="0" y="0"/>
+          <a:chExt cx="0" cy="0"/>
+        </a:xfrm>
+      </p:grpSpPr>
       <p:sp>
         <p:nvSpPr>
           <p:cNvPr id="2" name="TextBox 1"/>
@@ -3618,6 +3915,7 @@
           <a:lstStyle/>
           <a:p>
             <a:pPr algn="ctr"/>
+            <a:endParaRPr/>
           </a:p>
         </p:txBody>
       </p:sp>
@@ -3718,7 +4016,7 @@
 </file>
 
 <file path=ppt/slides/slide12.xml><?xml version="1.0" encoding="utf-8"?>
-<p:sld xmlns:a="http://schemas.openxmlformats.org/drawingml/2006/main" xmlns:p="http://schemas.openxmlformats.org/presentationml/2006/main" xmlns:r="http://schemas.openxmlformats.org/officeDocument/2006/relationships">
+<p:sld xmlns:a="http://schemas.openxmlformats.org/drawingml/2006/main" xmlns:r="http://schemas.openxmlformats.org/officeDocument/2006/relationships" xmlns:p="http://schemas.openxmlformats.org/presentationml/2006/main">
   <p:cSld>
     <p:bg>
       <p:bgPr>
@@ -3734,7 +4032,14 @@
         <p:cNvGrpSpPr/>
         <p:nvPr/>
       </p:nvGrpSpPr>
-      <p:grpSpPr/>
+      <p:grpSpPr>
+        <a:xfrm>
+          <a:off x="0" y="0"/>
+          <a:ext cx="0" cy="0"/>
+          <a:chOff x="0" y="0"/>
+          <a:chExt cx="0" cy="0"/>
+        </a:xfrm>
+      </p:grpSpPr>
       <p:sp>
         <p:nvSpPr>
           <p:cNvPr id="2" name="TextBox 1"/>
@@ -3810,6 +4115,7 @@
           <a:lstStyle/>
           <a:p>
             <a:pPr algn="ctr"/>
+            <a:endParaRPr/>
           </a:p>
         </p:txBody>
       </p:sp>
@@ -3886,7 +4192,7 @@
           </a:fontRef>
         </p:style>
         <p:txBody>
-          <a:bodyPr rtlCol="0" anchor="ctr" wrap="square"/>
+          <a:bodyPr wrap="square" rtlCol="0" anchor="ctr"/>
           <a:lstStyle/>
           <a:p>
             <a:r>
@@ -3913,7 +4219,9 @@
               <a:t>        └── requirements.txt</a:t>
             </a:r>
           </a:p>
-          <a:p/>
+          <a:p>
+            <a:endParaRPr/>
+          </a:p>
           <a:p>
             <a:r>
               <a:t># Purpose:</a:t>
@@ -3934,7 +4242,9 @@
               <a:t># Later, each real microservice exposes its own health endpoint.</a:t>
             </a:r>
           </a:p>
-          <a:p/>
+          <a:p>
+            <a:endParaRPr/>
+          </a:p>
           <a:p>
             <a:r>
               <a:t># Examples:</a:t>
@@ -3966,7 +4276,7 @@
 </file>
 
 <file path=ppt/slides/slide13.xml><?xml version="1.0" encoding="utf-8"?>
-<p:sld xmlns:a="http://schemas.openxmlformats.org/drawingml/2006/main" xmlns:p="http://schemas.openxmlformats.org/presentationml/2006/main" xmlns:r="http://schemas.openxmlformats.org/officeDocument/2006/relationships">
+<p:sld xmlns:a="http://schemas.openxmlformats.org/drawingml/2006/main" xmlns:r="http://schemas.openxmlformats.org/officeDocument/2006/relationships" xmlns:p="http://schemas.openxmlformats.org/presentationml/2006/main">
   <p:cSld>
     <p:bg>
       <p:bgPr>
@@ -3982,7 +4292,14 @@
         <p:cNvGrpSpPr/>
         <p:nvPr/>
       </p:nvGrpSpPr>
-      <p:grpSpPr/>
+      <p:grpSpPr>
+        <a:xfrm>
+          <a:off x="0" y="0"/>
+          <a:ext cx="0" cy="0"/>
+          <a:chOff x="0" y="0"/>
+          <a:chExt cx="0" cy="0"/>
+        </a:xfrm>
+      </p:grpSpPr>
       <p:sp>
         <p:nvSpPr>
           <p:cNvPr id="2" name="TextBox 1"/>
@@ -4058,6 +4375,7 @@
           <a:lstStyle/>
           <a:p>
             <a:pPr algn="ctr"/>
+            <a:endParaRPr/>
           </a:p>
         </p:txBody>
       </p:sp>
@@ -4134,64 +4452,117 @@
           </a:fontRef>
         </p:style>
         <p:txBody>
-          <a:bodyPr rtlCol="0" anchor="ctr" wrap="square"/>
-          <a:lstStyle/>
-          <a:p>
-            <a:r>
+          <a:bodyPr wrap="square" rtlCol="0" anchor="ctr"/>
+          <a:lstStyle/>
+          <a:p>
+            <a:r>
+              <a:rPr dirty="0"/>
               <a:t># From car-rental-microservices repository root</a:t>
             </a:r>
           </a:p>
           <a:p>
             <a:r>
+              <a:rPr dirty="0"/>
               <a:t>cd Webapp\services\platform-health</a:t>
             </a:r>
           </a:p>
-          <a:p/>
-          <a:p>
-            <a:r>
+          <a:p>
+            <a:endParaRPr dirty="0"/>
+          </a:p>
+          <a:p>
+            <a:r>
+              <a:rPr dirty="0"/>
               <a:t># Create an isolated Python environment for this service.</a:t>
             </a:r>
           </a:p>
           <a:p>
             <a:r>
-              <a:t>python -m venv .venv</a:t>
-            </a:r>
-          </a:p>
-          <a:p/>
-          <a:p>
-            <a:r>
+              <a:rPr dirty="0"/>
+              <a:t>python -m </a:t>
+            </a:r>
+            <a:r>
+              <a:rPr dirty="0" err="1"/>
+              <a:t>venv</a:t>
+            </a:r>
+            <a:r>
+              <a:rPr dirty="0"/>
+              <a:t> .</a:t>
+            </a:r>
+            <a:r>
+              <a:rPr dirty="0" err="1"/>
+              <a:t>venv</a:t>
+            </a:r>
+            <a:endParaRPr dirty="0"/>
+          </a:p>
+          <a:p>
+            <a:endParaRPr dirty="0"/>
+          </a:p>
+          <a:p>
+            <a:r>
+              <a:rPr dirty="0"/>
               <a:t># Activate it in PowerShell.</a:t>
             </a:r>
           </a:p>
           <a:p>
             <a:r>
-              <a:t>.\.venv\Scripts\Activate.ps1</a:t>
-            </a:r>
-          </a:p>
-          <a:p/>
-          <a:p>
-            <a:r>
+              <a:rPr lang="en-US" dirty="0"/>
+              <a:t>source .</a:t>
+            </a:r>
+            <a:r>
+              <a:rPr lang="en-US" dirty="0" err="1"/>
+              <a:t>venv</a:t>
+            </a:r>
+            <a:r>
+              <a:rPr lang="en-US" dirty="0"/>
+              <a:t>/Scripts/activate</a:t>
+            </a:r>
+          </a:p>
+          <a:p>
+            <a:endParaRPr dirty="0"/>
+          </a:p>
+          <a:p>
+            <a:r>
+              <a:rPr dirty="0"/>
               <a:t># Upgrade pip and install the web framework/server.</a:t>
             </a:r>
           </a:p>
           <a:p>
             <a:r>
+              <a:rPr dirty="0"/>
               <a:t>python -m pip install --upgrade pip</a:t>
             </a:r>
           </a:p>
           <a:p>
             <a:r>
-              <a:t>pip install fastapi uvicorn</a:t>
-            </a:r>
-          </a:p>
-          <a:p/>
-          <a:p>
-            <a:r>
+              <a:rPr dirty="0"/>
+              <a:t>pip install </a:t>
+            </a:r>
+            <a:r>
+              <a:rPr dirty="0" err="1"/>
+              <a:t>fastapi</a:t>
+            </a:r>
+            <a:r>
+              <a:rPr dirty="0"/>
+              <a:t> </a:t>
+            </a:r>
+            <a:r>
+              <a:rPr dirty="0" err="1"/>
+              <a:t>uvicorn</a:t>
+            </a:r>
+            <a:endParaRPr dirty="0"/>
+          </a:p>
+          <a:p>
+            <a:endParaRPr dirty="0"/>
+          </a:p>
+          <a:p>
+            <a:r>
+              <a:rPr dirty="0"/>
               <a:t># Confirm installed packages.</a:t>
             </a:r>
           </a:p>
           <a:p>
             <a:r>
+              <a:rPr dirty="0"/>
               <a:t>pip list</a:t>
             </a:r>
           </a:p>
@@ -4206,7 +4577,7 @@
 </file>
 
 <file path=ppt/slides/slide14.xml><?xml version="1.0" encoding="utf-8"?>
-<p:sld xmlns:a="http://schemas.openxmlformats.org/drawingml/2006/main" xmlns:p="http://schemas.openxmlformats.org/presentationml/2006/main" xmlns:r="http://schemas.openxmlformats.org/officeDocument/2006/relationships">
+<p:sld xmlns:a="http://schemas.openxmlformats.org/drawingml/2006/main" xmlns:r="http://schemas.openxmlformats.org/officeDocument/2006/relationships" xmlns:p="http://schemas.openxmlformats.org/presentationml/2006/main">
   <p:cSld>
     <p:bg>
       <p:bgPr>
@@ -4222,7 +4593,14 @@
         <p:cNvGrpSpPr/>
         <p:nvPr/>
       </p:nvGrpSpPr>
-      <p:grpSpPr/>
+      <p:grpSpPr>
+        <a:xfrm>
+          <a:off x="0" y="0"/>
+          <a:ext cx="0" cy="0"/>
+          <a:chOff x="0" y="0"/>
+          <a:chExt cx="0" cy="0"/>
+        </a:xfrm>
+      </p:grpSpPr>
       <p:sp>
         <p:nvSpPr>
           <p:cNvPr id="2" name="TextBox 1"/>
@@ -4333,6 +4711,7 @@
           <a:lstStyle/>
           <a:p>
             <a:pPr algn="ctr"/>
+            <a:endParaRPr/>
           </a:p>
         </p:txBody>
       </p:sp>
@@ -4379,7 +4758,7 @@
         </p:nvSpPr>
         <p:spPr>
           <a:xfrm>
-            <a:off x="731520" y="1325880"/>
+            <a:off x="652272" y="969264"/>
             <a:ext cx="10789920" cy="5074920"/>
           </a:xfrm>
           <a:prstGeom prst="roundRect">
@@ -4409,118 +4788,339 @@
           </a:fontRef>
         </p:style>
         <p:txBody>
-          <a:bodyPr rtlCol="0" anchor="ctr" wrap="square"/>
-          <a:lstStyle/>
-          <a:p>
-            <a:r>
-              <a:t>from fastapi import FastAPI</a:t>
-            </a:r>
-          </a:p>
-          <a:p/>
-          <a:p>
-            <a:r>
-              <a:t># Create the FastAPI application object.</a:t>
-            </a:r>
-          </a:p>
-          <a:p>
-            <a:r>
-              <a:t># Uvicorn loads this object and exposes it over HTTP.</a:t>
-            </a:r>
-          </a:p>
-          <a:p>
-            <a:r>
-              <a:t>app = FastAPI(</a:t>
-            </a:r>
-          </a:p>
-          <a:p>
-            <a:r>
+          <a:bodyPr wrap="square" rtlCol="0" anchor="ctr"/>
+          <a:lstStyle/>
+          <a:p>
+            <a:r>
+              <a:rPr dirty="0">
+                <a:highlight>
+                  <a:srgbClr val="000080"/>
+                </a:highlight>
+              </a:rPr>
+              <a:t>from </a:t>
+            </a:r>
+            <a:r>
+              <a:rPr dirty="0" err="1">
+                <a:highlight>
+                  <a:srgbClr val="000080"/>
+                </a:highlight>
+              </a:rPr>
+              <a:t>fastapi</a:t>
+            </a:r>
+            <a:r>
+              <a:rPr dirty="0">
+                <a:highlight>
+                  <a:srgbClr val="000080"/>
+                </a:highlight>
+              </a:rPr>
+              <a:t> import </a:t>
+            </a:r>
+            <a:r>
+              <a:rPr dirty="0" err="1">
+                <a:highlight>
+                  <a:srgbClr val="000080"/>
+                </a:highlight>
+              </a:rPr>
+              <a:t>FastAPI</a:t>
+            </a:r>
+            <a:endParaRPr dirty="0">
+              <a:highlight>
+                <a:srgbClr val="000080"/>
+              </a:highlight>
+            </a:endParaRPr>
+          </a:p>
+          <a:p>
+            <a:endParaRPr dirty="0">
+              <a:highlight>
+                <a:srgbClr val="000080"/>
+              </a:highlight>
+            </a:endParaRPr>
+          </a:p>
+          <a:p>
+            <a:r>
+              <a:rPr dirty="0">
+                <a:highlight>
+                  <a:srgbClr val="000080"/>
+                </a:highlight>
+              </a:rPr>
+              <a:t># Create the </a:t>
+            </a:r>
+            <a:r>
+              <a:rPr dirty="0" err="1">
+                <a:highlight>
+                  <a:srgbClr val="000080"/>
+                </a:highlight>
+              </a:rPr>
+              <a:t>FastAPI</a:t>
+            </a:r>
+            <a:r>
+              <a:rPr dirty="0">
+                <a:highlight>
+                  <a:srgbClr val="000080"/>
+                </a:highlight>
+              </a:rPr>
+              <a:t> application object.</a:t>
+            </a:r>
+          </a:p>
+          <a:p>
+            <a:r>
+              <a:rPr dirty="0">
+                <a:highlight>
+                  <a:srgbClr val="000080"/>
+                </a:highlight>
+              </a:rPr>
+              <a:t># </a:t>
+            </a:r>
+            <a:r>
+              <a:rPr dirty="0" err="1">
+                <a:highlight>
+                  <a:srgbClr val="000080"/>
+                </a:highlight>
+              </a:rPr>
+              <a:t>Uvicorn</a:t>
+            </a:r>
+            <a:r>
+              <a:rPr dirty="0">
+                <a:highlight>
+                  <a:srgbClr val="000080"/>
+                </a:highlight>
+              </a:rPr>
+              <a:t> loads this object and exposes it over HTTP.</a:t>
+            </a:r>
+          </a:p>
+          <a:p>
+            <a:r>
+              <a:rPr dirty="0">
+                <a:highlight>
+                  <a:srgbClr val="000080"/>
+                </a:highlight>
+              </a:rPr>
+              <a:t>app = </a:t>
+            </a:r>
+            <a:r>
+              <a:rPr dirty="0" err="1">
+                <a:highlight>
+                  <a:srgbClr val="000080"/>
+                </a:highlight>
+              </a:rPr>
+              <a:t>FastAPI</a:t>
+            </a:r>
+            <a:r>
+              <a:rPr dirty="0">
+                <a:highlight>
+                  <a:srgbClr val="000080"/>
+                </a:highlight>
+              </a:rPr>
+              <a:t>(</a:t>
+            </a:r>
+          </a:p>
+          <a:p>
+            <a:r>
+              <a:rPr dirty="0">
+                <a:highlight>
+                  <a:srgbClr val="000080"/>
+                </a:highlight>
+              </a:rPr>
               <a:t>    title="Car Rental Platform Health Service",</a:t>
             </a:r>
           </a:p>
           <a:p>
             <a:r>
+              <a:rPr dirty="0">
+                <a:highlight>
+                  <a:srgbClr val="000080"/>
+                </a:highlight>
+              </a:rPr>
               <a:t>    description="Project 1 development environment test.",</a:t>
             </a:r>
           </a:p>
           <a:p>
             <a:r>
+              <a:rPr dirty="0">
+                <a:highlight>
+                  <a:srgbClr val="000080"/>
+                </a:highlight>
+              </a:rPr>
               <a:t>    version="1.0.0",</a:t>
             </a:r>
           </a:p>
           <a:p>
             <a:r>
+              <a:rPr dirty="0">
+                <a:highlight>
+                  <a:srgbClr val="000080"/>
+                </a:highlight>
+              </a:rPr>
               <a:t>)</a:t>
             </a:r>
           </a:p>
-          <a:p/>
-          <a:p>
-            <a:r>
+          <a:p>
+            <a:endParaRPr dirty="0">
+              <a:highlight>
+                <a:srgbClr val="000080"/>
+              </a:highlight>
+            </a:endParaRPr>
+          </a:p>
+          <a:p>
+            <a:r>
+              <a:rPr dirty="0">
+                <a:highlight>
+                  <a:srgbClr val="000080"/>
+                </a:highlight>
+              </a:rPr>
               <a:t># GET / proves the API itself is responding.</a:t>
             </a:r>
           </a:p>
           <a:p>
             <a:r>
+              <a:rPr dirty="0">
+                <a:highlight>
+                  <a:srgbClr val="000080"/>
+                </a:highlight>
+              </a:rPr>
               <a:t>@app.get("/")</a:t>
             </a:r>
           </a:p>
           <a:p>
             <a:r>
+              <a:rPr dirty="0">
+                <a:highlight>
+                  <a:srgbClr val="000080"/>
+                </a:highlight>
+              </a:rPr>
               <a:t>def root():</a:t>
             </a:r>
           </a:p>
           <a:p>
             <a:r>
+              <a:rPr dirty="0">
+                <a:highlight>
+                  <a:srgbClr val="000080"/>
+                </a:highlight>
+              </a:rPr>
               <a:t>    return {</a:t>
             </a:r>
           </a:p>
           <a:p>
             <a:r>
+              <a:rPr dirty="0">
+                <a:highlight>
+                  <a:srgbClr val="000080"/>
+                </a:highlight>
+              </a:rPr>
               <a:t>        "application": "car-rental-microservices",</a:t>
             </a:r>
           </a:p>
           <a:p>
             <a:r>
+              <a:rPr dirty="0">
+                <a:highlight>
+                  <a:srgbClr val="000080"/>
+                </a:highlight>
+              </a:rPr>
               <a:t>        "message": "Car Rental Platform API is running",</a:t>
             </a:r>
           </a:p>
           <a:p>
             <a:r>
+              <a:rPr dirty="0">
+                <a:highlight>
+                  <a:srgbClr val="000080"/>
+                </a:highlight>
+              </a:rPr>
               <a:t>    }</a:t>
             </a:r>
           </a:p>
-          <a:p/>
-          <a:p>
-            <a:r>
+          <a:p>
+            <a:endParaRPr dirty="0">
+              <a:highlight>
+                <a:srgbClr val="000080"/>
+              </a:highlight>
+            </a:endParaRPr>
+          </a:p>
+          <a:p>
+            <a:r>
+              <a:rPr dirty="0">
+                <a:highlight>
+                  <a:srgbClr val="000080"/>
+                </a:highlight>
+              </a:rPr>
               <a:t># GET /health proves the service is alive and responding.</a:t>
             </a:r>
           </a:p>
           <a:p>
             <a:r>
+              <a:rPr dirty="0">
+                <a:highlight>
+                  <a:srgbClr val="000080"/>
+                </a:highlight>
+              </a:rPr>
               <a:t>@app.get("/health")</a:t>
             </a:r>
           </a:p>
           <a:p>
             <a:r>
-              <a:t>def health_check():</a:t>
-            </a:r>
-          </a:p>
-          <a:p>
-            <a:r>
+              <a:rPr dirty="0">
+                <a:highlight>
+                  <a:srgbClr val="000080"/>
+                </a:highlight>
+              </a:rPr>
+              <a:t>def </a:t>
+            </a:r>
+            <a:r>
+              <a:rPr dirty="0" err="1">
+                <a:highlight>
+                  <a:srgbClr val="000080"/>
+                </a:highlight>
+              </a:rPr>
+              <a:t>health_check</a:t>
+            </a:r>
+            <a:r>
+              <a:rPr dirty="0">
+                <a:highlight>
+                  <a:srgbClr val="000080"/>
+                </a:highlight>
+              </a:rPr>
+              <a:t>():</a:t>
+            </a:r>
+          </a:p>
+          <a:p>
+            <a:r>
+              <a:rPr dirty="0">
+                <a:highlight>
+                  <a:srgbClr val="000080"/>
+                </a:highlight>
+              </a:rPr>
               <a:t>    return {</a:t>
             </a:r>
           </a:p>
           <a:p>
             <a:r>
+              <a:rPr dirty="0">
+                <a:highlight>
+                  <a:srgbClr val="000080"/>
+                </a:highlight>
+              </a:rPr>
               <a:t>        "status": "healthy",</a:t>
             </a:r>
           </a:p>
           <a:p>
             <a:r>
+              <a:rPr dirty="0">
+                <a:highlight>
+                  <a:srgbClr val="000080"/>
+                </a:highlight>
+              </a:rPr>
               <a:t>        "service": "platform-health",</a:t>
             </a:r>
           </a:p>
           <a:p>
             <a:r>
+              <a:rPr dirty="0">
+                <a:highlight>
+                  <a:srgbClr val="000080"/>
+                </a:highlight>
+              </a:rPr>
               <a:t>    }</a:t>
             </a:r>
           </a:p>
@@ -4535,7 +5135,7 @@
 </file>
 
 <file path=ppt/slides/slide15.xml><?xml version="1.0" encoding="utf-8"?>
-<p:sld xmlns:a="http://schemas.openxmlformats.org/drawingml/2006/main" xmlns:p="http://schemas.openxmlformats.org/presentationml/2006/main" xmlns:r="http://schemas.openxmlformats.org/officeDocument/2006/relationships">
+<p:sld xmlns:a="http://schemas.openxmlformats.org/drawingml/2006/main" xmlns:r="http://schemas.openxmlformats.org/officeDocument/2006/relationships" xmlns:p="http://schemas.openxmlformats.org/presentationml/2006/main">
   <p:cSld>
     <p:bg>
       <p:bgPr>
@@ -4551,7 +5151,14 @@
         <p:cNvGrpSpPr/>
         <p:nvPr/>
       </p:nvGrpSpPr>
-      <p:grpSpPr/>
+      <p:grpSpPr>
+        <a:xfrm>
+          <a:off x="0" y="0"/>
+          <a:ext cx="0" cy="0"/>
+          <a:chOff x="0" y="0"/>
+          <a:chExt cx="0" cy="0"/>
+        </a:xfrm>
+      </p:grpSpPr>
       <p:sp>
         <p:nvSpPr>
           <p:cNvPr id="2" name="TextBox 1"/>
@@ -4627,6 +5234,7 @@
           <a:lstStyle/>
           <a:p>
             <a:pPr algn="ctr"/>
+            <a:endParaRPr/>
           </a:p>
         </p:txBody>
       </p:sp>
@@ -4703,7 +5311,7 @@
           </a:fontRef>
         </p:style>
         <p:txBody>
-          <a:bodyPr rtlCol="0" anchor="ctr" wrap="square"/>
+          <a:bodyPr wrap="square" rtlCol="0" anchor="ctr"/>
           <a:lstStyle/>
           <a:p>
             <a:pPr algn="ctr">
@@ -4715,37 +5323,99 @@
               </a:defRPr>
             </a:pPr>
             <a:r>
-              <a:t>uvicorn main:app --reload</a:t>
-            </a:r>
-            <a:br/>
-            <a:br/>
-            <a:r>
+              <a:rPr dirty="0" err="1"/>
+              <a:t>uvicorn</a:t>
+            </a:r>
+            <a:r>
+              <a:rPr dirty="0"/>
+              <a:t> </a:t>
+            </a:r>
+            <a:r>
+              <a:rPr dirty="0" err="1"/>
+              <a:t>main:app</a:t>
+            </a:r>
+            <a:r>
+              <a:rPr dirty="0"/>
+              <a:t> --reload</a:t>
+            </a:r>
+            <a:br>
+              <a:rPr dirty="0"/>
+            </a:br>
+            <a:br>
+              <a:rPr dirty="0"/>
+            </a:br>
+            <a:r>
+              <a:rPr dirty="0"/>
               <a:t># Meaning:</a:t>
             </a:r>
-            <a:br/>
-            <a:r>
-              <a:t># uvicorn  -&gt; ASGI web server</a:t>
-            </a:r>
-            <a:br/>
-            <a:r>
+            <a:br>
+              <a:rPr dirty="0"/>
+            </a:br>
+            <a:r>
+              <a:rPr dirty="0"/>
+              <a:t># </a:t>
+            </a:r>
+            <a:r>
+              <a:rPr dirty="0" err="1"/>
+              <a:t>uvicorn</a:t>
+            </a:r>
+            <a:r>
+              <a:rPr dirty="0"/>
+              <a:t>  -&gt; ASGI web server</a:t>
+            </a:r>
+            <a:br>
+              <a:rPr dirty="0"/>
+            </a:br>
+            <a:r>
+              <a:rPr dirty="0"/>
               <a:t># main     -&gt; main.py</a:t>
             </a:r>
-            <a:br/>
-            <a:r>
-              <a:t># app      -&gt; FastAPI object named "app"</a:t>
-            </a:r>
-            <a:br/>
-            <a:r>
+            <a:br>
+              <a:rPr dirty="0"/>
+            </a:br>
+            <a:r>
+              <a:rPr dirty="0"/>
+              <a:t># app      -&gt; </a:t>
+            </a:r>
+            <a:r>
+              <a:rPr dirty="0" err="1"/>
+              <a:t>FastAPI</a:t>
+            </a:r>
+            <a:r>
+              <a:rPr dirty="0"/>
+              <a:t> object named "app"</a:t>
+            </a:r>
+            <a:br>
+              <a:rPr dirty="0"/>
+            </a:br>
+            <a:r>
+              <a:rPr dirty="0"/>
               <a:t># --reload -&gt; automatically restart after code changes</a:t>
             </a:r>
-            <a:br/>
-            <a:br/>
-            <a:r>
+            <a:br>
+              <a:rPr dirty="0"/>
+            </a:br>
+            <a:br>
+              <a:rPr dirty="0"/>
+            </a:br>
+            <a:r>
+              <a:rPr dirty="0"/>
               <a:t># Expected:</a:t>
             </a:r>
-            <a:br/>
-            <a:r>
-              <a:t># Uvicorn running on http://127.0.0.1:8000</a:t>
+            <a:br>
+              <a:rPr dirty="0"/>
+            </a:br>
+            <a:r>
+              <a:rPr dirty="0"/>
+              <a:t># </a:t>
+            </a:r>
+            <a:r>
+              <a:rPr dirty="0" err="1"/>
+              <a:t>Uvicorn</a:t>
+            </a:r>
+            <a:r>
+              <a:rPr dirty="0"/>
+              <a:t> running on http://127.0.0.1:8000</a:t>
             </a:r>
           </a:p>
         </p:txBody>
@@ -4797,7 +5467,7 @@
 </file>
 
 <file path=ppt/slides/slide16.xml><?xml version="1.0" encoding="utf-8"?>
-<p:sld xmlns:a="http://schemas.openxmlformats.org/drawingml/2006/main" xmlns:p="http://schemas.openxmlformats.org/presentationml/2006/main" xmlns:r="http://schemas.openxmlformats.org/officeDocument/2006/relationships">
+<p:sld xmlns:a="http://schemas.openxmlformats.org/drawingml/2006/main" xmlns:r="http://schemas.openxmlformats.org/officeDocument/2006/relationships" xmlns:p="http://schemas.openxmlformats.org/presentationml/2006/main">
   <p:cSld>
     <p:bg>
       <p:bgPr>
@@ -4813,7 +5483,14 @@
         <p:cNvGrpSpPr/>
         <p:nvPr/>
       </p:nvGrpSpPr>
-      <p:grpSpPr/>
+      <p:grpSpPr>
+        <a:xfrm>
+          <a:off x="0" y="0"/>
+          <a:ext cx="0" cy="0"/>
+          <a:chOff x="0" y="0"/>
+          <a:chExt cx="0" cy="0"/>
+        </a:xfrm>
+      </p:grpSpPr>
       <p:sp>
         <p:nvSpPr>
           <p:cNvPr id="2" name="TextBox 1"/>
@@ -4889,6 +5566,7 @@
           <a:lstStyle/>
           <a:p>
             <a:pPr algn="ctr"/>
+            <a:endParaRPr/>
           </a:p>
         </p:txBody>
       </p:sp>
@@ -4960,6 +5638,7 @@
               </a:defRPr>
             </a:pPr>
             <a:r>
+              <a:rPr dirty="0"/>
               <a:t>Open http://127.0.0.1:8000 — verify the root JSON response.</a:t>
             </a:r>
           </a:p>
@@ -4975,6 +5654,7 @@
               </a:defRPr>
             </a:pPr>
             <a:r>
+              <a:rPr dirty="0"/>
               <a:t>Open http://127.0.0.1:8000/health — verify status = healthy.</a:t>
             </a:r>
           </a:p>
@@ -4990,7 +5670,24 @@
               </a:defRPr>
             </a:pPr>
             <a:r>
-              <a:t>Open http://127.0.0.1:8000/docs — FastAPI automatically generates Swagger/OpenAPI documentation.</a:t>
+              <a:rPr dirty="0"/>
+              <a:t>Open http://127.0.0.1:8000/docs — </a:t>
+            </a:r>
+            <a:r>
+              <a:rPr dirty="0" err="1"/>
+              <a:t>FastAPI</a:t>
+            </a:r>
+            <a:r>
+              <a:rPr dirty="0"/>
+              <a:t> automatically generates Swagger/</a:t>
+            </a:r>
+            <a:r>
+              <a:rPr dirty="0" err="1"/>
+              <a:t>OpenAPI</a:t>
+            </a:r>
+            <a:r>
+              <a:rPr dirty="0"/>
+              <a:t> documentation.</a:t>
             </a:r>
           </a:p>
           <a:p>
@@ -5005,6 +5702,7 @@
               </a:defRPr>
             </a:pPr>
             <a:r>
+              <a:rPr dirty="0"/>
               <a:t>Select GET /health → Try it out → Execute.</a:t>
             </a:r>
           </a:p>
@@ -5020,6 +5718,7 @@
               </a:defRPr>
             </a:pPr>
             <a:r>
+              <a:rPr dirty="0"/>
               <a:t>Expected HTTP status: 200 OK.</a:t>
             </a:r>
           </a:p>
@@ -5034,7 +5733,7 @@
 </file>
 
 <file path=ppt/slides/slide17.xml><?xml version="1.0" encoding="utf-8"?>
-<p:sld xmlns:a="http://schemas.openxmlformats.org/drawingml/2006/main" xmlns:p="http://schemas.openxmlformats.org/presentationml/2006/main" xmlns:r="http://schemas.openxmlformats.org/officeDocument/2006/relationships">
+<p:sld xmlns:a="http://schemas.openxmlformats.org/drawingml/2006/main" xmlns:r="http://schemas.openxmlformats.org/officeDocument/2006/relationships" xmlns:p="http://schemas.openxmlformats.org/presentationml/2006/main">
   <p:cSld>
     <p:bg>
       <p:bgPr>
@@ -5050,7 +5749,14 @@
         <p:cNvGrpSpPr/>
         <p:nvPr/>
       </p:nvGrpSpPr>
-      <p:grpSpPr/>
+      <p:grpSpPr>
+        <a:xfrm>
+          <a:off x="0" y="0"/>
+          <a:ext cx="0" cy="0"/>
+          <a:chOff x="0" y="0"/>
+          <a:chExt cx="0" cy="0"/>
+        </a:xfrm>
+      </p:grpSpPr>
       <p:sp>
         <p:nvSpPr>
           <p:cNvPr id="2" name="TextBox 1"/>
@@ -5126,6 +5832,7 @@
           <a:lstStyle/>
           <a:p>
             <a:pPr algn="ctr"/>
+            <a:endParaRPr/>
           </a:p>
         </p:txBody>
       </p:sp>
@@ -5202,7 +5909,7 @@
           </a:fontRef>
         </p:style>
         <p:txBody>
-          <a:bodyPr rtlCol="0" anchor="ctr" wrap="square"/>
+          <a:bodyPr wrap="square" rtlCol="0" anchor="ctr"/>
           <a:lstStyle/>
           <a:p>
             <a:pPr algn="ctr">
@@ -5214,37 +5921,73 @@
               </a:defRPr>
             </a:pPr>
             <a:r>
+              <a:rPr dirty="0"/>
               <a:t># Test the endpoint without a browser.</a:t>
             </a:r>
-            <a:br/>
-            <a:r>
+            <a:br>
+              <a:rPr dirty="0"/>
+            </a:br>
+            <a:r>
+              <a:rPr dirty="0"/>
               <a:t>curl.exe http://127.0.0.1:8000/health</a:t>
             </a:r>
-            <a:br/>
-            <a:br/>
-            <a:r>
+            <a:br>
+              <a:rPr dirty="0"/>
+            </a:br>
+            <a:br>
+              <a:rPr dirty="0"/>
+            </a:br>
+            <a:r>
+              <a:rPr dirty="0"/>
               <a:t># Capture exact Python dependencies.</a:t>
             </a:r>
-            <a:br/>
-            <a:r>
+            <a:br>
+              <a:rPr dirty="0"/>
+            </a:br>
+            <a:r>
+              <a:rPr dirty="0"/>
               <a:t>pip freeze &gt; requirements.txt</a:t>
             </a:r>
-            <a:br/>
-            <a:br/>
-            <a:r>
-              <a:t># Stop Uvicorn.</a:t>
-            </a:r>
-            <a:br/>
-            <a:r>
+            <a:br>
+              <a:rPr dirty="0"/>
+            </a:br>
+            <a:br>
+              <a:rPr dirty="0"/>
+            </a:br>
+            <a:r>
+              <a:rPr dirty="0"/>
+              <a:t># Stop </a:t>
+            </a:r>
+            <a:r>
+              <a:rPr dirty="0" err="1"/>
+              <a:t>Uvicorn</a:t>
+            </a:r>
+            <a:r>
+              <a:rPr dirty="0"/>
+              <a:t>.</a:t>
+            </a:r>
+            <a:br>
+              <a:rPr dirty="0"/>
+            </a:br>
+            <a:r>
+              <a:rPr dirty="0"/>
               <a:t>CTRL + C</a:t>
             </a:r>
-            <a:br/>
-            <a:br/>
-            <a:r>
+            <a:br>
+              <a:rPr dirty="0"/>
+            </a:br>
+            <a:br>
+              <a:rPr dirty="0"/>
+            </a:br>
+            <a:r>
+              <a:rPr dirty="0"/>
               <a:t># Leave the virtual environment.</a:t>
             </a:r>
-            <a:br/>
-            <a:r>
+            <a:br>
+              <a:rPr dirty="0"/>
+            </a:br>
+            <a:r>
+              <a:rPr dirty="0"/>
               <a:t>deactivate</a:t>
             </a:r>
           </a:p>
@@ -5297,7 +6040,7 @@
 </file>
 
 <file path=ppt/slides/slide18.xml><?xml version="1.0" encoding="utf-8"?>
-<p:sld xmlns:a="http://schemas.openxmlformats.org/drawingml/2006/main" xmlns:p="http://schemas.openxmlformats.org/presentationml/2006/main" xmlns:r="http://schemas.openxmlformats.org/officeDocument/2006/relationships">
+<p:sld xmlns:a="http://schemas.openxmlformats.org/drawingml/2006/main" xmlns:r="http://schemas.openxmlformats.org/officeDocument/2006/relationships" xmlns:p="http://schemas.openxmlformats.org/presentationml/2006/main">
   <p:cSld>
     <p:bg>
       <p:bgPr>
@@ -5313,7 +6056,14 @@
         <p:cNvGrpSpPr/>
         <p:nvPr/>
       </p:nvGrpSpPr>
-      <p:grpSpPr/>
+      <p:grpSpPr>
+        <a:xfrm>
+          <a:off x="0" y="0"/>
+          <a:ext cx="0" cy="0"/>
+          <a:chOff x="0" y="0"/>
+          <a:chExt cx="0" cy="0"/>
+        </a:xfrm>
+      </p:grpSpPr>
       <p:sp>
         <p:nvSpPr>
           <p:cNvPr id="2" name="TextBox 1"/>
@@ -5389,6 +6139,7 @@
           <a:lstStyle/>
           <a:p>
             <a:pPr algn="ctr"/>
+            <a:endParaRPr/>
           </a:p>
         </p:txBody>
       </p:sp>
@@ -5465,91 +6216,268 @@
           </a:fontRef>
         </p:style>
         <p:txBody>
-          <a:bodyPr rtlCol="0" anchor="ctr" wrap="square"/>
-          <a:lstStyle/>
-          <a:p>
-            <a:r>
+          <a:bodyPr wrap="square" rtlCol="0" anchor="ctr"/>
+          <a:lstStyle/>
+          <a:p>
+            <a:r>
+              <a:rPr dirty="0">
+                <a:highlight>
+                  <a:srgbClr val="000080"/>
+                </a:highlight>
+              </a:rPr>
               <a:t># Return to repository root from Webapp\services\platform-health</a:t>
             </a:r>
           </a:p>
           <a:p>
             <a:r>
+              <a:rPr dirty="0">
+                <a:highlight>
+                  <a:srgbClr val="000080"/>
+                </a:highlight>
+              </a:rPr>
               <a:t>cd ..\..\..</a:t>
             </a:r>
           </a:p>
-          <a:p/>
-          <a:p>
-            <a:r>
+          <a:p>
+            <a:endParaRPr dirty="0">
+              <a:highlight>
+                <a:srgbClr val="000080"/>
+              </a:highlight>
+            </a:endParaRPr>
+          </a:p>
+          <a:p>
+            <a:r>
+              <a:rPr dirty="0">
+                <a:highlight>
+                  <a:srgbClr val="000080"/>
+                </a:highlight>
+              </a:rPr>
               <a:t># Confirm repository root</a:t>
             </a:r>
           </a:p>
           <a:p>
             <a:r>
-              <a:t>git rev-parse --show-toplevel</a:t>
-            </a:r>
-          </a:p>
-          <a:p/>
-          <a:p>
-            <a:r>
-              <a:t># Verify .venv and Office temp files are NOT being tracked.</a:t>
-            </a:r>
-          </a:p>
-          <a:p>
-            <a:r>
+              <a:rPr dirty="0">
+                <a:highlight>
+                  <a:srgbClr val="000080"/>
+                </a:highlight>
+              </a:rPr>
+              <a:t>git rev-parse --show-</a:t>
+            </a:r>
+            <a:r>
+              <a:rPr dirty="0" err="1">
+                <a:highlight>
+                  <a:srgbClr val="000080"/>
+                </a:highlight>
+              </a:rPr>
+              <a:t>toplevel</a:t>
+            </a:r>
+            <a:endParaRPr dirty="0">
+              <a:highlight>
+                <a:srgbClr val="000080"/>
+              </a:highlight>
+            </a:endParaRPr>
+          </a:p>
+          <a:p>
+            <a:endParaRPr dirty="0">
+              <a:highlight>
+                <a:srgbClr val="000080"/>
+              </a:highlight>
+            </a:endParaRPr>
+          </a:p>
+          <a:p>
+            <a:r>
+              <a:rPr dirty="0">
+                <a:highlight>
+                  <a:srgbClr val="000080"/>
+                </a:highlight>
+              </a:rPr>
+              <a:t># Verify .</a:t>
+            </a:r>
+            <a:r>
+              <a:rPr dirty="0" err="1">
+                <a:highlight>
+                  <a:srgbClr val="000080"/>
+                </a:highlight>
+              </a:rPr>
+              <a:t>venv</a:t>
+            </a:r>
+            <a:r>
+              <a:rPr dirty="0">
+                <a:highlight>
+                  <a:srgbClr val="000080"/>
+                </a:highlight>
+              </a:rPr>
+              <a:t> and Office temp files are NOT being tracked.</a:t>
+            </a:r>
+          </a:p>
+          <a:p>
+            <a:r>
+              <a:rPr dirty="0">
+                <a:highlight>
+                  <a:srgbClr val="000080"/>
+                </a:highlight>
+              </a:rPr>
               <a:t>git status</a:t>
             </a:r>
           </a:p>
-          <a:p/>
-          <a:p>
-            <a:r>
+          <a:p>
+            <a:endParaRPr dirty="0">
+              <a:highlight>
+                <a:srgbClr val="000080"/>
+              </a:highlight>
+            </a:endParaRPr>
+          </a:p>
+          <a:p>
+            <a:r>
+              <a:rPr dirty="0">
+                <a:highlight>
+                  <a:srgbClr val="000080"/>
+                </a:highlight>
+              </a:rPr>
               <a:t># Stage Project 1 learning material and the Webapp foundation intentionally.</a:t>
             </a:r>
           </a:p>
           <a:p>
             <a:r>
-              <a:t>git add LearningPath\Project-01-Foundation</a:t>
-            </a:r>
-          </a:p>
-          <a:p>
-            <a:r>
+              <a:rPr dirty="0">
+                <a:highlight>
+                  <a:srgbClr val="000080"/>
+                </a:highlight>
+              </a:rPr>
+              <a:t>git add </a:t>
+            </a:r>
+            <a:r>
+              <a:rPr dirty="0" err="1">
+                <a:highlight>
+                  <a:srgbClr val="000080"/>
+                </a:highlight>
+              </a:rPr>
+              <a:t>LearningPath</a:t>
+            </a:r>
+            <a:r>
+              <a:rPr dirty="0">
+                <a:highlight>
+                  <a:srgbClr val="000080"/>
+                </a:highlight>
+              </a:rPr>
+              <a:t>\Project-01-Foundation</a:t>
+            </a:r>
+          </a:p>
+          <a:p>
+            <a:r>
+              <a:rPr dirty="0">
+                <a:highlight>
+                  <a:srgbClr val="000080"/>
+                </a:highlight>
+              </a:rPr>
               <a:t>git add Webapp</a:t>
             </a:r>
           </a:p>
           <a:p>
             <a:r>
-              <a:t>git add .gitignore README.md</a:t>
-            </a:r>
-          </a:p>
-          <a:p/>
-          <a:p>
-            <a:r>
+              <a:rPr dirty="0">
+                <a:highlight>
+                  <a:srgbClr val="000080"/>
+                </a:highlight>
+              </a:rPr>
+              <a:t>git add .</a:t>
+            </a:r>
+            <a:r>
+              <a:rPr dirty="0" err="1">
+                <a:highlight>
+                  <a:srgbClr val="000080"/>
+                </a:highlight>
+              </a:rPr>
+              <a:t>gitignore</a:t>
+            </a:r>
+            <a:r>
+              <a:rPr dirty="0">
+                <a:highlight>
+                  <a:srgbClr val="000080"/>
+                </a:highlight>
+              </a:rPr>
+              <a:t> README.md</a:t>
+            </a:r>
+          </a:p>
+          <a:p>
+            <a:endParaRPr dirty="0">
+              <a:highlight>
+                <a:srgbClr val="000080"/>
+              </a:highlight>
+            </a:endParaRPr>
+          </a:p>
+          <a:p>
+            <a:r>
+              <a:rPr dirty="0">
+                <a:highlight>
+                  <a:srgbClr val="000080"/>
+                </a:highlight>
+              </a:rPr>
               <a:t># Review exactly what will be committed.</a:t>
             </a:r>
           </a:p>
           <a:p>
             <a:r>
+              <a:rPr dirty="0">
+                <a:highlight>
+                  <a:srgbClr val="000080"/>
+                </a:highlight>
+              </a:rPr>
               <a:t>git status</a:t>
             </a:r>
           </a:p>
-          <a:p/>
-          <a:p>
-            <a:r>
+          <a:p>
+            <a:endParaRPr dirty="0">
+              <a:highlight>
+                <a:srgbClr val="000080"/>
+              </a:highlight>
+            </a:endParaRPr>
+          </a:p>
+          <a:p>
+            <a:r>
+              <a:rPr dirty="0">
+                <a:highlight>
+                  <a:srgbClr val="000080"/>
+                </a:highlight>
+              </a:rPr>
               <a:t># Create the Project 1 checkpoint.</a:t>
             </a:r>
           </a:p>
           <a:p>
             <a:r>
+              <a:rPr dirty="0">
+                <a:highlight>
+                  <a:srgbClr val="000080"/>
+                </a:highlight>
+              </a:rPr>
               <a:t>git commit -m "Complete Project 01 - microservices foundation"</a:t>
             </a:r>
           </a:p>
-          <a:p/>
-          <a:p>
-            <a:r>
+          <a:p>
+            <a:endParaRPr dirty="0">
+              <a:highlight>
+                <a:srgbClr val="000080"/>
+              </a:highlight>
+            </a:endParaRPr>
+          </a:p>
+          <a:p>
+            <a:r>
+              <a:rPr dirty="0">
+                <a:highlight>
+                  <a:srgbClr val="000080"/>
+                </a:highlight>
+              </a:rPr>
               <a:t># Standardize the primary branch name.</a:t>
             </a:r>
           </a:p>
           <a:p>
             <a:r>
+              <a:rPr dirty="0">
+                <a:highlight>
+                  <a:srgbClr val="000080"/>
+                </a:highlight>
+              </a:rPr>
               <a:t>git branch -M main</a:t>
             </a:r>
           </a:p>
@@ -5564,7 +6492,7 @@
 </file>
 
 <file path=ppt/slides/slide19.xml><?xml version="1.0" encoding="utf-8"?>
-<p:sld xmlns:a="http://schemas.openxmlformats.org/drawingml/2006/main" xmlns:p="http://schemas.openxmlformats.org/presentationml/2006/main" xmlns:r="http://schemas.openxmlformats.org/officeDocument/2006/relationships">
+<p:sld xmlns:a="http://schemas.openxmlformats.org/drawingml/2006/main" xmlns:r="http://schemas.openxmlformats.org/officeDocument/2006/relationships" xmlns:p="http://schemas.openxmlformats.org/presentationml/2006/main">
   <p:cSld>
     <p:bg>
       <p:bgPr>
@@ -5580,7 +6508,14 @@
         <p:cNvGrpSpPr/>
         <p:nvPr/>
       </p:nvGrpSpPr>
-      <p:grpSpPr/>
+      <p:grpSpPr>
+        <a:xfrm>
+          <a:off x="0" y="0"/>
+          <a:ext cx="0" cy="0"/>
+          <a:chOff x="0" y="0"/>
+          <a:chExt cx="0" cy="0"/>
+        </a:xfrm>
+      </p:grpSpPr>
       <p:sp>
         <p:nvSpPr>
           <p:cNvPr id="2" name="TextBox 1"/>
@@ -5656,6 +6591,7 @@
           <a:lstStyle/>
           <a:p>
             <a:pPr algn="ctr"/>
+            <a:endParaRPr/>
           </a:p>
         </p:txBody>
       </p:sp>
@@ -5831,7 +6767,7 @@
 </file>
 
 <file path=ppt/slides/slide2.xml><?xml version="1.0" encoding="utf-8"?>
-<p:sld xmlns:a="http://schemas.openxmlformats.org/drawingml/2006/main" xmlns:p="http://schemas.openxmlformats.org/presentationml/2006/main" xmlns:r="http://schemas.openxmlformats.org/officeDocument/2006/relationships">
+<p:sld xmlns:a="http://schemas.openxmlformats.org/drawingml/2006/main" xmlns:r="http://schemas.openxmlformats.org/officeDocument/2006/relationships" xmlns:p="http://schemas.openxmlformats.org/presentationml/2006/main">
   <p:cSld>
     <p:bg>
       <p:bgPr>
@@ -5847,7 +6783,14 @@
         <p:cNvGrpSpPr/>
         <p:nvPr/>
       </p:nvGrpSpPr>
-      <p:grpSpPr/>
+      <p:grpSpPr>
+        <a:xfrm>
+          <a:off x="0" y="0"/>
+          <a:ext cx="0" cy="0"/>
+          <a:chOff x="0" y="0"/>
+          <a:chExt cx="0" cy="0"/>
+        </a:xfrm>
+      </p:grpSpPr>
       <p:sp>
         <p:nvSpPr>
           <p:cNvPr id="2" name="TextBox 1"/>
@@ -5923,6 +6866,7 @@
           <a:lstStyle/>
           <a:p>
             <a:pPr algn="ctr"/>
+            <a:endParaRPr/>
           </a:p>
         </p:txBody>
       </p:sp>
@@ -6023,7 +6967,7 @@
 </file>
 
 <file path=ppt/slides/slide20.xml><?xml version="1.0" encoding="utf-8"?>
-<p:sld xmlns:a="http://schemas.openxmlformats.org/drawingml/2006/main" xmlns:p="http://schemas.openxmlformats.org/presentationml/2006/main" xmlns:r="http://schemas.openxmlformats.org/officeDocument/2006/relationships">
+<p:sld xmlns:a="http://schemas.openxmlformats.org/drawingml/2006/main" xmlns:r="http://schemas.openxmlformats.org/officeDocument/2006/relationships" xmlns:p="http://schemas.openxmlformats.org/presentationml/2006/main">
   <p:cSld>
     <p:bg>
       <p:bgPr>
@@ -6039,7 +6983,14 @@
         <p:cNvGrpSpPr/>
         <p:nvPr/>
       </p:nvGrpSpPr>
-      <p:grpSpPr/>
+      <p:grpSpPr>
+        <a:xfrm>
+          <a:off x="0" y="0"/>
+          <a:ext cx="0" cy="0"/>
+          <a:chOff x="0" y="0"/>
+          <a:chExt cx="0" cy="0"/>
+        </a:xfrm>
+      </p:grpSpPr>
       <p:sp>
         <p:nvSpPr>
           <p:cNvPr id="2" name="TextBox 1"/>
@@ -6115,6 +7066,7 @@
           <a:lstStyle/>
           <a:p>
             <a:pPr algn="ctr"/>
+            <a:endParaRPr/>
           </a:p>
         </p:txBody>
       </p:sp>
@@ -6250,7 +7202,7 @@
 </file>
 
 <file path=ppt/slides/slide21.xml><?xml version="1.0" encoding="utf-8"?>
-<p:sld xmlns:a="http://schemas.openxmlformats.org/drawingml/2006/main" xmlns:p="http://schemas.openxmlformats.org/presentationml/2006/main" xmlns:r="http://schemas.openxmlformats.org/officeDocument/2006/relationships">
+<p:sld xmlns:a="http://schemas.openxmlformats.org/drawingml/2006/main" xmlns:r="http://schemas.openxmlformats.org/officeDocument/2006/relationships" xmlns:p="http://schemas.openxmlformats.org/presentationml/2006/main">
   <p:cSld>
     <p:bg>
       <p:bgPr>
@@ -6266,7 +7218,14 @@
         <p:cNvGrpSpPr/>
         <p:nvPr/>
       </p:nvGrpSpPr>
-      <p:grpSpPr/>
+      <p:grpSpPr>
+        <a:xfrm>
+          <a:off x="0" y="0"/>
+          <a:ext cx="0" cy="0"/>
+          <a:chOff x="0" y="0"/>
+          <a:chExt cx="0" cy="0"/>
+        </a:xfrm>
+      </p:grpSpPr>
       <p:sp>
         <p:nvSpPr>
           <p:cNvPr id="2" name="TextBox 1"/>
@@ -6342,6 +7301,7 @@
           <a:lstStyle/>
           <a:p>
             <a:pPr algn="ctr"/>
+            <a:endParaRPr/>
           </a:p>
         </p:txBody>
       </p:sp>
@@ -6474,6 +7434,7 @@
           <a:lstStyle/>
           <a:p>
             <a:pPr algn="ctr"/>
+            <a:endParaRPr/>
           </a:p>
         </p:txBody>
       </p:sp>
@@ -6571,6 +7532,7 @@
           <a:lstStyle/>
           <a:p>
             <a:pPr algn="ctr"/>
+            <a:endParaRPr/>
           </a:p>
         </p:txBody>
       </p:sp>
@@ -6668,6 +7630,7 @@
           <a:lstStyle/>
           <a:p>
             <a:pPr algn="ctr"/>
+            <a:endParaRPr/>
           </a:p>
         </p:txBody>
       </p:sp>
@@ -6765,6 +7728,7 @@
           <a:lstStyle/>
           <a:p>
             <a:pPr algn="ctr"/>
+            <a:endParaRPr/>
           </a:p>
         </p:txBody>
       </p:sp>
@@ -6889,7 +7853,7 @@
 </file>
 
 <file path=ppt/slides/slide3.xml><?xml version="1.0" encoding="utf-8"?>
-<p:sld xmlns:a="http://schemas.openxmlformats.org/drawingml/2006/main" xmlns:p="http://schemas.openxmlformats.org/presentationml/2006/main" xmlns:r="http://schemas.openxmlformats.org/officeDocument/2006/relationships">
+<p:sld xmlns:a="http://schemas.openxmlformats.org/drawingml/2006/main" xmlns:r="http://schemas.openxmlformats.org/officeDocument/2006/relationships" xmlns:p="http://schemas.openxmlformats.org/presentationml/2006/main">
   <p:cSld>
     <p:bg>
       <p:bgPr>
@@ -6905,7 +7869,14 @@
         <p:cNvGrpSpPr/>
         <p:nvPr/>
       </p:nvGrpSpPr>
-      <p:grpSpPr/>
+      <p:grpSpPr>
+        <a:xfrm>
+          <a:off x="0" y="0"/>
+          <a:ext cx="0" cy="0"/>
+          <a:chOff x="0" y="0"/>
+          <a:chExt cx="0" cy="0"/>
+        </a:xfrm>
+      </p:grpSpPr>
       <p:sp>
         <p:nvSpPr>
           <p:cNvPr id="2" name="TextBox 1"/>
@@ -6981,6 +7952,7 @@
           <a:lstStyle/>
           <a:p>
             <a:pPr algn="ctr"/>
+            <a:endParaRPr/>
           </a:p>
         </p:txBody>
       </p:sp>
@@ -7156,7 +8128,7 @@
 </file>
 
 <file path=ppt/slides/slide4.xml><?xml version="1.0" encoding="utf-8"?>
-<p:sld xmlns:a="http://schemas.openxmlformats.org/drawingml/2006/main" xmlns:p="http://schemas.openxmlformats.org/presentationml/2006/main" xmlns:r="http://schemas.openxmlformats.org/officeDocument/2006/relationships">
+<p:sld xmlns:a="http://schemas.openxmlformats.org/drawingml/2006/main" xmlns:r="http://schemas.openxmlformats.org/officeDocument/2006/relationships" xmlns:p="http://schemas.openxmlformats.org/presentationml/2006/main">
   <p:cSld>
     <p:bg>
       <p:bgPr>
@@ -7172,7 +8144,14 @@
         <p:cNvGrpSpPr/>
         <p:nvPr/>
       </p:nvGrpSpPr>
-      <p:grpSpPr/>
+      <p:grpSpPr>
+        <a:xfrm>
+          <a:off x="0" y="0"/>
+          <a:ext cx="0" cy="0"/>
+          <a:chOff x="0" y="0"/>
+          <a:chExt cx="0" cy="0"/>
+        </a:xfrm>
+      </p:grpSpPr>
       <p:sp>
         <p:nvSpPr>
           <p:cNvPr id="2" name="TextBox 1"/>
@@ -7283,6 +8262,7 @@
           <a:lstStyle/>
           <a:p>
             <a:pPr algn="ctr"/>
+            <a:endParaRPr/>
           </a:p>
         </p:txBody>
       </p:sp>
@@ -7415,6 +8395,7 @@
           <a:lstStyle/>
           <a:p>
             <a:pPr algn="ctr"/>
+            <a:endParaRPr/>
           </a:p>
         </p:txBody>
       </p:sp>
@@ -7516,6 +8497,7 @@
           <a:lstStyle/>
           <a:p>
             <a:pPr algn="ctr"/>
+            <a:endParaRPr/>
           </a:p>
         </p:txBody>
       </p:sp>
@@ -7613,6 +8595,7 @@
           <a:lstStyle/>
           <a:p>
             <a:pPr algn="ctr"/>
+            <a:endParaRPr/>
           </a:p>
         </p:txBody>
       </p:sp>
@@ -7710,6 +8693,7 @@
           <a:lstStyle/>
           <a:p>
             <a:pPr algn="ctr"/>
+            <a:endParaRPr/>
           </a:p>
         </p:txBody>
       </p:sp>
@@ -7844,7 +8828,7 @@
 </file>
 
 <file path=ppt/slides/slide5.xml><?xml version="1.0" encoding="utf-8"?>
-<p:sld xmlns:a="http://schemas.openxmlformats.org/drawingml/2006/main" xmlns:p="http://schemas.openxmlformats.org/presentationml/2006/main" xmlns:r="http://schemas.openxmlformats.org/officeDocument/2006/relationships">
+<p:sld xmlns:a="http://schemas.openxmlformats.org/drawingml/2006/main" xmlns:r="http://schemas.openxmlformats.org/officeDocument/2006/relationships" xmlns:p="http://schemas.openxmlformats.org/presentationml/2006/main">
   <p:cSld>
     <p:bg>
       <p:bgPr>
@@ -7860,7 +8844,14 @@
         <p:cNvGrpSpPr/>
         <p:nvPr/>
       </p:nvGrpSpPr>
-      <p:grpSpPr/>
+      <p:grpSpPr>
+        <a:xfrm>
+          <a:off x="0" y="0"/>
+          <a:ext cx="0" cy="0"/>
+          <a:chOff x="0" y="0"/>
+          <a:chExt cx="0" cy="0"/>
+        </a:xfrm>
+      </p:grpSpPr>
       <p:sp>
         <p:nvSpPr>
           <p:cNvPr id="2" name="TextBox 1"/>
@@ -7936,6 +8927,7 @@
           <a:lstStyle/>
           <a:p>
             <a:pPr algn="ctr"/>
+            <a:endParaRPr/>
           </a:p>
         </p:txBody>
       </p:sp>
@@ -8068,6 +9060,7 @@
           <a:lstStyle/>
           <a:p>
             <a:pPr algn="ctr"/>
+            <a:endParaRPr/>
           </a:p>
         </p:txBody>
       </p:sp>
@@ -8165,6 +9158,7 @@
           <a:lstStyle/>
           <a:p>
             <a:pPr algn="ctr"/>
+            <a:endParaRPr/>
           </a:p>
         </p:txBody>
       </p:sp>
@@ -8262,6 +9256,7 @@
           <a:lstStyle/>
           <a:p>
             <a:pPr algn="ctr"/>
+            <a:endParaRPr/>
           </a:p>
         </p:txBody>
       </p:sp>
@@ -8359,6 +9354,7 @@
           <a:lstStyle/>
           <a:p>
             <a:pPr algn="ctr"/>
+            <a:endParaRPr/>
           </a:p>
         </p:txBody>
       </p:sp>
@@ -8497,7 +9493,7 @@
 </file>
 
 <file path=ppt/slides/slide6.xml><?xml version="1.0" encoding="utf-8"?>
-<p:sld xmlns:a="http://schemas.openxmlformats.org/drawingml/2006/main" xmlns:p="http://schemas.openxmlformats.org/presentationml/2006/main" xmlns:r="http://schemas.openxmlformats.org/officeDocument/2006/relationships">
+<p:sld xmlns:a="http://schemas.openxmlformats.org/drawingml/2006/main" xmlns:r="http://schemas.openxmlformats.org/officeDocument/2006/relationships" xmlns:p="http://schemas.openxmlformats.org/presentationml/2006/main">
   <p:cSld>
     <p:bg>
       <p:bgPr>
@@ -8513,7 +9509,14 @@
         <p:cNvGrpSpPr/>
         <p:nvPr/>
       </p:nvGrpSpPr>
-      <p:grpSpPr/>
+      <p:grpSpPr>
+        <a:xfrm>
+          <a:off x="0" y="0"/>
+          <a:ext cx="0" cy="0"/>
+          <a:chOff x="0" y="0"/>
+          <a:chExt cx="0" cy="0"/>
+        </a:xfrm>
+      </p:grpSpPr>
       <p:sp>
         <p:nvSpPr>
           <p:cNvPr id="2" name="TextBox 1"/>
@@ -8589,6 +9592,7 @@
           <a:lstStyle/>
           <a:p>
             <a:pPr algn="ctr"/>
+            <a:endParaRPr/>
           </a:p>
         </p:txBody>
       </p:sp>
@@ -8665,7 +9669,7 @@
           </a:fontRef>
         </p:style>
         <p:txBody>
-          <a:bodyPr rtlCol="0" anchor="ctr" wrap="square"/>
+          <a:bodyPr wrap="square" rtlCol="0" anchor="ctr"/>
           <a:lstStyle/>
           <a:p>
             <a:pPr algn="ctr">
@@ -8762,7 +9766,7 @@
 </file>
 
 <file path=ppt/slides/slide7.xml><?xml version="1.0" encoding="utf-8"?>
-<p:sld xmlns:a="http://schemas.openxmlformats.org/drawingml/2006/main" xmlns:p="http://schemas.openxmlformats.org/presentationml/2006/main" xmlns:r="http://schemas.openxmlformats.org/officeDocument/2006/relationships">
+<p:sld xmlns:a="http://schemas.openxmlformats.org/drawingml/2006/main" xmlns:r="http://schemas.openxmlformats.org/officeDocument/2006/relationships" xmlns:p="http://schemas.openxmlformats.org/presentationml/2006/main">
   <p:cSld>
     <p:bg>
       <p:bgPr>
@@ -8778,7 +9782,14 @@
         <p:cNvGrpSpPr/>
         <p:nvPr/>
       </p:nvGrpSpPr>
-      <p:grpSpPr/>
+      <p:grpSpPr>
+        <a:xfrm>
+          <a:off x="0" y="0"/>
+          <a:ext cx="0" cy="0"/>
+          <a:chOff x="0" y="0"/>
+          <a:chExt cx="0" cy="0"/>
+        </a:xfrm>
+      </p:grpSpPr>
       <p:sp>
         <p:nvSpPr>
           <p:cNvPr id="2" name="TextBox 1"/>
@@ -8854,6 +9865,7 @@
           <a:lstStyle/>
           <a:p>
             <a:pPr algn="ctr"/>
+            <a:endParaRPr/>
           </a:p>
         </p:txBody>
       </p:sp>
@@ -8930,7 +9942,7 @@
           </a:fontRef>
         </p:style>
         <p:txBody>
-          <a:bodyPr rtlCol="0" anchor="ctr" wrap="square"/>
+          <a:bodyPr wrap="square" rtlCol="0" anchor="ctr"/>
           <a:lstStyle/>
           <a:p>
             <a:r>
@@ -8942,7 +9954,9 @@
               <a:t>cd C:\Users\biome\Documents\PrimeServicesGroupKC\car-rental-microservices</a:t>
             </a:r>
           </a:p>
-          <a:p/>
+          <a:p>
+            <a:endParaRPr/>
+          </a:p>
           <a:p>
             <a:r>
               <a:t># Confirm this is the Git repository root</a:t>
@@ -8958,7 +9972,9 @@
               <a:t>git status</a:t>
             </a:r>
           </a:p>
-          <a:p/>
+          <a:p>
+            <a:endParaRPr/>
+          </a:p>
           <a:p>
             <a:r>
               <a:t># Open the repository in VS Code</a:t>
@@ -8969,7 +9985,9 @@
               <a:t>code .</a:t>
             </a:r>
           </a:p>
-          <a:p/>
+          <a:p>
+            <a:endParaRPr/>
+          </a:p>
           <a:p>
             <a:r>
               <a:t># Enter the learning path for Project 1</a:t>
@@ -9019,7 +10037,7 @@
 </file>
 
 <file path=ppt/slides/slide8.xml><?xml version="1.0" encoding="utf-8"?>
-<p:sld xmlns:a="http://schemas.openxmlformats.org/drawingml/2006/main" xmlns:p="http://schemas.openxmlformats.org/presentationml/2006/main" xmlns:r="http://schemas.openxmlformats.org/officeDocument/2006/relationships">
+<p:sld xmlns:a="http://schemas.openxmlformats.org/drawingml/2006/main" xmlns:r="http://schemas.openxmlformats.org/officeDocument/2006/relationships" xmlns:p="http://schemas.openxmlformats.org/presentationml/2006/main">
   <p:cSld>
     <p:bg>
       <p:bgPr>
@@ -9035,7 +10053,14 @@
         <p:cNvGrpSpPr/>
         <p:nvPr/>
       </p:nvGrpSpPr>
-      <p:grpSpPr/>
+      <p:grpSpPr>
+        <a:xfrm>
+          <a:off x="0" y="0"/>
+          <a:ext cx="0" cy="0"/>
+          <a:chOff x="0" y="0"/>
+          <a:chExt cx="0" cy="0"/>
+        </a:xfrm>
+      </p:grpSpPr>
       <p:sp>
         <p:nvSpPr>
           <p:cNvPr id="2" name="TextBox 1"/>
@@ -9111,6 +10136,7 @@
           <a:lstStyle/>
           <a:p>
             <a:pPr algn="ctr"/>
+            <a:endParaRPr/>
           </a:p>
         </p:txBody>
       </p:sp>
@@ -9187,7 +10213,7 @@
           </a:fontRef>
         </p:style>
         <p:txBody>
-          <a:bodyPr rtlCol="0" anchor="ctr" wrap="square"/>
+          <a:bodyPr wrap="square" rtlCol="0" anchor="ctr"/>
           <a:lstStyle/>
           <a:p>
             <a:r>
@@ -9290,7 +10316,7 @@
 </file>
 
 <file path=ppt/slides/slide9.xml><?xml version="1.0" encoding="utf-8"?>
-<p:sld xmlns:a="http://schemas.openxmlformats.org/drawingml/2006/main" xmlns:p="http://schemas.openxmlformats.org/presentationml/2006/main" xmlns:r="http://schemas.openxmlformats.org/officeDocument/2006/relationships">
+<p:sld xmlns:a="http://schemas.openxmlformats.org/drawingml/2006/main" xmlns:r="http://schemas.openxmlformats.org/officeDocument/2006/relationships" xmlns:p="http://schemas.openxmlformats.org/presentationml/2006/main">
   <p:cSld>
     <p:bg>
       <p:bgPr>
@@ -9306,7 +10332,14 @@
         <p:cNvGrpSpPr/>
         <p:nvPr/>
       </p:nvGrpSpPr>
-      <p:grpSpPr/>
+      <p:grpSpPr>
+        <a:xfrm>
+          <a:off x="0" y="0"/>
+          <a:ext cx="0" cy="0"/>
+          <a:chOff x="0" y="0"/>
+          <a:chExt cx="0" cy="0"/>
+        </a:xfrm>
+      </p:grpSpPr>
       <p:sp>
         <p:nvSpPr>
           <p:cNvPr id="2" name="TextBox 1"/>
@@ -9382,6 +10415,7 @@
           <a:lstStyle/>
           <a:p>
             <a:pPr algn="ctr"/>
+            <a:endParaRPr/>
           </a:p>
         </p:txBody>
       </p:sp>

--- a/LearningPath/Project-01-Foundation/slides/Project_1_Car_Rental_Microservices_Foundation_Updated_Structure.pptx
+++ b/LearningPath/Project-01-Foundation/slides/Project_1_Car_Rental_Microservices_Foundation_Updated_Structure.pptx
@@ -6,26 +6,28 @@
   </p:sldMasterIdLst>
   <p:sldIdLst>
     <p:sldId id="256" r:id="rId2"/>
-    <p:sldId id="257" r:id="rId3"/>
-    <p:sldId id="258" r:id="rId4"/>
-    <p:sldId id="259" r:id="rId5"/>
-    <p:sldId id="260" r:id="rId6"/>
-    <p:sldId id="261" r:id="rId7"/>
-    <p:sldId id="262" r:id="rId8"/>
-    <p:sldId id="263" r:id="rId9"/>
-    <p:sldId id="264" r:id="rId10"/>
-    <p:sldId id="265" r:id="rId11"/>
-    <p:sldId id="266" r:id="rId12"/>
-    <p:sldId id="267" r:id="rId13"/>
-    <p:sldId id="268" r:id="rId14"/>
-    <p:sldId id="269" r:id="rId15"/>
-    <p:sldId id="270" r:id="rId16"/>
-    <p:sldId id="271" r:id="rId17"/>
-    <p:sldId id="272" r:id="rId18"/>
-    <p:sldId id="273" r:id="rId19"/>
-    <p:sldId id="274" r:id="rId20"/>
-    <p:sldId id="275" r:id="rId21"/>
-    <p:sldId id="276" r:id="rId22"/>
+    <p:sldId id="278" r:id="rId3"/>
+    <p:sldId id="257" r:id="rId4"/>
+    <p:sldId id="258" r:id="rId5"/>
+    <p:sldId id="259" r:id="rId6"/>
+    <p:sldId id="260" r:id="rId7"/>
+    <p:sldId id="261" r:id="rId8"/>
+    <p:sldId id="262" r:id="rId9"/>
+    <p:sldId id="263" r:id="rId10"/>
+    <p:sldId id="264" r:id="rId11"/>
+    <p:sldId id="265" r:id="rId12"/>
+    <p:sldId id="266" r:id="rId13"/>
+    <p:sldId id="267" r:id="rId14"/>
+    <p:sldId id="268" r:id="rId15"/>
+    <p:sldId id="269" r:id="rId16"/>
+    <p:sldId id="270" r:id="rId17"/>
+    <p:sldId id="271" r:id="rId18"/>
+    <p:sldId id="272" r:id="rId19"/>
+    <p:sldId id="273" r:id="rId20"/>
+    <p:sldId id="277" r:id="rId21"/>
+    <p:sldId id="274" r:id="rId22"/>
+    <p:sldId id="275" r:id="rId23"/>
+    <p:sldId id="276" r:id="rId24"/>
   </p:sldIdLst>
   <p:sldSz cx="12192000" cy="6858000"/>
   <p:notesSz cx="6858000" cy="9144000"/>
@@ -3275,7 +3277,7 @@
               </a:defRPr>
             </a:pPr>
             <a:r>
-              <a:t>Step 7 — Protect the Repository with .gitignore</a:t>
+              <a:t>Why These Folders Exist</a:t>
             </a:r>
           </a:p>
         </p:txBody>
@@ -3354,455 +3356,75 @@
               </a:defRPr>
             </a:pPr>
             <a:r>
-              <a:t>10</a:t>
-            </a:r>
-          </a:p>
-        </p:txBody>
-      </p:sp>
-      <p:sp>
-        <p:nvSpPr>
-          <p:cNvPr id="5" name="Rounded Rectangle 4"/>
-          <p:cNvSpPr/>
-          <p:nvPr/>
-        </p:nvSpPr>
-        <p:spPr>
-          <a:xfrm>
-            <a:off x="731520" y="1371600"/>
-            <a:ext cx="10789920" cy="4937760"/>
-          </a:xfrm>
-          <a:prstGeom prst="roundRect">
-            <a:avLst/>
-          </a:prstGeom>
-          <a:solidFill>
-            <a:srgbClr val="1F2430"/>
-          </a:solidFill>
-          <a:ln>
-            <a:solidFill>
-              <a:srgbClr val="1F2430"/>
-            </a:solidFill>
-          </a:ln>
-        </p:spPr>
-        <p:style>
-          <a:lnRef idx="1">
-            <a:schemeClr val="accent1"/>
-          </a:lnRef>
-          <a:fillRef idx="3">
-            <a:schemeClr val="accent1"/>
-          </a:fillRef>
-          <a:effectRef idx="2">
-            <a:schemeClr val="accent1"/>
-          </a:effectRef>
-          <a:fontRef idx="minor">
-            <a:schemeClr val="lt1"/>
-          </a:fontRef>
-        </p:style>
-        <p:txBody>
-          <a:bodyPr wrap="square" rtlCol="0" anchor="ctr"/>
-          <a:lstStyle/>
-          <a:p>
-            <a:r>
-              <a:rPr dirty="0">
-                <a:highlight>
-                  <a:srgbClr val="000080"/>
-                </a:highlight>
-              </a:rPr>
-              <a:t># Python</a:t>
-            </a:r>
-          </a:p>
-          <a:p>
-            <a:r>
-              <a:rPr dirty="0">
-                <a:highlight>
-                  <a:srgbClr val="000080"/>
-                </a:highlight>
-              </a:rPr>
-              <a:t>__</a:t>
-            </a:r>
-            <a:r>
-              <a:rPr dirty="0" err="1">
-                <a:highlight>
-                  <a:srgbClr val="000080"/>
-                </a:highlight>
-              </a:rPr>
-              <a:t>pycache</a:t>
-            </a:r>
-            <a:r>
-              <a:rPr dirty="0">
-                <a:highlight>
-                  <a:srgbClr val="000080"/>
-                </a:highlight>
-              </a:rPr>
-              <a:t>__/</a:t>
-            </a:r>
-          </a:p>
-          <a:p>
-            <a:r>
-              <a:rPr dirty="0">
-                <a:highlight>
-                  <a:srgbClr val="000080"/>
-                </a:highlight>
-              </a:rPr>
-              <a:t>*.</a:t>
-            </a:r>
-            <a:r>
-              <a:rPr dirty="0" err="1">
-                <a:highlight>
-                  <a:srgbClr val="000080"/>
-                </a:highlight>
-              </a:rPr>
-              <a:t>py</a:t>
-            </a:r>
-            <a:r>
-              <a:rPr dirty="0">
-                <a:highlight>
-                  <a:srgbClr val="000080"/>
-                </a:highlight>
-              </a:rPr>
-              <a:t>[cod]</a:t>
-            </a:r>
-          </a:p>
-          <a:p>
-            <a:endParaRPr dirty="0">
-              <a:highlight>
-                <a:srgbClr val="000080"/>
-              </a:highlight>
-            </a:endParaRPr>
-          </a:p>
-          <a:p>
-            <a:r>
-              <a:rPr dirty="0">
-                <a:highlight>
-                  <a:srgbClr val="000080"/>
-                </a:highlight>
-              </a:rPr>
-              <a:t># Virtual environments</a:t>
-            </a:r>
-          </a:p>
-          <a:p>
-            <a:r>
-              <a:rPr dirty="0">
-                <a:highlight>
-                  <a:srgbClr val="000080"/>
-                </a:highlight>
-              </a:rPr>
-              <a:t>.</a:t>
-            </a:r>
-            <a:r>
-              <a:rPr dirty="0" err="1">
-                <a:highlight>
-                  <a:srgbClr val="000080"/>
-                </a:highlight>
-              </a:rPr>
-              <a:t>venv</a:t>
-            </a:r>
-            <a:r>
-              <a:rPr dirty="0">
-                <a:highlight>
-                  <a:srgbClr val="000080"/>
-                </a:highlight>
-              </a:rPr>
-              <a:t>/</a:t>
-            </a:r>
-          </a:p>
-          <a:p>
-            <a:r>
-              <a:rPr dirty="0" err="1">
-                <a:highlight>
-                  <a:srgbClr val="000080"/>
-                </a:highlight>
-              </a:rPr>
-              <a:t>venv</a:t>
-            </a:r>
-            <a:r>
-              <a:rPr dirty="0">
-                <a:highlight>
-                  <a:srgbClr val="000080"/>
-                </a:highlight>
-              </a:rPr>
-              <a:t>/</a:t>
-            </a:r>
-          </a:p>
-          <a:p>
-            <a:r>
-              <a:rPr dirty="0">
-                <a:highlight>
-                  <a:srgbClr val="000080"/>
-                </a:highlight>
-              </a:rPr>
-              <a:t>env/</a:t>
-            </a:r>
-          </a:p>
-          <a:p>
-            <a:endParaRPr dirty="0">
-              <a:highlight>
-                <a:srgbClr val="000080"/>
-              </a:highlight>
-            </a:endParaRPr>
-          </a:p>
-          <a:p>
-            <a:r>
-              <a:rPr dirty="0">
-                <a:highlight>
-                  <a:srgbClr val="000080"/>
-                </a:highlight>
-              </a:rPr>
-              <a:t># Secrets / environment variables</a:t>
-            </a:r>
-          </a:p>
-          <a:p>
-            <a:r>
-              <a:rPr dirty="0">
-                <a:highlight>
-                  <a:srgbClr val="000080"/>
-                </a:highlight>
-              </a:rPr>
-              <a:t>.env</a:t>
-            </a:r>
-          </a:p>
-          <a:p>
-            <a:r>
-              <a:rPr dirty="0">
-                <a:highlight>
-                  <a:srgbClr val="000080"/>
-                </a:highlight>
-              </a:rPr>
-              <a:t>.env.*</a:t>
-            </a:r>
-          </a:p>
-          <a:p>
-            <a:endParaRPr dirty="0">
-              <a:highlight>
-                <a:srgbClr val="000080"/>
-              </a:highlight>
-            </a:endParaRPr>
-          </a:p>
-          <a:p>
-            <a:r>
-              <a:rPr dirty="0">
-                <a:highlight>
-                  <a:srgbClr val="000080"/>
-                </a:highlight>
-              </a:rPr>
-              <a:t># Microsoft Office temporary lock files</a:t>
-            </a:r>
-          </a:p>
-          <a:p>
-            <a:r>
-              <a:rPr dirty="0">
-                <a:highlight>
-                  <a:srgbClr val="000080"/>
-                </a:highlight>
-              </a:rPr>
-              <a:t>~$*</a:t>
-            </a:r>
-          </a:p>
-          <a:p>
-            <a:endParaRPr dirty="0">
-              <a:highlight>
-                <a:srgbClr val="000080"/>
-              </a:highlight>
-            </a:endParaRPr>
-          </a:p>
-          <a:p>
-            <a:r>
-              <a:rPr dirty="0">
-                <a:highlight>
-                  <a:srgbClr val="000080"/>
-                </a:highlight>
-              </a:rPr>
-              <a:t># Terraform</a:t>
-            </a:r>
-          </a:p>
-          <a:p>
-            <a:r>
-              <a:rPr dirty="0">
-                <a:highlight>
-                  <a:srgbClr val="000080"/>
-                </a:highlight>
-              </a:rPr>
-              <a:t>.terraform/</a:t>
-            </a:r>
-          </a:p>
-          <a:p>
-            <a:r>
-              <a:rPr dirty="0">
-                <a:highlight>
-                  <a:srgbClr val="000080"/>
-                </a:highlight>
-              </a:rPr>
-              <a:t>*.</a:t>
-            </a:r>
-            <a:r>
-              <a:rPr dirty="0" err="1">
-                <a:highlight>
-                  <a:srgbClr val="000080"/>
-                </a:highlight>
-              </a:rPr>
-              <a:t>tfstate</a:t>
-            </a:r>
-            <a:endParaRPr dirty="0">
-              <a:highlight>
-                <a:srgbClr val="000080"/>
-              </a:highlight>
-            </a:endParaRPr>
-          </a:p>
-          <a:p>
-            <a:r>
-              <a:rPr dirty="0">
-                <a:highlight>
-                  <a:srgbClr val="000080"/>
-                </a:highlight>
-              </a:rPr>
-              <a:t>*.</a:t>
-            </a:r>
-            <a:r>
-              <a:rPr dirty="0" err="1">
-                <a:highlight>
-                  <a:srgbClr val="000080"/>
-                </a:highlight>
-              </a:rPr>
-              <a:t>tfstate</a:t>
-            </a:r>
-            <a:r>
-              <a:rPr dirty="0">
-                <a:highlight>
-                  <a:srgbClr val="000080"/>
-                </a:highlight>
-              </a:rPr>
-              <a:t>.*</a:t>
-            </a:r>
-          </a:p>
-          <a:p>
-            <a:r>
-              <a:rPr dirty="0">
-                <a:highlight>
-                  <a:srgbClr val="000080"/>
-                </a:highlight>
-              </a:rPr>
-              <a:t>*.</a:t>
-            </a:r>
-            <a:r>
-              <a:rPr dirty="0" err="1">
-                <a:highlight>
-                  <a:srgbClr val="000080"/>
-                </a:highlight>
-              </a:rPr>
-              <a:t>tfvars</a:t>
-            </a:r>
-            <a:endParaRPr dirty="0">
-              <a:highlight>
-                <a:srgbClr val="000080"/>
-              </a:highlight>
-            </a:endParaRPr>
-          </a:p>
-          <a:p>
-            <a:endParaRPr dirty="0">
-              <a:highlight>
-                <a:srgbClr val="000080"/>
-              </a:highlight>
-            </a:endParaRPr>
-          </a:p>
-          <a:p>
-            <a:r>
-              <a:rPr dirty="0">
-                <a:highlight>
-                  <a:srgbClr val="000080"/>
-                </a:highlight>
-              </a:rPr>
-              <a:t># Node / Next.js</a:t>
-            </a:r>
-          </a:p>
-          <a:p>
-            <a:r>
-              <a:rPr dirty="0" err="1">
-                <a:highlight>
-                  <a:srgbClr val="000080"/>
-                </a:highlight>
-              </a:rPr>
-              <a:t>node_modules</a:t>
-            </a:r>
-            <a:r>
-              <a:rPr dirty="0">
-                <a:highlight>
-                  <a:srgbClr val="000080"/>
-                </a:highlight>
-              </a:rPr>
-              <a:t>/</a:t>
-            </a:r>
-          </a:p>
-          <a:p>
-            <a:r>
-              <a:rPr dirty="0">
-                <a:highlight>
-                  <a:srgbClr val="000080"/>
-                </a:highlight>
-              </a:rPr>
-              <a:t>.next/</a:t>
-            </a:r>
-          </a:p>
-          <a:p>
-            <a:endParaRPr dirty="0">
-              <a:highlight>
-                <a:srgbClr val="000080"/>
-              </a:highlight>
-            </a:endParaRPr>
-          </a:p>
-          <a:p>
-            <a:r>
-              <a:rPr dirty="0">
-                <a:highlight>
-                  <a:srgbClr val="000080"/>
-                </a:highlight>
-              </a:rPr>
-              <a:t># OS / logs</a:t>
-            </a:r>
-          </a:p>
-          <a:p>
-            <a:r>
-              <a:rPr dirty="0" err="1">
-                <a:highlight>
-                  <a:srgbClr val="000080"/>
-                </a:highlight>
-              </a:rPr>
-              <a:t>Thumbs.db</a:t>
-            </a:r>
-            <a:endParaRPr dirty="0">
-              <a:highlight>
-                <a:srgbClr val="000080"/>
-              </a:highlight>
-            </a:endParaRPr>
-          </a:p>
-          <a:p>
-            <a:r>
-              <a:rPr dirty="0">
-                <a:highlight>
-                  <a:srgbClr val="000080"/>
-                </a:highlight>
-              </a:rPr>
-              <a:t>.</a:t>
-            </a:r>
-            <a:r>
-              <a:rPr dirty="0" err="1">
-                <a:highlight>
-                  <a:srgbClr val="000080"/>
-                </a:highlight>
-              </a:rPr>
-              <a:t>DS_Store</a:t>
-            </a:r>
-            <a:endParaRPr dirty="0">
-              <a:highlight>
-                <a:srgbClr val="000080"/>
-              </a:highlight>
-            </a:endParaRPr>
-          </a:p>
-          <a:p>
-            <a:r>
-              <a:rPr dirty="0">
-                <a:highlight>
-                  <a:srgbClr val="000080"/>
-                </a:highlight>
-              </a:rPr>
-              <a:t>*.log</a:t>
+              <a:t>9</a:t>
+            </a:r>
+          </a:p>
+        </p:txBody>
+      </p:sp>
+      <p:sp>
+        <p:nvSpPr>
+          <p:cNvPr id="5" name="TextBox 4"/>
+          <p:cNvSpPr txBox="1"/>
+          <p:nvPr/>
+        </p:nvSpPr>
+        <p:spPr>
+          <a:xfrm>
+            <a:off x="731520" y="1417320"/>
+            <a:ext cx="10789920" cy="4800600"/>
+          </a:xfrm>
+          <a:prstGeom prst="rect">
+            <a:avLst/>
+          </a:prstGeom>
+          <a:noFill/>
+        </p:spPr>
+        <p:txBody>
+          <a:bodyPr wrap="square">
+            <a:spAutoFit/>
+          </a:bodyPr>
+          <a:lstStyle/>
+          <a:p>
+            <a:r>
+              <a:t>LearningPath/ — structured training area; complete projects one at a time.</a:t>
+            </a:r>
+          </a:p>
+          <a:p>
+            <a:r>
+              <a:t>Project-01-Foundation/slides/ — Project 1 presentation material.</a:t>
+            </a:r>
+          </a:p>
+          <a:p>
+            <a:r>
+              <a:t>Project-01-Foundation/notes/ — explanations and personal learning notes.</a:t>
+            </a:r>
+          </a:p>
+          <a:p>
+            <a:r>
+              <a:t>Project-01-Foundation/labs/ — hands-on exercises and experimental code.</a:t>
+            </a:r>
+          </a:p>
+          <a:p>
+            <a:r>
+              <a:t>Webapp/ — the real application that grows as each concept is mastered.</a:t>
+            </a:r>
+          </a:p>
+          <a:p>
+            <a:r>
+              <a:t>Webapp/frontend/ — future Next.js + React + TypeScript user interface.</a:t>
+            </a:r>
+          </a:p>
+          <a:p>
+            <a:r>
+              <a:t>Webapp/services/ — backend microservices such as User, Vehicle and Booking.</a:t>
+            </a:r>
+          </a:p>
+          <a:p>
+            <a:r>
+              <a:t>Webapp/infrastructure/ — Terraform, Kubernetes and cloud infrastructure.</a:t>
+            </a:r>
+          </a:p>
+          <a:p>
+            <a:r>
+              <a:t>Images/ — shared architecture diagrams and project images.</a:t>
             </a:r>
           </a:p>
         </p:txBody>
@@ -3870,7 +3492,7 @@
               </a:defRPr>
             </a:pPr>
             <a:r>
-              <a:t>Steps 8–10 — Document the Architecture</a:t>
+              <a:t>Step 7 — Protect the Repository with .gitignore</a:t>
             </a:r>
           </a:p>
         </p:txBody>
@@ -3949,60 +3571,455 @@
               </a:defRPr>
             </a:pPr>
             <a:r>
-              <a:t>11</a:t>
-            </a:r>
-          </a:p>
-        </p:txBody>
-      </p:sp>
-      <p:sp>
-        <p:nvSpPr>
-          <p:cNvPr id="5" name="TextBox 4"/>
-          <p:cNvSpPr txBox="1"/>
-          <p:nvPr/>
-        </p:nvSpPr>
-        <p:spPr>
-          <a:xfrm>
-            <a:off x="731520" y="1417320"/>
-            <a:ext cx="10789920" cy="4800600"/>
-          </a:xfrm>
-          <a:prstGeom prst="rect">
-            <a:avLst/>
-          </a:prstGeom>
-          <a:noFill/>
-        </p:spPr>
-        <p:txBody>
-          <a:bodyPr wrap="square">
-            <a:spAutoFit/>
-          </a:bodyPr>
-          <a:lstStyle/>
-          <a:p>
-            <a:r>
-              <a:t>LearningPath/Project-01-Foundation/README.md — objectives, steps, labs and progress for Project 1.</a:t>
-            </a:r>
-          </a:p>
-          <a:p>
-            <a:r>
-              <a:t>LearningPath/Project-01-Foundation/notes/ — learning notes and explanations.</a:t>
-            </a:r>
-          </a:p>
-          <a:p>
-            <a:r>
-              <a:t>Webapp/README.md — explains the actual application, technology stack and current status.</a:t>
-            </a:r>
-          </a:p>
-          <a:p>
-            <a:r>
-              <a:t>Webapp/docs/architecture/architecture.md — defines service responsibilities and boundaries.</a:t>
-            </a:r>
-          </a:p>
-          <a:p>
-            <a:r>
-              <a:t>Webapp/docs/architecture/ADR-001-microservices.md — records why microservices were selected and the tradeoffs.</a:t>
-            </a:r>
-          </a:p>
-          <a:p>
-            <a:r>
-              <a:t>Architecture Decision Records (ADRs) preserve the reasoning behind important engineering choices.</a:t>
+              <a:t>10</a:t>
+            </a:r>
+          </a:p>
+        </p:txBody>
+      </p:sp>
+      <p:sp>
+        <p:nvSpPr>
+          <p:cNvPr id="5" name="Rounded Rectangle 4"/>
+          <p:cNvSpPr/>
+          <p:nvPr/>
+        </p:nvSpPr>
+        <p:spPr>
+          <a:xfrm>
+            <a:off x="731520" y="1371600"/>
+            <a:ext cx="10789920" cy="4937760"/>
+          </a:xfrm>
+          <a:prstGeom prst="roundRect">
+            <a:avLst/>
+          </a:prstGeom>
+          <a:solidFill>
+            <a:srgbClr val="1F2430"/>
+          </a:solidFill>
+          <a:ln>
+            <a:solidFill>
+              <a:srgbClr val="1F2430"/>
+            </a:solidFill>
+          </a:ln>
+        </p:spPr>
+        <p:style>
+          <a:lnRef idx="1">
+            <a:schemeClr val="accent1"/>
+          </a:lnRef>
+          <a:fillRef idx="3">
+            <a:schemeClr val="accent1"/>
+          </a:fillRef>
+          <a:effectRef idx="2">
+            <a:schemeClr val="accent1"/>
+          </a:effectRef>
+          <a:fontRef idx="minor">
+            <a:schemeClr val="lt1"/>
+          </a:fontRef>
+        </p:style>
+        <p:txBody>
+          <a:bodyPr wrap="square" rtlCol="0" anchor="ctr"/>
+          <a:lstStyle/>
+          <a:p>
+            <a:r>
+              <a:rPr dirty="0">
+                <a:highlight>
+                  <a:srgbClr val="000080"/>
+                </a:highlight>
+              </a:rPr>
+              <a:t># Python</a:t>
+            </a:r>
+          </a:p>
+          <a:p>
+            <a:r>
+              <a:rPr dirty="0">
+                <a:highlight>
+                  <a:srgbClr val="000080"/>
+                </a:highlight>
+              </a:rPr>
+              <a:t>__</a:t>
+            </a:r>
+            <a:r>
+              <a:rPr dirty="0" err="1">
+                <a:highlight>
+                  <a:srgbClr val="000080"/>
+                </a:highlight>
+              </a:rPr>
+              <a:t>pycache</a:t>
+            </a:r>
+            <a:r>
+              <a:rPr dirty="0">
+                <a:highlight>
+                  <a:srgbClr val="000080"/>
+                </a:highlight>
+              </a:rPr>
+              <a:t>__/</a:t>
+            </a:r>
+          </a:p>
+          <a:p>
+            <a:r>
+              <a:rPr dirty="0">
+                <a:highlight>
+                  <a:srgbClr val="000080"/>
+                </a:highlight>
+              </a:rPr>
+              <a:t>*.</a:t>
+            </a:r>
+            <a:r>
+              <a:rPr dirty="0" err="1">
+                <a:highlight>
+                  <a:srgbClr val="000080"/>
+                </a:highlight>
+              </a:rPr>
+              <a:t>py</a:t>
+            </a:r>
+            <a:r>
+              <a:rPr dirty="0">
+                <a:highlight>
+                  <a:srgbClr val="000080"/>
+                </a:highlight>
+              </a:rPr>
+              <a:t>[cod]</a:t>
+            </a:r>
+          </a:p>
+          <a:p>
+            <a:endParaRPr dirty="0">
+              <a:highlight>
+                <a:srgbClr val="000080"/>
+              </a:highlight>
+            </a:endParaRPr>
+          </a:p>
+          <a:p>
+            <a:r>
+              <a:rPr dirty="0">
+                <a:highlight>
+                  <a:srgbClr val="000080"/>
+                </a:highlight>
+              </a:rPr>
+              <a:t># Virtual environments</a:t>
+            </a:r>
+          </a:p>
+          <a:p>
+            <a:r>
+              <a:rPr dirty="0">
+                <a:highlight>
+                  <a:srgbClr val="000080"/>
+                </a:highlight>
+              </a:rPr>
+              <a:t>.</a:t>
+            </a:r>
+            <a:r>
+              <a:rPr dirty="0" err="1">
+                <a:highlight>
+                  <a:srgbClr val="000080"/>
+                </a:highlight>
+              </a:rPr>
+              <a:t>venv</a:t>
+            </a:r>
+            <a:r>
+              <a:rPr dirty="0">
+                <a:highlight>
+                  <a:srgbClr val="000080"/>
+                </a:highlight>
+              </a:rPr>
+              <a:t>/</a:t>
+            </a:r>
+          </a:p>
+          <a:p>
+            <a:r>
+              <a:rPr dirty="0" err="1">
+                <a:highlight>
+                  <a:srgbClr val="000080"/>
+                </a:highlight>
+              </a:rPr>
+              <a:t>venv</a:t>
+            </a:r>
+            <a:r>
+              <a:rPr dirty="0">
+                <a:highlight>
+                  <a:srgbClr val="000080"/>
+                </a:highlight>
+              </a:rPr>
+              <a:t>/</a:t>
+            </a:r>
+          </a:p>
+          <a:p>
+            <a:r>
+              <a:rPr dirty="0">
+                <a:highlight>
+                  <a:srgbClr val="000080"/>
+                </a:highlight>
+              </a:rPr>
+              <a:t>env/</a:t>
+            </a:r>
+          </a:p>
+          <a:p>
+            <a:endParaRPr dirty="0">
+              <a:highlight>
+                <a:srgbClr val="000080"/>
+              </a:highlight>
+            </a:endParaRPr>
+          </a:p>
+          <a:p>
+            <a:r>
+              <a:rPr dirty="0">
+                <a:highlight>
+                  <a:srgbClr val="000080"/>
+                </a:highlight>
+              </a:rPr>
+              <a:t># Secrets / environment variables</a:t>
+            </a:r>
+          </a:p>
+          <a:p>
+            <a:r>
+              <a:rPr dirty="0">
+                <a:highlight>
+                  <a:srgbClr val="000080"/>
+                </a:highlight>
+              </a:rPr>
+              <a:t>.env</a:t>
+            </a:r>
+          </a:p>
+          <a:p>
+            <a:r>
+              <a:rPr dirty="0">
+                <a:highlight>
+                  <a:srgbClr val="000080"/>
+                </a:highlight>
+              </a:rPr>
+              <a:t>.env.*</a:t>
+            </a:r>
+          </a:p>
+          <a:p>
+            <a:endParaRPr dirty="0">
+              <a:highlight>
+                <a:srgbClr val="000080"/>
+              </a:highlight>
+            </a:endParaRPr>
+          </a:p>
+          <a:p>
+            <a:r>
+              <a:rPr dirty="0">
+                <a:highlight>
+                  <a:srgbClr val="000080"/>
+                </a:highlight>
+              </a:rPr>
+              <a:t># Microsoft Office temporary lock files</a:t>
+            </a:r>
+          </a:p>
+          <a:p>
+            <a:r>
+              <a:rPr dirty="0">
+                <a:highlight>
+                  <a:srgbClr val="000080"/>
+                </a:highlight>
+              </a:rPr>
+              <a:t>~$*</a:t>
+            </a:r>
+          </a:p>
+          <a:p>
+            <a:endParaRPr dirty="0">
+              <a:highlight>
+                <a:srgbClr val="000080"/>
+              </a:highlight>
+            </a:endParaRPr>
+          </a:p>
+          <a:p>
+            <a:r>
+              <a:rPr dirty="0">
+                <a:highlight>
+                  <a:srgbClr val="000080"/>
+                </a:highlight>
+              </a:rPr>
+              <a:t># Terraform</a:t>
+            </a:r>
+          </a:p>
+          <a:p>
+            <a:r>
+              <a:rPr dirty="0">
+                <a:highlight>
+                  <a:srgbClr val="000080"/>
+                </a:highlight>
+              </a:rPr>
+              <a:t>.terraform/</a:t>
+            </a:r>
+          </a:p>
+          <a:p>
+            <a:r>
+              <a:rPr dirty="0">
+                <a:highlight>
+                  <a:srgbClr val="000080"/>
+                </a:highlight>
+              </a:rPr>
+              <a:t>*.</a:t>
+            </a:r>
+            <a:r>
+              <a:rPr dirty="0" err="1">
+                <a:highlight>
+                  <a:srgbClr val="000080"/>
+                </a:highlight>
+              </a:rPr>
+              <a:t>tfstate</a:t>
+            </a:r>
+            <a:endParaRPr dirty="0">
+              <a:highlight>
+                <a:srgbClr val="000080"/>
+              </a:highlight>
+            </a:endParaRPr>
+          </a:p>
+          <a:p>
+            <a:r>
+              <a:rPr dirty="0">
+                <a:highlight>
+                  <a:srgbClr val="000080"/>
+                </a:highlight>
+              </a:rPr>
+              <a:t>*.</a:t>
+            </a:r>
+            <a:r>
+              <a:rPr dirty="0" err="1">
+                <a:highlight>
+                  <a:srgbClr val="000080"/>
+                </a:highlight>
+              </a:rPr>
+              <a:t>tfstate</a:t>
+            </a:r>
+            <a:r>
+              <a:rPr dirty="0">
+                <a:highlight>
+                  <a:srgbClr val="000080"/>
+                </a:highlight>
+              </a:rPr>
+              <a:t>.*</a:t>
+            </a:r>
+          </a:p>
+          <a:p>
+            <a:r>
+              <a:rPr dirty="0">
+                <a:highlight>
+                  <a:srgbClr val="000080"/>
+                </a:highlight>
+              </a:rPr>
+              <a:t>*.</a:t>
+            </a:r>
+            <a:r>
+              <a:rPr dirty="0" err="1">
+                <a:highlight>
+                  <a:srgbClr val="000080"/>
+                </a:highlight>
+              </a:rPr>
+              <a:t>tfvars</a:t>
+            </a:r>
+            <a:endParaRPr dirty="0">
+              <a:highlight>
+                <a:srgbClr val="000080"/>
+              </a:highlight>
+            </a:endParaRPr>
+          </a:p>
+          <a:p>
+            <a:endParaRPr dirty="0">
+              <a:highlight>
+                <a:srgbClr val="000080"/>
+              </a:highlight>
+            </a:endParaRPr>
+          </a:p>
+          <a:p>
+            <a:r>
+              <a:rPr dirty="0">
+                <a:highlight>
+                  <a:srgbClr val="000080"/>
+                </a:highlight>
+              </a:rPr>
+              <a:t># Node / Next.js</a:t>
+            </a:r>
+          </a:p>
+          <a:p>
+            <a:r>
+              <a:rPr dirty="0" err="1">
+                <a:highlight>
+                  <a:srgbClr val="000080"/>
+                </a:highlight>
+              </a:rPr>
+              <a:t>node_modules</a:t>
+            </a:r>
+            <a:r>
+              <a:rPr dirty="0">
+                <a:highlight>
+                  <a:srgbClr val="000080"/>
+                </a:highlight>
+              </a:rPr>
+              <a:t>/</a:t>
+            </a:r>
+          </a:p>
+          <a:p>
+            <a:r>
+              <a:rPr dirty="0">
+                <a:highlight>
+                  <a:srgbClr val="000080"/>
+                </a:highlight>
+              </a:rPr>
+              <a:t>.next/</a:t>
+            </a:r>
+          </a:p>
+          <a:p>
+            <a:endParaRPr dirty="0">
+              <a:highlight>
+                <a:srgbClr val="000080"/>
+              </a:highlight>
+            </a:endParaRPr>
+          </a:p>
+          <a:p>
+            <a:r>
+              <a:rPr dirty="0">
+                <a:highlight>
+                  <a:srgbClr val="000080"/>
+                </a:highlight>
+              </a:rPr>
+              <a:t># OS / logs</a:t>
+            </a:r>
+          </a:p>
+          <a:p>
+            <a:r>
+              <a:rPr dirty="0" err="1">
+                <a:highlight>
+                  <a:srgbClr val="000080"/>
+                </a:highlight>
+              </a:rPr>
+              <a:t>Thumbs.db</a:t>
+            </a:r>
+            <a:endParaRPr dirty="0">
+              <a:highlight>
+                <a:srgbClr val="000080"/>
+              </a:highlight>
+            </a:endParaRPr>
+          </a:p>
+          <a:p>
+            <a:r>
+              <a:rPr dirty="0">
+                <a:highlight>
+                  <a:srgbClr val="000080"/>
+                </a:highlight>
+              </a:rPr>
+              <a:t>.</a:t>
+            </a:r>
+            <a:r>
+              <a:rPr dirty="0" err="1">
+                <a:highlight>
+                  <a:srgbClr val="000080"/>
+                </a:highlight>
+              </a:rPr>
+              <a:t>DS_Store</a:t>
+            </a:r>
+            <a:endParaRPr dirty="0">
+              <a:highlight>
+                <a:srgbClr val="000080"/>
+              </a:highlight>
+            </a:endParaRPr>
+          </a:p>
+          <a:p>
+            <a:r>
+              <a:rPr dirty="0">
+                <a:highlight>
+                  <a:srgbClr val="000080"/>
+                </a:highlight>
+              </a:rPr>
+              <a:t>*.log</a:t>
             </a:r>
           </a:p>
         </p:txBody>
@@ -4070,7 +4087,7 @@
               </a:defRPr>
             </a:pPr>
             <a:r>
-              <a:t>Step 11 — Add a Platform Health Service</a:t>
+              <a:t>Steps 8–10 — Document the Architecture</a:t>
             </a:r>
           </a:p>
         </p:txBody>
@@ -4149,120 +4166,60 @@
               </a:defRPr>
             </a:pPr>
             <a:r>
-              <a:t>12</a:t>
-            </a:r>
-          </a:p>
-        </p:txBody>
-      </p:sp>
-      <p:sp>
-        <p:nvSpPr>
-          <p:cNvPr id="5" name="Rounded Rectangle 4"/>
-          <p:cNvSpPr/>
-          <p:nvPr/>
-        </p:nvSpPr>
-        <p:spPr>
-          <a:xfrm>
-            <a:off x="731520" y="1508760"/>
-            <a:ext cx="10789920" cy="4206240"/>
-          </a:xfrm>
-          <a:prstGeom prst="roundRect">
-            <a:avLst/>
-          </a:prstGeom>
-          <a:solidFill>
-            <a:srgbClr val="1F2430"/>
-          </a:solidFill>
-          <a:ln>
-            <a:solidFill>
-              <a:srgbClr val="1F2430"/>
-            </a:solidFill>
-          </a:ln>
-        </p:spPr>
-        <p:style>
-          <a:lnRef idx="1">
-            <a:schemeClr val="accent1"/>
-          </a:lnRef>
-          <a:fillRef idx="3">
-            <a:schemeClr val="accent1"/>
-          </a:fillRef>
-          <a:effectRef idx="2">
-            <a:schemeClr val="accent1"/>
-          </a:effectRef>
-          <a:fontRef idx="minor">
-            <a:schemeClr val="lt1"/>
-          </a:fontRef>
-        </p:style>
-        <p:txBody>
-          <a:bodyPr wrap="square" rtlCol="0" anchor="ctr"/>
-          <a:lstStyle/>
-          <a:p>
-            <a:r>
-              <a:t>Webapp/</a:t>
-            </a:r>
-          </a:p>
-          <a:p>
-            <a:r>
-              <a:t>└── services/</a:t>
-            </a:r>
-          </a:p>
-          <a:p>
-            <a:r>
-              <a:t>    └── platform-health/</a:t>
-            </a:r>
-          </a:p>
-          <a:p>
-            <a:r>
-              <a:t>        ├── main.py</a:t>
-            </a:r>
-          </a:p>
-          <a:p>
-            <a:r>
-              <a:t>        └── requirements.txt</a:t>
-            </a:r>
-          </a:p>
-          <a:p>
-            <a:endParaRPr/>
-          </a:p>
-          <a:p>
-            <a:r>
-              <a:t># Purpose:</a:t>
-            </a:r>
-          </a:p>
-          <a:p>
-            <a:r>
-              <a:t># First working service in the actual Webapp.</a:t>
-            </a:r>
-          </a:p>
-          <a:p>
-            <a:r>
-              <a:t># Proves the local FastAPI environment works.</a:t>
-            </a:r>
-          </a:p>
-          <a:p>
-            <a:r>
-              <a:t># Later, each real microservice exposes its own health endpoint.</a:t>
-            </a:r>
-          </a:p>
-          <a:p>
-            <a:endParaRPr/>
-          </a:p>
-          <a:p>
-            <a:r>
-              <a:t># Examples:</a:t>
-            </a:r>
-          </a:p>
-          <a:p>
-            <a:r>
-              <a:t># user-service/health</a:t>
-            </a:r>
-          </a:p>
-          <a:p>
-            <a:r>
-              <a:t># vehicle-service/health</a:t>
-            </a:r>
-          </a:p>
-          <a:p>
-            <a:r>
-              <a:t># booking-service/health</a:t>
+              <a:t>11</a:t>
+            </a:r>
+          </a:p>
+        </p:txBody>
+      </p:sp>
+      <p:sp>
+        <p:nvSpPr>
+          <p:cNvPr id="5" name="TextBox 4"/>
+          <p:cNvSpPr txBox="1"/>
+          <p:nvPr/>
+        </p:nvSpPr>
+        <p:spPr>
+          <a:xfrm>
+            <a:off x="731520" y="1417320"/>
+            <a:ext cx="10789920" cy="4800600"/>
+          </a:xfrm>
+          <a:prstGeom prst="rect">
+            <a:avLst/>
+          </a:prstGeom>
+          <a:noFill/>
+        </p:spPr>
+        <p:txBody>
+          <a:bodyPr wrap="square">
+            <a:spAutoFit/>
+          </a:bodyPr>
+          <a:lstStyle/>
+          <a:p>
+            <a:r>
+              <a:t>LearningPath/Project-01-Foundation/README.md — objectives, steps, labs and progress for Project 1.</a:t>
+            </a:r>
+          </a:p>
+          <a:p>
+            <a:r>
+              <a:t>LearningPath/Project-01-Foundation/notes/ — learning notes and explanations.</a:t>
+            </a:r>
+          </a:p>
+          <a:p>
+            <a:r>
+              <a:t>Webapp/README.md — explains the actual application, technology stack and current status.</a:t>
+            </a:r>
+          </a:p>
+          <a:p>
+            <a:r>
+              <a:t>Webapp/docs/architecture/architecture.md — defines service responsibilities and boundaries.</a:t>
+            </a:r>
+          </a:p>
+          <a:p>
+            <a:r>
+              <a:t>Webapp/docs/architecture/ADR-001-microservices.md — records why microservices were selected and the tradeoffs.</a:t>
+            </a:r>
+          </a:p>
+          <a:p>
+            <a:r>
+              <a:t>Architecture Decision Records (ADRs) preserve the reasoning behind important engineering choices.</a:t>
             </a:r>
           </a:p>
         </p:txBody>
@@ -4330,7 +4287,7 @@
               </a:defRPr>
             </a:pPr>
             <a:r>
-              <a:t>Steps 12–14 — Virtual Environment + FastAPI</a:t>
+              <a:t>Step 11 — Add a Platform Health Service</a:t>
             </a:r>
           </a:p>
         </p:txBody>
@@ -4409,7 +4366,7 @@
               </a:defRPr>
             </a:pPr>
             <a:r>
-              <a:t>13</a:t>
+              <a:t>12</a:t>
             </a:r>
           </a:p>
         </p:txBody>
@@ -4422,8 +4379,8 @@
         </p:nvSpPr>
         <p:spPr>
           <a:xfrm>
-            <a:off x="731520" y="1417320"/>
-            <a:ext cx="10789920" cy="4800600"/>
+            <a:off x="731520" y="1508760"/>
+            <a:ext cx="10789920" cy="4206240"/>
           </a:xfrm>
           <a:prstGeom prst="roundRect">
             <a:avLst/>
@@ -4456,114 +4413,73 @@
           <a:lstStyle/>
           <a:p>
             <a:r>
-              <a:rPr dirty="0"/>
-              <a:t># From car-rental-microservices repository root</a:t>
-            </a:r>
-          </a:p>
-          <a:p>
-            <a:r>
-              <a:rPr dirty="0"/>
-              <a:t>cd Webapp\services\platform-health</a:t>
-            </a:r>
-          </a:p>
-          <a:p>
-            <a:endParaRPr dirty="0"/>
-          </a:p>
-          <a:p>
-            <a:r>
-              <a:rPr dirty="0"/>
-              <a:t># Create an isolated Python environment for this service.</a:t>
-            </a:r>
-          </a:p>
-          <a:p>
-            <a:r>
-              <a:rPr dirty="0"/>
-              <a:t>python -m </a:t>
-            </a:r>
-            <a:r>
-              <a:rPr dirty="0" err="1"/>
-              <a:t>venv</a:t>
-            </a:r>
-            <a:r>
-              <a:rPr dirty="0"/>
-              <a:t> .</a:t>
-            </a:r>
-            <a:r>
-              <a:rPr dirty="0" err="1"/>
-              <a:t>venv</a:t>
-            </a:r>
-            <a:endParaRPr dirty="0"/>
-          </a:p>
-          <a:p>
-            <a:endParaRPr dirty="0"/>
-          </a:p>
-          <a:p>
-            <a:r>
-              <a:rPr dirty="0"/>
-              <a:t># Activate it in PowerShell.</a:t>
-            </a:r>
-          </a:p>
-          <a:p>
-            <a:r>
-              <a:rPr lang="en-US" dirty="0"/>
-              <a:t>source .</a:t>
-            </a:r>
-            <a:r>
-              <a:rPr lang="en-US" dirty="0" err="1"/>
-              <a:t>venv</a:t>
-            </a:r>
-            <a:r>
-              <a:rPr lang="en-US" dirty="0"/>
-              <a:t>/Scripts/activate</a:t>
-            </a:r>
-          </a:p>
-          <a:p>
-            <a:endParaRPr dirty="0"/>
-          </a:p>
-          <a:p>
-            <a:r>
-              <a:rPr dirty="0"/>
-              <a:t># Upgrade pip and install the web framework/server.</a:t>
-            </a:r>
-          </a:p>
-          <a:p>
-            <a:r>
-              <a:rPr dirty="0"/>
-              <a:t>python -m pip install --upgrade pip</a:t>
-            </a:r>
-          </a:p>
-          <a:p>
-            <a:r>
-              <a:rPr dirty="0"/>
-              <a:t>pip install </a:t>
-            </a:r>
-            <a:r>
-              <a:rPr dirty="0" err="1"/>
-              <a:t>fastapi</a:t>
-            </a:r>
-            <a:r>
-              <a:rPr dirty="0"/>
-              <a:t> </a:t>
-            </a:r>
-            <a:r>
-              <a:rPr dirty="0" err="1"/>
-              <a:t>uvicorn</a:t>
-            </a:r>
-            <a:endParaRPr dirty="0"/>
-          </a:p>
-          <a:p>
-            <a:endParaRPr dirty="0"/>
-          </a:p>
-          <a:p>
-            <a:r>
-              <a:rPr dirty="0"/>
-              <a:t># Confirm installed packages.</a:t>
-            </a:r>
-          </a:p>
-          <a:p>
-            <a:r>
-              <a:rPr dirty="0"/>
-              <a:t>pip list</a:t>
+              <a:t>Webapp/</a:t>
+            </a:r>
+          </a:p>
+          <a:p>
+            <a:r>
+              <a:t>└── services/</a:t>
+            </a:r>
+          </a:p>
+          <a:p>
+            <a:r>
+              <a:t>    └── platform-health/</a:t>
+            </a:r>
+          </a:p>
+          <a:p>
+            <a:r>
+              <a:t>        ├── main.py</a:t>
+            </a:r>
+          </a:p>
+          <a:p>
+            <a:r>
+              <a:t>        └── requirements.txt</a:t>
+            </a:r>
+          </a:p>
+          <a:p>
+            <a:endParaRPr/>
+          </a:p>
+          <a:p>
+            <a:r>
+              <a:t># Purpose:</a:t>
+            </a:r>
+          </a:p>
+          <a:p>
+            <a:r>
+              <a:t># First working service in the actual Webapp.</a:t>
+            </a:r>
+          </a:p>
+          <a:p>
+            <a:r>
+              <a:t># Proves the local FastAPI environment works.</a:t>
+            </a:r>
+          </a:p>
+          <a:p>
+            <a:r>
+              <a:t># Later, each real microservice exposes its own health endpoint.</a:t>
+            </a:r>
+          </a:p>
+          <a:p>
+            <a:endParaRPr/>
+          </a:p>
+          <a:p>
+            <a:r>
+              <a:t># Examples:</a:t>
+            </a:r>
+          </a:p>
+          <a:p>
+            <a:r>
+              <a:t># user-service/health</a:t>
+            </a:r>
+          </a:p>
+          <a:p>
+            <a:r>
+              <a:t># vehicle-service/health</a:t>
+            </a:r>
+          </a:p>
+          <a:p>
+            <a:r>
+              <a:t># booking-service/health</a:t>
             </a:r>
           </a:p>
         </p:txBody>
@@ -4631,49 +4547,14 @@
               </a:defRPr>
             </a:pPr>
             <a:r>
-              <a:t>Step 15 — Build main.py</a:t>
-            </a:r>
-          </a:p>
-        </p:txBody>
-      </p:sp>
-      <p:sp>
-        <p:nvSpPr>
-          <p:cNvPr id="3" name="TextBox 2"/>
-          <p:cNvSpPr txBox="1"/>
-          <p:nvPr/>
-        </p:nvSpPr>
-        <p:spPr>
-          <a:xfrm>
-            <a:off x="566928" y="932688"/>
-            <a:ext cx="10972800" cy="384048"/>
-          </a:xfrm>
-          <a:prstGeom prst="rect">
-            <a:avLst/>
-          </a:prstGeom>
-          <a:noFill/>
-        </p:spPr>
-        <p:txBody>
-          <a:bodyPr wrap="none">
-            <a:spAutoFit/>
-          </a:bodyPr>
-          <a:lstStyle/>
-          <a:p>
-            <a:pPr>
-              <a:defRPr sz="1300">
-                <a:solidFill>
-                  <a:srgbClr val="2B68B2"/>
-                </a:solidFill>
-              </a:defRPr>
-            </a:pPr>
-            <a:r>
-              <a:t>The comments explain what each part is doing.</a:t>
-            </a:r>
-          </a:p>
-        </p:txBody>
-      </p:sp>
-      <p:sp>
-        <p:nvSpPr>
-          <p:cNvPr id="4" name="Rectangle 3"/>
+              <a:t>Steps 12–14 — Virtual Environment + FastAPI</a:t>
+            </a:r>
+          </a:p>
+        </p:txBody>
+      </p:sp>
+      <p:sp>
+        <p:nvSpPr>
+          <p:cNvPr id="3" name="Rectangle 2"/>
           <p:cNvSpPr/>
           <p:nvPr/>
         </p:nvSpPr>
@@ -4717,7 +4598,7 @@
       </p:sp>
       <p:sp>
         <p:nvSpPr>
-          <p:cNvPr id="5" name="TextBox 4"/>
+          <p:cNvPr id="4" name="TextBox 3"/>
           <p:cNvSpPr txBox="1"/>
           <p:nvPr/>
         </p:nvSpPr>
@@ -4745,21 +4626,21 @@
               </a:defRPr>
             </a:pPr>
             <a:r>
-              <a:t>14</a:t>
-            </a:r>
-          </a:p>
-        </p:txBody>
-      </p:sp>
-      <p:sp>
-        <p:nvSpPr>
-          <p:cNvPr id="6" name="Rounded Rectangle 5"/>
+              <a:t>13</a:t>
+            </a:r>
+          </a:p>
+        </p:txBody>
+      </p:sp>
+      <p:sp>
+        <p:nvSpPr>
+          <p:cNvPr id="5" name="Rounded Rectangle 4"/>
           <p:cNvSpPr/>
           <p:nvPr/>
         </p:nvSpPr>
         <p:spPr>
           <a:xfrm>
-            <a:off x="652272" y="969264"/>
-            <a:ext cx="10789920" cy="5074920"/>
+            <a:off x="731520" y="1417320"/>
+            <a:ext cx="10789920" cy="4800600"/>
           </a:xfrm>
           <a:prstGeom prst="roundRect">
             <a:avLst/>
@@ -4792,336 +4673,114 @@
           <a:lstStyle/>
           <a:p>
             <a:r>
-              <a:rPr dirty="0">
-                <a:highlight>
-                  <a:srgbClr val="000080"/>
-                </a:highlight>
-              </a:rPr>
-              <a:t>from </a:t>
-            </a:r>
-            <a:r>
-              <a:rPr dirty="0" err="1">
-                <a:highlight>
-                  <a:srgbClr val="000080"/>
-                </a:highlight>
-              </a:rPr>
+              <a:rPr dirty="0"/>
+              <a:t># From car-rental-microservices repository root</a:t>
+            </a:r>
+          </a:p>
+          <a:p>
+            <a:r>
+              <a:rPr dirty="0"/>
+              <a:t>cd Webapp\services\platform-health</a:t>
+            </a:r>
+          </a:p>
+          <a:p>
+            <a:endParaRPr dirty="0"/>
+          </a:p>
+          <a:p>
+            <a:r>
+              <a:rPr dirty="0"/>
+              <a:t># Create an isolated Python environment for this service.</a:t>
+            </a:r>
+          </a:p>
+          <a:p>
+            <a:r>
+              <a:rPr dirty="0"/>
+              <a:t>python -m </a:t>
+            </a:r>
+            <a:r>
+              <a:rPr dirty="0" err="1"/>
+              <a:t>venv</a:t>
+            </a:r>
+            <a:r>
+              <a:rPr dirty="0"/>
+              <a:t> .</a:t>
+            </a:r>
+            <a:r>
+              <a:rPr dirty="0" err="1"/>
+              <a:t>venv</a:t>
+            </a:r>
+            <a:endParaRPr dirty="0"/>
+          </a:p>
+          <a:p>
+            <a:endParaRPr dirty="0"/>
+          </a:p>
+          <a:p>
+            <a:r>
+              <a:rPr dirty="0"/>
+              <a:t># Activate it in PowerShell.</a:t>
+            </a:r>
+          </a:p>
+          <a:p>
+            <a:r>
+              <a:rPr lang="en-US" dirty="0"/>
+              <a:t>source .</a:t>
+            </a:r>
+            <a:r>
+              <a:rPr lang="en-US" dirty="0" err="1"/>
+              <a:t>venv</a:t>
+            </a:r>
+            <a:r>
+              <a:rPr lang="en-US" dirty="0"/>
+              <a:t>/Scripts/activate</a:t>
+            </a:r>
+          </a:p>
+          <a:p>
+            <a:endParaRPr dirty="0"/>
+          </a:p>
+          <a:p>
+            <a:r>
+              <a:rPr dirty="0"/>
+              <a:t># Upgrade pip and install the web framework/server.</a:t>
+            </a:r>
+          </a:p>
+          <a:p>
+            <a:r>
+              <a:rPr dirty="0"/>
+              <a:t>python -m pip install --upgrade pip</a:t>
+            </a:r>
+          </a:p>
+          <a:p>
+            <a:r>
+              <a:rPr dirty="0"/>
+              <a:t>pip install </a:t>
+            </a:r>
+            <a:r>
+              <a:rPr dirty="0" err="1"/>
               <a:t>fastapi</a:t>
             </a:r>
             <a:r>
-              <a:rPr dirty="0">
-                <a:highlight>
-                  <a:srgbClr val="000080"/>
-                </a:highlight>
-              </a:rPr>
-              <a:t> import </a:t>
-            </a:r>
-            <a:r>
-              <a:rPr dirty="0" err="1">
-                <a:highlight>
-                  <a:srgbClr val="000080"/>
-                </a:highlight>
-              </a:rPr>
-              <a:t>FastAPI</a:t>
-            </a:r>
-            <a:endParaRPr dirty="0">
-              <a:highlight>
-                <a:srgbClr val="000080"/>
-              </a:highlight>
-            </a:endParaRPr>
-          </a:p>
-          <a:p>
-            <a:endParaRPr dirty="0">
-              <a:highlight>
-                <a:srgbClr val="000080"/>
-              </a:highlight>
-            </a:endParaRPr>
-          </a:p>
-          <a:p>
-            <a:r>
-              <a:rPr dirty="0">
-                <a:highlight>
-                  <a:srgbClr val="000080"/>
-                </a:highlight>
-              </a:rPr>
-              <a:t># Create the </a:t>
-            </a:r>
-            <a:r>
-              <a:rPr dirty="0" err="1">
-                <a:highlight>
-                  <a:srgbClr val="000080"/>
-                </a:highlight>
-              </a:rPr>
-              <a:t>FastAPI</a:t>
-            </a:r>
-            <a:r>
-              <a:rPr dirty="0">
-                <a:highlight>
-                  <a:srgbClr val="000080"/>
-                </a:highlight>
-              </a:rPr>
-              <a:t> application object.</a:t>
-            </a:r>
-          </a:p>
-          <a:p>
-            <a:r>
-              <a:rPr dirty="0">
-                <a:highlight>
-                  <a:srgbClr val="000080"/>
-                </a:highlight>
-              </a:rPr>
-              <a:t># </a:t>
-            </a:r>
-            <a:r>
-              <a:rPr dirty="0" err="1">
-                <a:highlight>
-                  <a:srgbClr val="000080"/>
-                </a:highlight>
-              </a:rPr>
-              <a:t>Uvicorn</a:t>
-            </a:r>
-            <a:r>
-              <a:rPr dirty="0">
-                <a:highlight>
-                  <a:srgbClr val="000080"/>
-                </a:highlight>
-              </a:rPr>
-              <a:t> loads this object and exposes it over HTTP.</a:t>
-            </a:r>
-          </a:p>
-          <a:p>
-            <a:r>
-              <a:rPr dirty="0">
-                <a:highlight>
-                  <a:srgbClr val="000080"/>
-                </a:highlight>
-              </a:rPr>
-              <a:t>app = </a:t>
-            </a:r>
-            <a:r>
-              <a:rPr dirty="0" err="1">
-                <a:highlight>
-                  <a:srgbClr val="000080"/>
-                </a:highlight>
-              </a:rPr>
-              <a:t>FastAPI</a:t>
-            </a:r>
-            <a:r>
-              <a:rPr dirty="0">
-                <a:highlight>
-                  <a:srgbClr val="000080"/>
-                </a:highlight>
-              </a:rPr>
-              <a:t>(</a:t>
-            </a:r>
-          </a:p>
-          <a:p>
-            <a:r>
-              <a:rPr dirty="0">
-                <a:highlight>
-                  <a:srgbClr val="000080"/>
-                </a:highlight>
-              </a:rPr>
-              <a:t>    title="Car Rental Platform Health Service",</a:t>
-            </a:r>
-          </a:p>
-          <a:p>
-            <a:r>
-              <a:rPr dirty="0">
-                <a:highlight>
-                  <a:srgbClr val="000080"/>
-                </a:highlight>
-              </a:rPr>
-              <a:t>    description="Project 1 development environment test.",</a:t>
-            </a:r>
-          </a:p>
-          <a:p>
-            <a:r>
-              <a:rPr dirty="0">
-                <a:highlight>
-                  <a:srgbClr val="000080"/>
-                </a:highlight>
-              </a:rPr>
-              <a:t>    version="1.0.0",</a:t>
-            </a:r>
-          </a:p>
-          <a:p>
-            <a:r>
-              <a:rPr dirty="0">
-                <a:highlight>
-                  <a:srgbClr val="000080"/>
-                </a:highlight>
-              </a:rPr>
-              <a:t>)</a:t>
-            </a:r>
-          </a:p>
-          <a:p>
-            <a:endParaRPr dirty="0">
-              <a:highlight>
-                <a:srgbClr val="000080"/>
-              </a:highlight>
-            </a:endParaRPr>
-          </a:p>
-          <a:p>
-            <a:r>
-              <a:rPr dirty="0">
-                <a:highlight>
-                  <a:srgbClr val="000080"/>
-                </a:highlight>
-              </a:rPr>
-              <a:t># GET / proves the API itself is responding.</a:t>
-            </a:r>
-          </a:p>
-          <a:p>
-            <a:r>
-              <a:rPr dirty="0">
-                <a:highlight>
-                  <a:srgbClr val="000080"/>
-                </a:highlight>
-              </a:rPr>
-              <a:t>@app.get("/")</a:t>
-            </a:r>
-          </a:p>
-          <a:p>
-            <a:r>
-              <a:rPr dirty="0">
-                <a:highlight>
-                  <a:srgbClr val="000080"/>
-                </a:highlight>
-              </a:rPr>
-              <a:t>def root():</a:t>
-            </a:r>
-          </a:p>
-          <a:p>
-            <a:r>
-              <a:rPr dirty="0">
-                <a:highlight>
-                  <a:srgbClr val="000080"/>
-                </a:highlight>
-              </a:rPr>
-              <a:t>    return {</a:t>
-            </a:r>
-          </a:p>
-          <a:p>
-            <a:r>
-              <a:rPr dirty="0">
-                <a:highlight>
-                  <a:srgbClr val="000080"/>
-                </a:highlight>
-              </a:rPr>
-              <a:t>        "application": "car-rental-microservices",</a:t>
-            </a:r>
-          </a:p>
-          <a:p>
-            <a:r>
-              <a:rPr dirty="0">
-                <a:highlight>
-                  <a:srgbClr val="000080"/>
-                </a:highlight>
-              </a:rPr>
-              <a:t>        "message": "Car Rental Platform API is running",</a:t>
-            </a:r>
-          </a:p>
-          <a:p>
-            <a:r>
-              <a:rPr dirty="0">
-                <a:highlight>
-                  <a:srgbClr val="000080"/>
-                </a:highlight>
-              </a:rPr>
-              <a:t>    }</a:t>
-            </a:r>
-          </a:p>
-          <a:p>
-            <a:endParaRPr dirty="0">
-              <a:highlight>
-                <a:srgbClr val="000080"/>
-              </a:highlight>
-            </a:endParaRPr>
-          </a:p>
-          <a:p>
-            <a:r>
-              <a:rPr dirty="0">
-                <a:highlight>
-                  <a:srgbClr val="000080"/>
-                </a:highlight>
-              </a:rPr>
-              <a:t># GET /health proves the service is alive and responding.</a:t>
-            </a:r>
-          </a:p>
-          <a:p>
-            <a:r>
-              <a:rPr dirty="0">
-                <a:highlight>
-                  <a:srgbClr val="000080"/>
-                </a:highlight>
-              </a:rPr>
-              <a:t>@app.get("/health")</a:t>
-            </a:r>
-          </a:p>
-          <a:p>
-            <a:r>
-              <a:rPr dirty="0">
-                <a:highlight>
-                  <a:srgbClr val="000080"/>
-                </a:highlight>
-              </a:rPr>
-              <a:t>def </a:t>
-            </a:r>
-            <a:r>
-              <a:rPr dirty="0" err="1">
-                <a:highlight>
-                  <a:srgbClr val="000080"/>
-                </a:highlight>
-              </a:rPr>
-              <a:t>health_check</a:t>
-            </a:r>
-            <a:r>
-              <a:rPr dirty="0">
-                <a:highlight>
-                  <a:srgbClr val="000080"/>
-                </a:highlight>
-              </a:rPr>
-              <a:t>():</a:t>
-            </a:r>
-          </a:p>
-          <a:p>
-            <a:r>
-              <a:rPr dirty="0">
-                <a:highlight>
-                  <a:srgbClr val="000080"/>
-                </a:highlight>
-              </a:rPr>
-              <a:t>    return {</a:t>
-            </a:r>
-          </a:p>
-          <a:p>
-            <a:r>
-              <a:rPr dirty="0">
-                <a:highlight>
-                  <a:srgbClr val="000080"/>
-                </a:highlight>
-              </a:rPr>
-              <a:t>        "status": "healthy",</a:t>
-            </a:r>
-          </a:p>
-          <a:p>
-            <a:r>
-              <a:rPr dirty="0">
-                <a:highlight>
-                  <a:srgbClr val="000080"/>
-                </a:highlight>
-              </a:rPr>
-              <a:t>        "service": "platform-health",</a:t>
-            </a:r>
-          </a:p>
-          <a:p>
-            <a:r>
-              <a:rPr dirty="0">
-                <a:highlight>
-                  <a:srgbClr val="000080"/>
-                </a:highlight>
-              </a:rPr>
-              <a:t>    }</a:t>
+              <a:rPr dirty="0"/>
+              <a:t> </a:t>
+            </a:r>
+            <a:r>
+              <a:rPr dirty="0" err="1"/>
+              <a:t>uvicorn</a:t>
+            </a:r>
+            <a:endParaRPr dirty="0"/>
+          </a:p>
+          <a:p>
+            <a:endParaRPr dirty="0"/>
+          </a:p>
+          <a:p>
+            <a:r>
+              <a:rPr dirty="0"/>
+              <a:t># Confirm installed packages.</a:t>
+            </a:r>
+          </a:p>
+          <a:p>
+            <a:r>
+              <a:rPr dirty="0"/>
+              <a:t>pip list</a:t>
             </a:r>
           </a:p>
         </p:txBody>
@@ -5189,14 +4848,49 @@
               </a:defRPr>
             </a:pPr>
             <a:r>
-              <a:t>Step 16 — Start the API</a:t>
-            </a:r>
-          </a:p>
-        </p:txBody>
-      </p:sp>
-      <p:sp>
-        <p:nvSpPr>
-          <p:cNvPr id="3" name="Rectangle 2"/>
+              <a:t>Step 15 — Build main.py</a:t>
+            </a:r>
+          </a:p>
+        </p:txBody>
+      </p:sp>
+      <p:sp>
+        <p:nvSpPr>
+          <p:cNvPr id="3" name="TextBox 2"/>
+          <p:cNvSpPr txBox="1"/>
+          <p:nvPr/>
+        </p:nvSpPr>
+        <p:spPr>
+          <a:xfrm>
+            <a:off x="566928" y="932688"/>
+            <a:ext cx="10972800" cy="384048"/>
+          </a:xfrm>
+          <a:prstGeom prst="rect">
+            <a:avLst/>
+          </a:prstGeom>
+          <a:noFill/>
+        </p:spPr>
+        <p:txBody>
+          <a:bodyPr wrap="none">
+            <a:spAutoFit/>
+          </a:bodyPr>
+          <a:lstStyle/>
+          <a:p>
+            <a:pPr>
+              <a:defRPr sz="1300">
+                <a:solidFill>
+                  <a:srgbClr val="2B68B2"/>
+                </a:solidFill>
+              </a:defRPr>
+            </a:pPr>
+            <a:r>
+              <a:t>The comments explain what each part is doing.</a:t>
+            </a:r>
+          </a:p>
+        </p:txBody>
+      </p:sp>
+      <p:sp>
+        <p:nvSpPr>
+          <p:cNvPr id="4" name="Rectangle 3"/>
           <p:cNvSpPr/>
           <p:nvPr/>
         </p:nvSpPr>
@@ -5240,7 +4934,7 @@
       </p:sp>
       <p:sp>
         <p:nvSpPr>
-          <p:cNvPr id="4" name="TextBox 3"/>
+          <p:cNvPr id="5" name="TextBox 4"/>
           <p:cNvSpPr txBox="1"/>
           <p:nvPr/>
         </p:nvSpPr>
@@ -5268,21 +4962,21 @@
               </a:defRPr>
             </a:pPr>
             <a:r>
-              <a:t>15</a:t>
-            </a:r>
-          </a:p>
-        </p:txBody>
-      </p:sp>
-      <p:sp>
-        <p:nvSpPr>
-          <p:cNvPr id="5" name="Rounded Rectangle 4"/>
+              <a:t>14</a:t>
+            </a:r>
+          </a:p>
+        </p:txBody>
+      </p:sp>
+      <p:sp>
+        <p:nvSpPr>
+          <p:cNvPr id="6" name="Rounded Rectangle 5"/>
           <p:cNvSpPr/>
           <p:nvPr/>
         </p:nvSpPr>
         <p:spPr>
           <a:xfrm>
-            <a:off x="731520" y="1600200"/>
-            <a:ext cx="10789920" cy="3474720"/>
+            <a:off x="652272" y="969264"/>
+            <a:ext cx="10789920" cy="5074920"/>
           </a:xfrm>
           <a:prstGeom prst="roundRect">
             <a:avLst/>
@@ -5314,146 +5008,337 @@
           <a:bodyPr wrap="square" rtlCol="0" anchor="ctr"/>
           <a:lstStyle/>
           <a:p>
-            <a:pPr algn="ctr">
-              <a:defRPr sz="1700">
-                <a:solidFill>
-                  <a:srgbClr val="FFFFFF"/>
-                </a:solidFill>
-                <a:latin typeface="Consolas"/>
-              </a:defRPr>
-            </a:pPr>
-            <a:r>
-              <a:rPr dirty="0" err="1"/>
-              <a:t>uvicorn</a:t>
-            </a:r>
-            <a:r>
-              <a:rPr dirty="0"/>
-              <a:t> </a:t>
-            </a:r>
-            <a:r>
-              <a:rPr dirty="0" err="1"/>
-              <a:t>main:app</a:t>
-            </a:r>
-            <a:r>
-              <a:rPr dirty="0"/>
-              <a:t> --reload</a:t>
-            </a:r>
-            <a:br>
-              <a:rPr dirty="0"/>
-            </a:br>
-            <a:br>
-              <a:rPr dirty="0"/>
-            </a:br>
-            <a:r>
-              <a:rPr dirty="0"/>
-              <a:t># Meaning:</a:t>
-            </a:r>
-            <a:br>
-              <a:rPr dirty="0"/>
-            </a:br>
-            <a:r>
-              <a:rPr dirty="0"/>
+            <a:r>
+              <a:rPr dirty="0">
+                <a:highlight>
+                  <a:srgbClr val="000080"/>
+                </a:highlight>
+              </a:rPr>
+              <a:t>from </a:t>
+            </a:r>
+            <a:r>
+              <a:rPr dirty="0" err="1">
+                <a:highlight>
+                  <a:srgbClr val="000080"/>
+                </a:highlight>
+              </a:rPr>
+              <a:t>fastapi</a:t>
+            </a:r>
+            <a:r>
+              <a:rPr dirty="0">
+                <a:highlight>
+                  <a:srgbClr val="000080"/>
+                </a:highlight>
+              </a:rPr>
+              <a:t> import </a:t>
+            </a:r>
+            <a:r>
+              <a:rPr dirty="0" err="1">
+                <a:highlight>
+                  <a:srgbClr val="000080"/>
+                </a:highlight>
+              </a:rPr>
+              <a:t>FastAPI</a:t>
+            </a:r>
+            <a:endParaRPr dirty="0">
+              <a:highlight>
+                <a:srgbClr val="000080"/>
+              </a:highlight>
+            </a:endParaRPr>
+          </a:p>
+          <a:p>
+            <a:endParaRPr dirty="0">
+              <a:highlight>
+                <a:srgbClr val="000080"/>
+              </a:highlight>
+            </a:endParaRPr>
+          </a:p>
+          <a:p>
+            <a:r>
+              <a:rPr dirty="0">
+                <a:highlight>
+                  <a:srgbClr val="000080"/>
+                </a:highlight>
+              </a:rPr>
+              <a:t># Create the </a:t>
+            </a:r>
+            <a:r>
+              <a:rPr dirty="0" err="1">
+                <a:highlight>
+                  <a:srgbClr val="000080"/>
+                </a:highlight>
+              </a:rPr>
+              <a:t>FastAPI</a:t>
+            </a:r>
+            <a:r>
+              <a:rPr dirty="0">
+                <a:highlight>
+                  <a:srgbClr val="000080"/>
+                </a:highlight>
+              </a:rPr>
+              <a:t> application object.</a:t>
+            </a:r>
+          </a:p>
+          <a:p>
+            <a:r>
+              <a:rPr dirty="0">
+                <a:highlight>
+                  <a:srgbClr val="000080"/>
+                </a:highlight>
+              </a:rPr>
               <a:t># </a:t>
             </a:r>
             <a:r>
-              <a:rPr dirty="0" err="1"/>
-              <a:t>uvicorn</a:t>
-            </a:r>
-            <a:r>
-              <a:rPr dirty="0"/>
-              <a:t>  -&gt; ASGI web server</a:t>
-            </a:r>
-            <a:br>
-              <a:rPr dirty="0"/>
-            </a:br>
-            <a:r>
-              <a:rPr dirty="0"/>
-              <a:t># main     -&gt; main.py</a:t>
-            </a:r>
-            <a:br>
-              <a:rPr dirty="0"/>
-            </a:br>
-            <a:r>
-              <a:rPr dirty="0"/>
-              <a:t># app      -&gt; </a:t>
-            </a:r>
-            <a:r>
-              <a:rPr dirty="0" err="1"/>
+              <a:rPr dirty="0" err="1">
+                <a:highlight>
+                  <a:srgbClr val="000080"/>
+                </a:highlight>
+              </a:rPr>
+              <a:t>Uvicorn</a:t>
+            </a:r>
+            <a:r>
+              <a:rPr dirty="0">
+                <a:highlight>
+                  <a:srgbClr val="000080"/>
+                </a:highlight>
+              </a:rPr>
+              <a:t> loads this object and exposes it over HTTP.</a:t>
+            </a:r>
+          </a:p>
+          <a:p>
+            <a:r>
+              <a:rPr dirty="0">
+                <a:highlight>
+                  <a:srgbClr val="000080"/>
+                </a:highlight>
+              </a:rPr>
+              <a:t>app = </a:t>
+            </a:r>
+            <a:r>
+              <a:rPr dirty="0" err="1">
+                <a:highlight>
+                  <a:srgbClr val="000080"/>
+                </a:highlight>
+              </a:rPr>
               <a:t>FastAPI</a:t>
             </a:r>
             <a:r>
-              <a:rPr dirty="0"/>
-              <a:t> object named "app"</a:t>
-            </a:r>
-            <a:br>
-              <a:rPr dirty="0"/>
-            </a:br>
-            <a:r>
-              <a:rPr dirty="0"/>
-              <a:t># --reload -&gt; automatically restart after code changes</a:t>
-            </a:r>
-            <a:br>
-              <a:rPr dirty="0"/>
-            </a:br>
-            <a:br>
-              <a:rPr dirty="0"/>
-            </a:br>
-            <a:r>
-              <a:rPr dirty="0"/>
-              <a:t># Expected:</a:t>
-            </a:r>
-            <a:br>
-              <a:rPr dirty="0"/>
-            </a:br>
-            <a:r>
-              <a:rPr dirty="0"/>
-              <a:t># </a:t>
-            </a:r>
-            <a:r>
-              <a:rPr dirty="0" err="1"/>
-              <a:t>Uvicorn</a:t>
-            </a:r>
-            <a:r>
-              <a:rPr dirty="0"/>
-              <a:t> running on http://127.0.0.1:8000</a:t>
-            </a:r>
-          </a:p>
-        </p:txBody>
-      </p:sp>
-      <p:sp>
-        <p:nvSpPr>
-          <p:cNvPr id="6" name="TextBox 5"/>
-          <p:cNvSpPr txBox="1"/>
-          <p:nvPr/>
-        </p:nvSpPr>
-        <p:spPr>
-          <a:xfrm>
-            <a:off x="731520" y="5303520"/>
-            <a:ext cx="10789920" cy="640080"/>
-          </a:xfrm>
-          <a:prstGeom prst="rect">
-            <a:avLst/>
-          </a:prstGeom>
-          <a:noFill/>
-        </p:spPr>
-        <p:txBody>
-          <a:bodyPr wrap="square">
-            <a:spAutoFit/>
-          </a:bodyPr>
-          <a:lstStyle/>
-          <a:p>
-            <a:pPr>
-              <a:spcAft>
-                <a:spcPts val="800"/>
-              </a:spcAft>
-              <a:defRPr sz="1700">
-                <a:solidFill>
-                  <a:srgbClr val="222222"/>
-                </a:solidFill>
-              </a:defRPr>
-            </a:pPr>
-            <a:r>
-              <a:t>Keep this terminal running while testing the API.</a:t>
+              <a:rPr dirty="0">
+                <a:highlight>
+                  <a:srgbClr val="000080"/>
+                </a:highlight>
+              </a:rPr>
+              <a:t>(</a:t>
+            </a:r>
+          </a:p>
+          <a:p>
+            <a:r>
+              <a:rPr dirty="0">
+                <a:highlight>
+                  <a:srgbClr val="000080"/>
+                </a:highlight>
+              </a:rPr>
+              <a:t>    title="Car Rental Platform Health Service",</a:t>
+            </a:r>
+          </a:p>
+          <a:p>
+            <a:r>
+              <a:rPr dirty="0">
+                <a:highlight>
+                  <a:srgbClr val="000080"/>
+                </a:highlight>
+              </a:rPr>
+              <a:t>    description="Project 1 development environment test.",</a:t>
+            </a:r>
+          </a:p>
+          <a:p>
+            <a:r>
+              <a:rPr dirty="0">
+                <a:highlight>
+                  <a:srgbClr val="000080"/>
+                </a:highlight>
+              </a:rPr>
+              <a:t>    version="1.0.0",</a:t>
+            </a:r>
+          </a:p>
+          <a:p>
+            <a:r>
+              <a:rPr dirty="0">
+                <a:highlight>
+                  <a:srgbClr val="000080"/>
+                </a:highlight>
+              </a:rPr>
+              <a:t>)</a:t>
+            </a:r>
+          </a:p>
+          <a:p>
+            <a:endParaRPr dirty="0">
+              <a:highlight>
+                <a:srgbClr val="000080"/>
+              </a:highlight>
+            </a:endParaRPr>
+          </a:p>
+          <a:p>
+            <a:r>
+              <a:rPr dirty="0">
+                <a:highlight>
+                  <a:srgbClr val="000080"/>
+                </a:highlight>
+              </a:rPr>
+              <a:t># GET / proves the API itself is responding.</a:t>
+            </a:r>
+          </a:p>
+          <a:p>
+            <a:r>
+              <a:rPr dirty="0">
+                <a:highlight>
+                  <a:srgbClr val="000080"/>
+                </a:highlight>
+              </a:rPr>
+              <a:t>@app.get("/")</a:t>
+            </a:r>
+          </a:p>
+          <a:p>
+            <a:r>
+              <a:rPr dirty="0">
+                <a:highlight>
+                  <a:srgbClr val="000080"/>
+                </a:highlight>
+              </a:rPr>
+              <a:t>def root():</a:t>
+            </a:r>
+          </a:p>
+          <a:p>
+            <a:r>
+              <a:rPr dirty="0">
+                <a:highlight>
+                  <a:srgbClr val="000080"/>
+                </a:highlight>
+              </a:rPr>
+              <a:t>    return {</a:t>
+            </a:r>
+          </a:p>
+          <a:p>
+            <a:r>
+              <a:rPr dirty="0">
+                <a:highlight>
+                  <a:srgbClr val="000080"/>
+                </a:highlight>
+              </a:rPr>
+              <a:t>        "application": "car-rental-microservices",</a:t>
+            </a:r>
+          </a:p>
+          <a:p>
+            <a:r>
+              <a:rPr dirty="0">
+                <a:highlight>
+                  <a:srgbClr val="000080"/>
+                </a:highlight>
+              </a:rPr>
+              <a:t>        "message": "Car Rental Platform API is running",</a:t>
+            </a:r>
+          </a:p>
+          <a:p>
+            <a:r>
+              <a:rPr dirty="0">
+                <a:highlight>
+                  <a:srgbClr val="000080"/>
+                </a:highlight>
+              </a:rPr>
+              <a:t>    }</a:t>
+            </a:r>
+          </a:p>
+          <a:p>
+            <a:endParaRPr dirty="0">
+              <a:highlight>
+                <a:srgbClr val="000080"/>
+              </a:highlight>
+            </a:endParaRPr>
+          </a:p>
+          <a:p>
+            <a:r>
+              <a:rPr dirty="0">
+                <a:highlight>
+                  <a:srgbClr val="000080"/>
+                </a:highlight>
+              </a:rPr>
+              <a:t># GET /health proves the service is alive and responding.</a:t>
+            </a:r>
+          </a:p>
+          <a:p>
+            <a:r>
+              <a:rPr dirty="0">
+                <a:highlight>
+                  <a:srgbClr val="000080"/>
+                </a:highlight>
+              </a:rPr>
+              <a:t>@app.get("/health")</a:t>
+            </a:r>
+          </a:p>
+          <a:p>
+            <a:r>
+              <a:rPr dirty="0">
+                <a:highlight>
+                  <a:srgbClr val="000080"/>
+                </a:highlight>
+              </a:rPr>
+              <a:t>def </a:t>
+            </a:r>
+            <a:r>
+              <a:rPr dirty="0" err="1">
+                <a:highlight>
+                  <a:srgbClr val="000080"/>
+                </a:highlight>
+              </a:rPr>
+              <a:t>health_check</a:t>
+            </a:r>
+            <a:r>
+              <a:rPr dirty="0">
+                <a:highlight>
+                  <a:srgbClr val="000080"/>
+                </a:highlight>
+              </a:rPr>
+              <a:t>():</a:t>
+            </a:r>
+          </a:p>
+          <a:p>
+            <a:r>
+              <a:rPr dirty="0">
+                <a:highlight>
+                  <a:srgbClr val="000080"/>
+                </a:highlight>
+              </a:rPr>
+              <a:t>    return {</a:t>
+            </a:r>
+          </a:p>
+          <a:p>
+            <a:r>
+              <a:rPr dirty="0">
+                <a:highlight>
+                  <a:srgbClr val="000080"/>
+                </a:highlight>
+              </a:rPr>
+              <a:t>        "status": "healthy",</a:t>
+            </a:r>
+          </a:p>
+          <a:p>
+            <a:r>
+              <a:rPr dirty="0">
+                <a:highlight>
+                  <a:srgbClr val="000080"/>
+                </a:highlight>
+              </a:rPr>
+              <a:t>        "service": "platform-health",</a:t>
+            </a:r>
+          </a:p>
+          <a:p>
+            <a:r>
+              <a:rPr dirty="0">
+                <a:highlight>
+                  <a:srgbClr val="000080"/>
+                </a:highlight>
+              </a:rPr>
+              <a:t>    }</a:t>
             </a:r>
           </a:p>
         </p:txBody>
@@ -5521,7 +5406,7 @@
               </a:defRPr>
             </a:pPr>
             <a:r>
-              <a:t>Steps 17–18 — Test in Browser + Swagger</a:t>
+              <a:t>Step 16 — Start the API</a:t>
             </a:r>
           </a:p>
         </p:txBody>
@@ -5600,21 +5485,168 @@
               </a:defRPr>
             </a:pPr>
             <a:r>
-              <a:t>16</a:t>
-            </a:r>
-          </a:p>
-        </p:txBody>
-      </p:sp>
-      <p:sp>
-        <p:nvSpPr>
-          <p:cNvPr id="5" name="TextBox 4"/>
+              <a:t>15</a:t>
+            </a:r>
+          </a:p>
+        </p:txBody>
+      </p:sp>
+      <p:sp>
+        <p:nvSpPr>
+          <p:cNvPr id="5" name="Rounded Rectangle 4"/>
+          <p:cNvSpPr/>
+          <p:nvPr/>
+        </p:nvSpPr>
+        <p:spPr>
+          <a:xfrm>
+            <a:off x="731520" y="1600200"/>
+            <a:ext cx="10789920" cy="3474720"/>
+          </a:xfrm>
+          <a:prstGeom prst="roundRect">
+            <a:avLst/>
+          </a:prstGeom>
+          <a:solidFill>
+            <a:srgbClr val="1F2430"/>
+          </a:solidFill>
+          <a:ln>
+            <a:solidFill>
+              <a:srgbClr val="1F2430"/>
+            </a:solidFill>
+          </a:ln>
+        </p:spPr>
+        <p:style>
+          <a:lnRef idx="1">
+            <a:schemeClr val="accent1"/>
+          </a:lnRef>
+          <a:fillRef idx="3">
+            <a:schemeClr val="accent1"/>
+          </a:fillRef>
+          <a:effectRef idx="2">
+            <a:schemeClr val="accent1"/>
+          </a:effectRef>
+          <a:fontRef idx="minor">
+            <a:schemeClr val="lt1"/>
+          </a:fontRef>
+        </p:style>
+        <p:txBody>
+          <a:bodyPr wrap="square" rtlCol="0" anchor="ctr"/>
+          <a:lstStyle/>
+          <a:p>
+            <a:pPr algn="ctr">
+              <a:defRPr sz="1700">
+                <a:solidFill>
+                  <a:srgbClr val="FFFFFF"/>
+                </a:solidFill>
+                <a:latin typeface="Consolas"/>
+              </a:defRPr>
+            </a:pPr>
+            <a:r>
+              <a:rPr dirty="0" err="1"/>
+              <a:t>uvicorn</a:t>
+            </a:r>
+            <a:r>
+              <a:rPr dirty="0"/>
+              <a:t> </a:t>
+            </a:r>
+            <a:r>
+              <a:rPr dirty="0" err="1"/>
+              <a:t>main:app</a:t>
+            </a:r>
+            <a:r>
+              <a:rPr dirty="0"/>
+              <a:t> --reload</a:t>
+            </a:r>
+            <a:br>
+              <a:rPr dirty="0"/>
+            </a:br>
+            <a:br>
+              <a:rPr dirty="0"/>
+            </a:br>
+            <a:r>
+              <a:rPr dirty="0"/>
+              <a:t># Meaning:</a:t>
+            </a:r>
+            <a:br>
+              <a:rPr dirty="0"/>
+            </a:br>
+            <a:r>
+              <a:rPr dirty="0"/>
+              <a:t># </a:t>
+            </a:r>
+            <a:r>
+              <a:rPr dirty="0" err="1"/>
+              <a:t>uvicorn</a:t>
+            </a:r>
+            <a:r>
+              <a:rPr dirty="0"/>
+              <a:t>  -&gt; ASGI web server</a:t>
+            </a:r>
+            <a:br>
+              <a:rPr dirty="0"/>
+            </a:br>
+            <a:r>
+              <a:rPr dirty="0"/>
+              <a:t># main     -&gt; main.py</a:t>
+            </a:r>
+            <a:br>
+              <a:rPr dirty="0"/>
+            </a:br>
+            <a:r>
+              <a:rPr dirty="0"/>
+              <a:t># app      -&gt; </a:t>
+            </a:r>
+            <a:r>
+              <a:rPr dirty="0" err="1"/>
+              <a:t>FastAPI</a:t>
+            </a:r>
+            <a:r>
+              <a:rPr dirty="0"/>
+              <a:t> object named "app"</a:t>
+            </a:r>
+            <a:br>
+              <a:rPr dirty="0"/>
+            </a:br>
+            <a:r>
+              <a:rPr dirty="0"/>
+              <a:t># --reload -&gt; automatically restart after code changes</a:t>
+            </a:r>
+            <a:br>
+              <a:rPr dirty="0"/>
+            </a:br>
+            <a:br>
+              <a:rPr dirty="0"/>
+            </a:br>
+            <a:r>
+              <a:rPr dirty="0"/>
+              <a:t># Expected:</a:t>
+            </a:r>
+            <a:br>
+              <a:rPr dirty="0"/>
+            </a:br>
+            <a:r>
+              <a:rPr dirty="0"/>
+              <a:t># </a:t>
+            </a:r>
+            <a:r>
+              <a:rPr dirty="0" err="1"/>
+              <a:t>Uvicorn</a:t>
+            </a:r>
+            <a:r>
+              <a:rPr dirty="0"/>
+              <a:t> running on http://127.0.0.1:8000</a:t>
+            </a:r>
+          </a:p>
+        </p:txBody>
+      </p:sp>
+      <p:sp>
+        <p:nvSpPr>
+          <p:cNvPr id="6" name="TextBox 5"/>
           <p:cNvSpPr txBox="1"/>
           <p:nvPr/>
         </p:nvSpPr>
         <p:spPr>
           <a:xfrm>
-            <a:off x="731520" y="1417320"/>
-            <a:ext cx="10789920" cy="4800600"/>
+            <a:off x="731520" y="5303520"/>
+            <a:ext cx="10789920" cy="640080"/>
           </a:xfrm>
           <a:prstGeom prst="rect">
             <a:avLst/>
@@ -5631,95 +5663,14 @@
               <a:spcAft>
                 <a:spcPts val="800"/>
               </a:spcAft>
-              <a:defRPr sz="1900">
+              <a:defRPr sz="1700">
                 <a:solidFill>
                   <a:srgbClr val="222222"/>
                 </a:solidFill>
               </a:defRPr>
             </a:pPr>
             <a:r>
-              <a:rPr dirty="0"/>
-              <a:t>Open http://127.0.0.1:8000 — verify the root JSON response.</a:t>
-            </a:r>
-          </a:p>
-          <a:p>
-            <a:pPr>
-              <a:spcAft>
-                <a:spcPts val="800"/>
-              </a:spcAft>
-              <a:defRPr sz="1900">
-                <a:solidFill>
-                  <a:srgbClr val="222222"/>
-                </a:solidFill>
-              </a:defRPr>
-            </a:pPr>
-            <a:r>
-              <a:rPr dirty="0"/>
-              <a:t>Open http://127.0.0.1:8000/health — verify status = healthy.</a:t>
-            </a:r>
-          </a:p>
-          <a:p>
-            <a:pPr>
-              <a:spcAft>
-                <a:spcPts val="800"/>
-              </a:spcAft>
-              <a:defRPr sz="1900">
-                <a:solidFill>
-                  <a:srgbClr val="222222"/>
-                </a:solidFill>
-              </a:defRPr>
-            </a:pPr>
-            <a:r>
-              <a:rPr dirty="0"/>
-              <a:t>Open http://127.0.0.1:8000/docs — </a:t>
-            </a:r>
-            <a:r>
-              <a:rPr dirty="0" err="1"/>
-              <a:t>FastAPI</a:t>
-            </a:r>
-            <a:r>
-              <a:rPr dirty="0"/>
-              <a:t> automatically generates Swagger/</a:t>
-            </a:r>
-            <a:r>
-              <a:rPr dirty="0" err="1"/>
-              <a:t>OpenAPI</a:t>
-            </a:r>
-            <a:r>
-              <a:rPr dirty="0"/>
-              <a:t> documentation.</a:t>
-            </a:r>
-          </a:p>
-          <a:p>
-            <a:pPr>
-              <a:spcAft>
-                <a:spcPts val="800"/>
-              </a:spcAft>
-              <a:defRPr sz="1900">
-                <a:solidFill>
-                  <a:srgbClr val="222222"/>
-                </a:solidFill>
-              </a:defRPr>
-            </a:pPr>
-            <a:r>
-              <a:rPr dirty="0"/>
-              <a:t>Select GET /health → Try it out → Execute.</a:t>
-            </a:r>
-          </a:p>
-          <a:p>
-            <a:pPr>
-              <a:spcAft>
-                <a:spcPts val="800"/>
-              </a:spcAft>
-              <a:defRPr sz="1900">
-                <a:solidFill>
-                  <a:srgbClr val="222222"/>
-                </a:solidFill>
-              </a:defRPr>
-            </a:pPr>
-            <a:r>
-              <a:rPr dirty="0"/>
-              <a:t>Expected HTTP status: 200 OK.</a:t>
+              <a:t>Keep this terminal running while testing the API.</a:t>
             </a:r>
           </a:p>
         </p:txBody>
@@ -5787,7 +5738,7 @@
               </a:defRPr>
             </a:pPr>
             <a:r>
-              <a:t>Steps 19–21 — CLI Test + Dependencies</a:t>
+              <a:t>Steps 17–18 — Test in Browser + Swagger</a:t>
             </a:r>
           </a:p>
         </p:txBody>
@@ -5866,143 +5817,21 @@
               </a:defRPr>
             </a:pPr>
             <a:r>
-              <a:t>17</a:t>
-            </a:r>
-          </a:p>
-        </p:txBody>
-      </p:sp>
-      <p:sp>
-        <p:nvSpPr>
-          <p:cNvPr id="5" name="Rounded Rectangle 4"/>
-          <p:cNvSpPr/>
-          <p:nvPr/>
-        </p:nvSpPr>
-        <p:spPr>
-          <a:xfrm>
-            <a:off x="731520" y="1554480"/>
-            <a:ext cx="10789920" cy="3657600"/>
-          </a:xfrm>
-          <a:prstGeom prst="roundRect">
-            <a:avLst/>
-          </a:prstGeom>
-          <a:solidFill>
-            <a:srgbClr val="1F2430"/>
-          </a:solidFill>
-          <a:ln>
-            <a:solidFill>
-              <a:srgbClr val="1F2430"/>
-            </a:solidFill>
-          </a:ln>
-        </p:spPr>
-        <p:style>
-          <a:lnRef idx="1">
-            <a:schemeClr val="accent1"/>
-          </a:lnRef>
-          <a:fillRef idx="3">
-            <a:schemeClr val="accent1"/>
-          </a:fillRef>
-          <a:effectRef idx="2">
-            <a:schemeClr val="accent1"/>
-          </a:effectRef>
-          <a:fontRef idx="minor">
-            <a:schemeClr val="lt1"/>
-          </a:fontRef>
-        </p:style>
-        <p:txBody>
-          <a:bodyPr wrap="square" rtlCol="0" anchor="ctr"/>
-          <a:lstStyle/>
-          <a:p>
-            <a:pPr algn="ctr">
-              <a:defRPr sz="1800">
-                <a:solidFill>
-                  <a:srgbClr val="FFFFFF"/>
-                </a:solidFill>
-                <a:latin typeface="Consolas"/>
-              </a:defRPr>
-            </a:pPr>
-            <a:r>
-              <a:rPr dirty="0"/>
-              <a:t># Test the endpoint without a browser.</a:t>
-            </a:r>
-            <a:br>
-              <a:rPr dirty="0"/>
-            </a:br>
-            <a:r>
-              <a:rPr dirty="0"/>
-              <a:t>curl.exe http://127.0.0.1:8000/health</a:t>
-            </a:r>
-            <a:br>
-              <a:rPr dirty="0"/>
-            </a:br>
-            <a:br>
-              <a:rPr dirty="0"/>
-            </a:br>
-            <a:r>
-              <a:rPr dirty="0"/>
-              <a:t># Capture exact Python dependencies.</a:t>
-            </a:r>
-            <a:br>
-              <a:rPr dirty="0"/>
-            </a:br>
-            <a:r>
-              <a:rPr dirty="0"/>
-              <a:t>pip freeze &gt; requirements.txt</a:t>
-            </a:r>
-            <a:br>
-              <a:rPr dirty="0"/>
-            </a:br>
-            <a:br>
-              <a:rPr dirty="0"/>
-            </a:br>
-            <a:r>
-              <a:rPr dirty="0"/>
-              <a:t># Stop </a:t>
-            </a:r>
-            <a:r>
-              <a:rPr dirty="0" err="1"/>
-              <a:t>Uvicorn</a:t>
-            </a:r>
-            <a:r>
-              <a:rPr dirty="0"/>
-              <a:t>.</a:t>
-            </a:r>
-            <a:br>
-              <a:rPr dirty="0"/>
-            </a:br>
-            <a:r>
-              <a:rPr dirty="0"/>
-              <a:t>CTRL + C</a:t>
-            </a:r>
-            <a:br>
-              <a:rPr dirty="0"/>
-            </a:br>
-            <a:br>
-              <a:rPr dirty="0"/>
-            </a:br>
-            <a:r>
-              <a:rPr dirty="0"/>
-              <a:t># Leave the virtual environment.</a:t>
-            </a:r>
-            <a:br>
-              <a:rPr dirty="0"/>
-            </a:br>
-            <a:r>
-              <a:rPr dirty="0"/>
-              <a:t>deactivate</a:t>
-            </a:r>
-          </a:p>
-        </p:txBody>
-      </p:sp>
-      <p:sp>
-        <p:nvSpPr>
-          <p:cNvPr id="6" name="TextBox 5"/>
+              <a:t>16</a:t>
+            </a:r>
+          </a:p>
+        </p:txBody>
+      </p:sp>
+      <p:sp>
+        <p:nvSpPr>
+          <p:cNvPr id="5" name="TextBox 4"/>
           <p:cNvSpPr txBox="1"/>
           <p:nvPr/>
         </p:nvSpPr>
         <p:spPr>
           <a:xfrm>
-            <a:off x="731520" y="5349240"/>
-            <a:ext cx="10789920" cy="640080"/>
+            <a:off x="731520" y="1417320"/>
+            <a:ext cx="10789920" cy="4800600"/>
           </a:xfrm>
           <a:prstGeom prst="rect">
             <a:avLst/>
@@ -6019,14 +5848,95 @@
               <a:spcAft>
                 <a:spcPts val="800"/>
               </a:spcAft>
-              <a:defRPr sz="1600">
+              <a:defRPr sz="1900">
                 <a:solidFill>
                   <a:srgbClr val="222222"/>
                 </a:solidFill>
               </a:defRPr>
             </a:pPr>
             <a:r>
-              <a:t>requirements.txt allows another developer or build system to recreate the Python environment.</a:t>
+              <a:rPr dirty="0"/>
+              <a:t>Open http://127.0.0.1:8000 — verify the root JSON response.</a:t>
+            </a:r>
+          </a:p>
+          <a:p>
+            <a:pPr>
+              <a:spcAft>
+                <a:spcPts val="800"/>
+              </a:spcAft>
+              <a:defRPr sz="1900">
+                <a:solidFill>
+                  <a:srgbClr val="222222"/>
+                </a:solidFill>
+              </a:defRPr>
+            </a:pPr>
+            <a:r>
+              <a:rPr dirty="0"/>
+              <a:t>Open http://127.0.0.1:8000/health — verify status = healthy.</a:t>
+            </a:r>
+          </a:p>
+          <a:p>
+            <a:pPr>
+              <a:spcAft>
+                <a:spcPts val="800"/>
+              </a:spcAft>
+              <a:defRPr sz="1900">
+                <a:solidFill>
+                  <a:srgbClr val="222222"/>
+                </a:solidFill>
+              </a:defRPr>
+            </a:pPr>
+            <a:r>
+              <a:rPr dirty="0"/>
+              <a:t>Open http://127.0.0.1:8000/docs — </a:t>
+            </a:r>
+            <a:r>
+              <a:rPr dirty="0" err="1"/>
+              <a:t>FastAPI</a:t>
+            </a:r>
+            <a:r>
+              <a:rPr dirty="0"/>
+              <a:t> automatically generates Swagger/</a:t>
+            </a:r>
+            <a:r>
+              <a:rPr dirty="0" err="1"/>
+              <a:t>OpenAPI</a:t>
+            </a:r>
+            <a:r>
+              <a:rPr dirty="0"/>
+              <a:t> documentation.</a:t>
+            </a:r>
+          </a:p>
+          <a:p>
+            <a:pPr>
+              <a:spcAft>
+                <a:spcPts val="800"/>
+              </a:spcAft>
+              <a:defRPr sz="1900">
+                <a:solidFill>
+                  <a:srgbClr val="222222"/>
+                </a:solidFill>
+              </a:defRPr>
+            </a:pPr>
+            <a:r>
+              <a:rPr dirty="0"/>
+              <a:t>Select GET /health → Try it out → Execute.</a:t>
+            </a:r>
+          </a:p>
+          <a:p>
+            <a:pPr>
+              <a:spcAft>
+                <a:spcPts val="800"/>
+              </a:spcAft>
+              <a:defRPr sz="1900">
+                <a:solidFill>
+                  <a:srgbClr val="222222"/>
+                </a:solidFill>
+              </a:defRPr>
+            </a:pPr>
+            <a:r>
+              <a:rPr dirty="0"/>
+              <a:t>Expected HTTP status: 200 OK.</a:t>
             </a:r>
           </a:p>
         </p:txBody>
@@ -6094,7 +6004,7 @@
               </a:defRPr>
             </a:pPr>
             <a:r>
-              <a:t>Steps 22–23 — First Git Checkpoint</a:t>
+              <a:t>Steps 19–21 — CLI Test + Dependencies</a:t>
             </a:r>
           </a:p>
         </p:txBody>
@@ -6173,7 +6083,7 @@
               </a:defRPr>
             </a:pPr>
             <a:r>
-              <a:t>18</a:t>
+              <a:t>17</a:t>
             </a:r>
           </a:p>
         </p:txBody>
@@ -6186,8 +6096,8 @@
         </p:nvSpPr>
         <p:spPr>
           <a:xfrm>
-            <a:off x="731520" y="1417320"/>
-            <a:ext cx="10789920" cy="4389120"/>
+            <a:off x="731520" y="1554480"/>
+            <a:ext cx="10789920" cy="3657600"/>
           </a:xfrm>
           <a:prstGeom prst="roundRect">
             <a:avLst/>
@@ -6219,266 +6129,121 @@
           <a:bodyPr wrap="square" rtlCol="0" anchor="ctr"/>
           <a:lstStyle/>
           <a:p>
-            <a:r>
-              <a:rPr dirty="0">
-                <a:highlight>
-                  <a:srgbClr val="000080"/>
-                </a:highlight>
-              </a:rPr>
-              <a:t># Return to repository root from Webapp\services\platform-health</a:t>
-            </a:r>
-          </a:p>
-          <a:p>
-            <a:r>
-              <a:rPr dirty="0">
-                <a:highlight>
-                  <a:srgbClr val="000080"/>
-                </a:highlight>
-              </a:rPr>
-              <a:t>cd ..\..\..</a:t>
-            </a:r>
-          </a:p>
-          <a:p>
-            <a:endParaRPr dirty="0">
-              <a:highlight>
-                <a:srgbClr val="000080"/>
-              </a:highlight>
-            </a:endParaRPr>
-          </a:p>
-          <a:p>
-            <a:r>
-              <a:rPr dirty="0">
-                <a:highlight>
-                  <a:srgbClr val="000080"/>
-                </a:highlight>
-              </a:rPr>
-              <a:t># Confirm repository root</a:t>
-            </a:r>
-          </a:p>
-          <a:p>
-            <a:r>
-              <a:rPr dirty="0">
-                <a:highlight>
-                  <a:srgbClr val="000080"/>
-                </a:highlight>
-              </a:rPr>
-              <a:t>git rev-parse --show-</a:t>
-            </a:r>
-            <a:r>
-              <a:rPr dirty="0" err="1">
-                <a:highlight>
-                  <a:srgbClr val="000080"/>
-                </a:highlight>
-              </a:rPr>
-              <a:t>toplevel</a:t>
-            </a:r>
-            <a:endParaRPr dirty="0">
-              <a:highlight>
-                <a:srgbClr val="000080"/>
-              </a:highlight>
-            </a:endParaRPr>
-          </a:p>
-          <a:p>
-            <a:endParaRPr dirty="0">
-              <a:highlight>
-                <a:srgbClr val="000080"/>
-              </a:highlight>
-            </a:endParaRPr>
-          </a:p>
-          <a:p>
-            <a:r>
-              <a:rPr dirty="0">
-                <a:highlight>
-                  <a:srgbClr val="000080"/>
-                </a:highlight>
-              </a:rPr>
-              <a:t># Verify .</a:t>
-            </a:r>
-            <a:r>
-              <a:rPr dirty="0" err="1">
-                <a:highlight>
-                  <a:srgbClr val="000080"/>
-                </a:highlight>
-              </a:rPr>
-              <a:t>venv</a:t>
-            </a:r>
-            <a:r>
-              <a:rPr dirty="0">
-                <a:highlight>
-                  <a:srgbClr val="000080"/>
-                </a:highlight>
-              </a:rPr>
-              <a:t> and Office temp files are NOT being tracked.</a:t>
-            </a:r>
-          </a:p>
-          <a:p>
-            <a:r>
-              <a:rPr dirty="0">
-                <a:highlight>
-                  <a:srgbClr val="000080"/>
-                </a:highlight>
-              </a:rPr>
-              <a:t>git status</a:t>
-            </a:r>
-          </a:p>
-          <a:p>
-            <a:endParaRPr dirty="0">
-              <a:highlight>
-                <a:srgbClr val="000080"/>
-              </a:highlight>
-            </a:endParaRPr>
-          </a:p>
-          <a:p>
-            <a:r>
-              <a:rPr dirty="0">
-                <a:highlight>
-                  <a:srgbClr val="000080"/>
-                </a:highlight>
-              </a:rPr>
-              <a:t># Stage Project 1 learning material and the Webapp foundation intentionally.</a:t>
-            </a:r>
-          </a:p>
-          <a:p>
-            <a:r>
-              <a:rPr dirty="0">
-                <a:highlight>
-                  <a:srgbClr val="000080"/>
-                </a:highlight>
-              </a:rPr>
-              <a:t>git add </a:t>
-            </a:r>
-            <a:r>
-              <a:rPr dirty="0" err="1">
-                <a:highlight>
-                  <a:srgbClr val="000080"/>
-                </a:highlight>
-              </a:rPr>
-              <a:t>LearningPath</a:t>
-            </a:r>
-            <a:r>
-              <a:rPr dirty="0">
-                <a:highlight>
-                  <a:srgbClr val="000080"/>
-                </a:highlight>
-              </a:rPr>
-              <a:t>\Project-01-Foundation</a:t>
-            </a:r>
-          </a:p>
-          <a:p>
-            <a:r>
-              <a:rPr dirty="0">
-                <a:highlight>
-                  <a:srgbClr val="000080"/>
-                </a:highlight>
-              </a:rPr>
-              <a:t>git add Webapp</a:t>
-            </a:r>
-          </a:p>
-          <a:p>
-            <a:r>
-              <a:rPr dirty="0">
-                <a:highlight>
-                  <a:srgbClr val="000080"/>
-                </a:highlight>
-              </a:rPr>
-              <a:t>git add .</a:t>
-            </a:r>
-            <a:r>
-              <a:rPr dirty="0" err="1">
-                <a:highlight>
-                  <a:srgbClr val="000080"/>
-                </a:highlight>
-              </a:rPr>
-              <a:t>gitignore</a:t>
-            </a:r>
-            <a:r>
-              <a:rPr dirty="0">
-                <a:highlight>
-                  <a:srgbClr val="000080"/>
-                </a:highlight>
-              </a:rPr>
-              <a:t> README.md</a:t>
-            </a:r>
-          </a:p>
-          <a:p>
-            <a:endParaRPr dirty="0">
-              <a:highlight>
-                <a:srgbClr val="000080"/>
-              </a:highlight>
-            </a:endParaRPr>
-          </a:p>
-          <a:p>
-            <a:r>
-              <a:rPr dirty="0">
-                <a:highlight>
-                  <a:srgbClr val="000080"/>
-                </a:highlight>
-              </a:rPr>
-              <a:t># Review exactly what will be committed.</a:t>
-            </a:r>
-          </a:p>
-          <a:p>
-            <a:r>
-              <a:rPr dirty="0">
-                <a:highlight>
-                  <a:srgbClr val="000080"/>
-                </a:highlight>
-              </a:rPr>
-              <a:t>git status</a:t>
-            </a:r>
-          </a:p>
-          <a:p>
-            <a:endParaRPr dirty="0">
-              <a:highlight>
-                <a:srgbClr val="000080"/>
-              </a:highlight>
-            </a:endParaRPr>
-          </a:p>
-          <a:p>
-            <a:r>
-              <a:rPr dirty="0">
-                <a:highlight>
-                  <a:srgbClr val="000080"/>
-                </a:highlight>
-              </a:rPr>
-              <a:t># Create the Project 1 checkpoint.</a:t>
-            </a:r>
-          </a:p>
-          <a:p>
-            <a:r>
-              <a:rPr dirty="0">
-                <a:highlight>
-                  <a:srgbClr val="000080"/>
-                </a:highlight>
-              </a:rPr>
-              <a:t>git commit -m "Complete Project 01 - microservices foundation"</a:t>
-            </a:r>
-          </a:p>
-          <a:p>
-            <a:endParaRPr dirty="0">
-              <a:highlight>
-                <a:srgbClr val="000080"/>
-              </a:highlight>
-            </a:endParaRPr>
-          </a:p>
-          <a:p>
-            <a:r>
-              <a:rPr dirty="0">
-                <a:highlight>
-                  <a:srgbClr val="000080"/>
-                </a:highlight>
-              </a:rPr>
-              <a:t># Standardize the primary branch name.</a:t>
-            </a:r>
-          </a:p>
-          <a:p>
-            <a:r>
-              <a:rPr dirty="0">
-                <a:highlight>
-                  <a:srgbClr val="000080"/>
-                </a:highlight>
-              </a:rPr>
-              <a:t>git branch -M main</a:t>
+            <a:pPr algn="ctr">
+              <a:defRPr sz="1800">
+                <a:solidFill>
+                  <a:srgbClr val="FFFFFF"/>
+                </a:solidFill>
+                <a:latin typeface="Consolas"/>
+              </a:defRPr>
+            </a:pPr>
+            <a:r>
+              <a:rPr dirty="0"/>
+              <a:t># Test the endpoint without a browser.</a:t>
+            </a:r>
+            <a:br>
+              <a:rPr dirty="0"/>
+            </a:br>
+            <a:r>
+              <a:rPr dirty="0"/>
+              <a:t>curl.exe http://127.0.0.1:8000/health</a:t>
+            </a:r>
+            <a:br>
+              <a:rPr dirty="0"/>
+            </a:br>
+            <a:br>
+              <a:rPr dirty="0"/>
+            </a:br>
+            <a:r>
+              <a:rPr dirty="0"/>
+              <a:t># Capture exact Python dependencies.</a:t>
+            </a:r>
+            <a:br>
+              <a:rPr dirty="0"/>
+            </a:br>
+            <a:r>
+              <a:rPr dirty="0"/>
+              <a:t>pip freeze &gt; requirements.txt</a:t>
+            </a:r>
+            <a:br>
+              <a:rPr dirty="0"/>
+            </a:br>
+            <a:br>
+              <a:rPr dirty="0"/>
+            </a:br>
+            <a:r>
+              <a:rPr dirty="0"/>
+              <a:t># Stop </a:t>
+            </a:r>
+            <a:r>
+              <a:rPr dirty="0" err="1"/>
+              <a:t>Uvicorn</a:t>
+            </a:r>
+            <a:r>
+              <a:rPr dirty="0"/>
+              <a:t>.</a:t>
+            </a:r>
+            <a:br>
+              <a:rPr dirty="0"/>
+            </a:br>
+            <a:r>
+              <a:rPr dirty="0"/>
+              <a:t>CTRL + C</a:t>
+            </a:r>
+            <a:br>
+              <a:rPr dirty="0"/>
+            </a:br>
+            <a:br>
+              <a:rPr dirty="0"/>
+            </a:br>
+            <a:r>
+              <a:rPr dirty="0"/>
+              <a:t># Leave the virtual environment.</a:t>
+            </a:r>
+            <a:br>
+              <a:rPr dirty="0"/>
+            </a:br>
+            <a:r>
+              <a:rPr dirty="0"/>
+              <a:t>deactivate</a:t>
+            </a:r>
+          </a:p>
+        </p:txBody>
+      </p:sp>
+      <p:sp>
+        <p:nvSpPr>
+          <p:cNvPr id="6" name="TextBox 5"/>
+          <p:cNvSpPr txBox="1"/>
+          <p:nvPr/>
+        </p:nvSpPr>
+        <p:spPr>
+          <a:xfrm>
+            <a:off x="731520" y="5349240"/>
+            <a:ext cx="10789920" cy="640080"/>
+          </a:xfrm>
+          <a:prstGeom prst="rect">
+            <a:avLst/>
+          </a:prstGeom>
+          <a:noFill/>
+        </p:spPr>
+        <p:txBody>
+          <a:bodyPr wrap="square">
+            <a:spAutoFit/>
+          </a:bodyPr>
+          <a:lstStyle/>
+          <a:p>
+            <a:pPr>
+              <a:spcAft>
+                <a:spcPts val="800"/>
+              </a:spcAft>
+              <a:defRPr sz="1600">
+                <a:solidFill>
+                  <a:srgbClr val="222222"/>
+                </a:solidFill>
+              </a:defRPr>
+            </a:pPr>
+            <a:r>
+              <a:t>requirements.txt allows another developer or build system to recreate the Python environment.</a:t>
             </a:r>
           </a:p>
         </p:txBody>
@@ -6546,7 +6311,7 @@
               </a:defRPr>
             </a:pPr>
             <a:r>
-              <a:t>Break/Fix Exercises</a:t>
+              <a:t>Steps 22–23 — First Git Checkpoint</a:t>
             </a:r>
           </a:p>
         </p:txBody>
@@ -6625,135 +6390,312 @@
               </a:defRPr>
             </a:pPr>
             <a:r>
-              <a:t>19</a:t>
-            </a:r>
-          </a:p>
-        </p:txBody>
-      </p:sp>
-      <p:sp>
-        <p:nvSpPr>
-          <p:cNvPr id="5" name="TextBox 4"/>
-          <p:cNvSpPr txBox="1"/>
+              <a:t>18</a:t>
+            </a:r>
+          </a:p>
+        </p:txBody>
+      </p:sp>
+      <p:sp>
+        <p:nvSpPr>
+          <p:cNvPr id="5" name="Rounded Rectangle 4"/>
+          <p:cNvSpPr/>
           <p:nvPr/>
         </p:nvSpPr>
         <p:spPr>
           <a:xfrm>
             <a:off x="731520" y="1417320"/>
-            <a:ext cx="10789920" cy="4800600"/>
-          </a:xfrm>
-          <a:prstGeom prst="rect">
-            <a:avLst/>
-          </a:prstGeom>
-          <a:noFill/>
-        </p:spPr>
-        <p:txBody>
-          <a:bodyPr wrap="square">
-            <a:spAutoFit/>
-          </a:bodyPr>
-          <a:lstStyle/>
-          <a:p>
-            <a:pPr>
-              <a:spcAft>
-                <a:spcPts val="800"/>
-              </a:spcAft>
-              <a:defRPr sz="1800">
-                <a:solidFill>
-                  <a:srgbClr val="222222"/>
-                </a:solidFill>
-              </a:defRPr>
-            </a:pPr>
-            <a:r>
-              <a:t>Visit /wrong-url → expect HTTP 404.</a:t>
-            </a:r>
-          </a:p>
-          <a:p>
-            <a:pPr>
-              <a:spcAft>
-                <a:spcPts val="800"/>
-              </a:spcAft>
-              <a:defRPr sz="1800">
-                <a:solidFill>
-                  <a:srgbClr val="222222"/>
-                </a:solidFill>
-              </a:defRPr>
-            </a:pPr>
-            <a:r>
-              <a:t>Stop Uvicorn and visit /health → expect a connection failure.</a:t>
-            </a:r>
-          </a:p>
-          <a:p>
-            <a:pPr>
-              <a:spcAft>
-                <a:spcPts val="800"/>
-              </a:spcAft>
-              <a:defRPr sz="1800">
-                <a:solidFill>
-                  <a:srgbClr val="222222"/>
-                </a:solidFill>
-              </a:defRPr>
-            </a:pPr>
-            <a:r>
-              <a:t>Restart Uvicorn → API should become available again.</a:t>
-            </a:r>
-          </a:p>
-          <a:p>
-            <a:pPr>
-              <a:spcAft>
-                <a:spcPts val="800"/>
-              </a:spcAft>
-              <a:defRPr sz="1800">
-                <a:solidFill>
-                  <a:srgbClr val="222222"/>
-                </a:solidFill>
-              </a:defRPr>
-            </a:pPr>
-            <a:r>
-              <a:t>Change health status from healthy to testing and save → --reload should restart the service automatically.</a:t>
-            </a:r>
-          </a:p>
-          <a:p>
-            <a:pPr>
-              <a:spcAft>
-                <a:spcPts val="800"/>
-              </a:spcAft>
-              <a:defRPr sz="1800">
-                <a:solidFill>
-                  <a:srgbClr val="222222"/>
-                </a:solidFill>
-              </a:defRPr>
-            </a:pPr>
-            <a:r>
-              <a:t>Run the request again from /docs.</a:t>
-            </a:r>
-          </a:p>
-          <a:p>
-            <a:pPr>
-              <a:spcAft>
-                <a:spcPts val="800"/>
-              </a:spcAft>
-              <a:defRPr sz="1800">
-                <a:solidFill>
-                  <a:srgbClr val="222222"/>
-                </a:solidFill>
-              </a:defRPr>
-            </a:pPr>
-            <a:r>
-              <a:t>Run curl.exe against /health.</a:t>
-            </a:r>
-          </a:p>
-          <a:p>
-            <a:pPr>
-              <a:spcAft>
-                <a:spcPts val="800"/>
-              </a:spcAft>
-              <a:defRPr sz="1800">
-                <a:solidFill>
-                  <a:srgbClr val="222222"/>
-                </a:solidFill>
-              </a:defRPr>
-            </a:pPr>
-            <a:r>
-              <a:t>Run git status and explain every changed/untracked file you see.</a:t>
+            <a:ext cx="10789920" cy="4389120"/>
+          </a:xfrm>
+          <a:prstGeom prst="roundRect">
+            <a:avLst/>
+          </a:prstGeom>
+          <a:solidFill>
+            <a:srgbClr val="1F2430"/>
+          </a:solidFill>
+          <a:ln>
+            <a:solidFill>
+              <a:srgbClr val="1F2430"/>
+            </a:solidFill>
+          </a:ln>
+        </p:spPr>
+        <p:style>
+          <a:lnRef idx="1">
+            <a:schemeClr val="accent1"/>
+          </a:lnRef>
+          <a:fillRef idx="3">
+            <a:schemeClr val="accent1"/>
+          </a:fillRef>
+          <a:effectRef idx="2">
+            <a:schemeClr val="accent1"/>
+          </a:effectRef>
+          <a:fontRef idx="minor">
+            <a:schemeClr val="lt1"/>
+          </a:fontRef>
+        </p:style>
+        <p:txBody>
+          <a:bodyPr wrap="square" rtlCol="0" anchor="ctr"/>
+          <a:lstStyle/>
+          <a:p>
+            <a:r>
+              <a:rPr dirty="0">
+                <a:highlight>
+                  <a:srgbClr val="000080"/>
+                </a:highlight>
+              </a:rPr>
+              <a:t># Return to repository root from Webapp\services\platform-health</a:t>
+            </a:r>
+          </a:p>
+          <a:p>
+            <a:r>
+              <a:rPr dirty="0">
+                <a:highlight>
+                  <a:srgbClr val="000080"/>
+                </a:highlight>
+              </a:rPr>
+              <a:t>cd ..\..\..</a:t>
+            </a:r>
+          </a:p>
+          <a:p>
+            <a:endParaRPr dirty="0">
+              <a:highlight>
+                <a:srgbClr val="000080"/>
+              </a:highlight>
+            </a:endParaRPr>
+          </a:p>
+          <a:p>
+            <a:r>
+              <a:rPr dirty="0">
+                <a:highlight>
+                  <a:srgbClr val="000080"/>
+                </a:highlight>
+              </a:rPr>
+              <a:t># Confirm repository root</a:t>
+            </a:r>
+          </a:p>
+          <a:p>
+            <a:r>
+              <a:rPr dirty="0">
+                <a:highlight>
+                  <a:srgbClr val="000080"/>
+                </a:highlight>
+              </a:rPr>
+              <a:t>git rev-parse --show-</a:t>
+            </a:r>
+            <a:r>
+              <a:rPr dirty="0" err="1">
+                <a:highlight>
+                  <a:srgbClr val="000080"/>
+                </a:highlight>
+              </a:rPr>
+              <a:t>toplevel</a:t>
+            </a:r>
+            <a:endParaRPr dirty="0">
+              <a:highlight>
+                <a:srgbClr val="000080"/>
+              </a:highlight>
+            </a:endParaRPr>
+          </a:p>
+          <a:p>
+            <a:endParaRPr dirty="0">
+              <a:highlight>
+                <a:srgbClr val="000080"/>
+              </a:highlight>
+            </a:endParaRPr>
+          </a:p>
+          <a:p>
+            <a:r>
+              <a:rPr dirty="0">
+                <a:highlight>
+                  <a:srgbClr val="000080"/>
+                </a:highlight>
+              </a:rPr>
+              <a:t># Verify .</a:t>
+            </a:r>
+            <a:r>
+              <a:rPr dirty="0" err="1">
+                <a:highlight>
+                  <a:srgbClr val="000080"/>
+                </a:highlight>
+              </a:rPr>
+              <a:t>venv</a:t>
+            </a:r>
+            <a:r>
+              <a:rPr dirty="0">
+                <a:highlight>
+                  <a:srgbClr val="000080"/>
+                </a:highlight>
+              </a:rPr>
+              <a:t> and Office temp files are NOT being tracked.</a:t>
+            </a:r>
+          </a:p>
+          <a:p>
+            <a:r>
+              <a:rPr dirty="0">
+                <a:highlight>
+                  <a:srgbClr val="000080"/>
+                </a:highlight>
+              </a:rPr>
+              <a:t>git status</a:t>
+            </a:r>
+          </a:p>
+          <a:p>
+            <a:endParaRPr dirty="0">
+              <a:highlight>
+                <a:srgbClr val="000080"/>
+              </a:highlight>
+            </a:endParaRPr>
+          </a:p>
+          <a:p>
+            <a:r>
+              <a:rPr dirty="0">
+                <a:highlight>
+                  <a:srgbClr val="000080"/>
+                </a:highlight>
+              </a:rPr>
+              <a:t># Stage Project 1 learning material and the Webapp foundation intentionally.</a:t>
+            </a:r>
+          </a:p>
+          <a:p>
+            <a:r>
+              <a:rPr dirty="0">
+                <a:highlight>
+                  <a:srgbClr val="000080"/>
+                </a:highlight>
+              </a:rPr>
+              <a:t>git add </a:t>
+            </a:r>
+            <a:r>
+              <a:rPr dirty="0" err="1">
+                <a:highlight>
+                  <a:srgbClr val="000080"/>
+                </a:highlight>
+              </a:rPr>
+              <a:t>LearningPath</a:t>
+            </a:r>
+            <a:r>
+              <a:rPr dirty="0">
+                <a:highlight>
+                  <a:srgbClr val="000080"/>
+                </a:highlight>
+              </a:rPr>
+              <a:t>\Project-01-Foundation</a:t>
+            </a:r>
+          </a:p>
+          <a:p>
+            <a:r>
+              <a:rPr dirty="0">
+                <a:highlight>
+                  <a:srgbClr val="000080"/>
+                </a:highlight>
+              </a:rPr>
+              <a:t>git add Webapp</a:t>
+            </a:r>
+          </a:p>
+          <a:p>
+            <a:r>
+              <a:rPr dirty="0">
+                <a:highlight>
+                  <a:srgbClr val="000080"/>
+                </a:highlight>
+              </a:rPr>
+              <a:t>git add .</a:t>
+            </a:r>
+            <a:r>
+              <a:rPr dirty="0" err="1">
+                <a:highlight>
+                  <a:srgbClr val="000080"/>
+                </a:highlight>
+              </a:rPr>
+              <a:t>gitignore</a:t>
+            </a:r>
+            <a:r>
+              <a:rPr dirty="0">
+                <a:highlight>
+                  <a:srgbClr val="000080"/>
+                </a:highlight>
+              </a:rPr>
+              <a:t> README.md</a:t>
+            </a:r>
+          </a:p>
+          <a:p>
+            <a:endParaRPr dirty="0">
+              <a:highlight>
+                <a:srgbClr val="000080"/>
+              </a:highlight>
+            </a:endParaRPr>
+          </a:p>
+          <a:p>
+            <a:r>
+              <a:rPr dirty="0">
+                <a:highlight>
+                  <a:srgbClr val="000080"/>
+                </a:highlight>
+              </a:rPr>
+              <a:t># Review exactly what will be committed.</a:t>
+            </a:r>
+          </a:p>
+          <a:p>
+            <a:r>
+              <a:rPr dirty="0">
+                <a:highlight>
+                  <a:srgbClr val="000080"/>
+                </a:highlight>
+              </a:rPr>
+              <a:t>git status</a:t>
+            </a:r>
+          </a:p>
+          <a:p>
+            <a:endParaRPr dirty="0">
+              <a:highlight>
+                <a:srgbClr val="000080"/>
+              </a:highlight>
+            </a:endParaRPr>
+          </a:p>
+          <a:p>
+            <a:r>
+              <a:rPr dirty="0">
+                <a:highlight>
+                  <a:srgbClr val="000080"/>
+                </a:highlight>
+              </a:rPr>
+              <a:t># Create the Project 1 checkpoint.</a:t>
+            </a:r>
+          </a:p>
+          <a:p>
+            <a:r>
+              <a:rPr dirty="0">
+                <a:highlight>
+                  <a:srgbClr val="000080"/>
+                </a:highlight>
+              </a:rPr>
+              <a:t>git commit -m "Complete Project 01 - microservices foundation"</a:t>
+            </a:r>
+          </a:p>
+          <a:p>
+            <a:endParaRPr dirty="0">
+              <a:highlight>
+                <a:srgbClr val="000080"/>
+              </a:highlight>
+            </a:endParaRPr>
+          </a:p>
+          <a:p>
+            <a:r>
+              <a:rPr dirty="0">
+                <a:highlight>
+                  <a:srgbClr val="000080"/>
+                </a:highlight>
+              </a:rPr>
+              <a:t># Standardize the primary branch name.</a:t>
+            </a:r>
+          </a:p>
+          <a:p>
+            <a:r>
+              <a:rPr dirty="0">
+                <a:highlight>
+                  <a:srgbClr val="000080"/>
+                </a:highlight>
+              </a:rPr>
+              <a:t>git branch -M main</a:t>
             </a:r>
           </a:p>
         </p:txBody>
@@ -6767,6 +6709,1669 @@
 </file>
 
 <file path=ppt/slides/slide2.xml><?xml version="1.0" encoding="utf-8"?>
+<p:sld xmlns:a="http://schemas.openxmlformats.org/drawingml/2006/main" xmlns:r="http://schemas.openxmlformats.org/officeDocument/2006/relationships" xmlns:p="http://schemas.openxmlformats.org/presentationml/2006/main">
+  <p:cSld>
+    <p:spTree>
+      <p:nvGrpSpPr>
+        <p:cNvPr id="1" name=""/>
+        <p:cNvGrpSpPr/>
+        <p:nvPr/>
+      </p:nvGrpSpPr>
+      <p:grpSpPr>
+        <a:xfrm>
+          <a:off x="0" y="0"/>
+          <a:ext cx="0" cy="0"/>
+          <a:chOff x="0" y="0"/>
+          <a:chExt cx="0" cy="0"/>
+        </a:xfrm>
+      </p:grpSpPr>
+      <p:sp>
+        <p:nvSpPr>
+          <p:cNvPr id="2" name="Rectangle 1"/>
+          <p:cNvSpPr/>
+          <p:nvPr/>
+        </p:nvSpPr>
+        <p:spPr>
+          <a:xfrm>
+            <a:off x="0" y="0"/>
+            <a:ext cx="12191695" cy="960120"/>
+          </a:xfrm>
+          <a:prstGeom prst="rect">
+            <a:avLst/>
+          </a:prstGeom>
+          <a:solidFill>
+            <a:srgbClr val="142238"/>
+          </a:solidFill>
+          <a:ln>
+            <a:noFill/>
+          </a:ln>
+        </p:spPr>
+        <p:style>
+          <a:lnRef idx="1">
+            <a:schemeClr val="accent1"/>
+          </a:lnRef>
+          <a:fillRef idx="3">
+            <a:schemeClr val="accent1"/>
+          </a:fillRef>
+          <a:effectRef idx="2">
+            <a:schemeClr val="accent1"/>
+          </a:effectRef>
+          <a:fontRef idx="minor">
+            <a:schemeClr val="lt1"/>
+          </a:fontRef>
+        </p:style>
+        <p:txBody>
+          <a:bodyPr rtlCol="0" anchor="ctr"/>
+          <a:lstStyle/>
+          <a:p>
+            <a:pPr algn="ctr"/>
+            <a:endParaRPr/>
+          </a:p>
+        </p:txBody>
+      </p:sp>
+      <p:sp>
+        <p:nvSpPr>
+          <p:cNvPr id="3" name="TextBox 2"/>
+          <p:cNvSpPr txBox="1"/>
+          <p:nvPr/>
+        </p:nvSpPr>
+        <p:spPr>
+          <a:xfrm>
+            <a:off x="502920" y="201168"/>
+            <a:ext cx="8046720" cy="457200"/>
+          </a:xfrm>
+          <a:prstGeom prst="rect">
+            <a:avLst/>
+          </a:prstGeom>
+          <a:noFill/>
+        </p:spPr>
+        <p:txBody>
+          <a:bodyPr wrap="none">
+            <a:spAutoFit/>
+          </a:bodyPr>
+          <a:lstStyle/>
+          <a:p>
+            <a:pPr>
+              <a:defRPr sz="2700" b="1">
+                <a:solidFill>
+                  <a:srgbClr val="FFFFFF"/>
+                </a:solidFill>
+              </a:defRPr>
+            </a:pPr>
+            <a:r>
+              <a:t>PROJECT 1 — FINAL REVIEW</a:t>
+            </a:r>
+          </a:p>
+        </p:txBody>
+      </p:sp>
+      <p:sp>
+        <p:nvSpPr>
+          <p:cNvPr id="4" name="TextBox 3"/>
+          <p:cNvSpPr txBox="1"/>
+          <p:nvPr/>
+        </p:nvSpPr>
+        <p:spPr>
+          <a:xfrm>
+            <a:off x="8549640" y="237744"/>
+            <a:ext cx="3108960" cy="365760"/>
+          </a:xfrm>
+          <a:prstGeom prst="rect">
+            <a:avLst/>
+          </a:prstGeom>
+          <a:noFill/>
+        </p:spPr>
+        <p:txBody>
+          <a:bodyPr wrap="none">
+            <a:spAutoFit/>
+          </a:bodyPr>
+          <a:lstStyle/>
+          <a:p>
+            <a:pPr algn="r">
+              <a:defRPr sz="1500">
+                <a:solidFill>
+                  <a:srgbClr val="CDDCF0"/>
+                </a:solidFill>
+              </a:defRPr>
+            </a:pPr>
+            <a:r>
+              <a:t>Microservices Foundation</a:t>
+            </a:r>
+          </a:p>
+        </p:txBody>
+      </p:sp>
+      <p:sp>
+        <p:nvSpPr>
+          <p:cNvPr id="5" name="Rounded Rectangle 4"/>
+          <p:cNvSpPr/>
+          <p:nvPr/>
+        </p:nvSpPr>
+        <p:spPr>
+          <a:xfrm>
+            <a:off x="502920" y="1143000"/>
+            <a:ext cx="11155680" cy="658368"/>
+          </a:xfrm>
+          <a:prstGeom prst="roundRect">
+            <a:avLst/>
+          </a:prstGeom>
+          <a:solidFill>
+            <a:srgbClr val="F2F6FB"/>
+          </a:solidFill>
+          <a:ln>
+            <a:solidFill>
+              <a:srgbClr val="D7E1EE"/>
+            </a:solidFill>
+          </a:ln>
+        </p:spPr>
+        <p:style>
+          <a:lnRef idx="1">
+            <a:schemeClr val="accent1"/>
+          </a:lnRef>
+          <a:fillRef idx="3">
+            <a:schemeClr val="accent1"/>
+          </a:fillRef>
+          <a:effectRef idx="2">
+            <a:schemeClr val="accent1"/>
+          </a:effectRef>
+          <a:fontRef idx="minor">
+            <a:schemeClr val="lt1"/>
+          </a:fontRef>
+        </p:style>
+        <p:txBody>
+          <a:bodyPr rtlCol="0" anchor="ctr"/>
+          <a:lstStyle/>
+          <a:p>
+            <a:pPr algn="ctr"/>
+            <a:endParaRPr/>
+          </a:p>
+        </p:txBody>
+      </p:sp>
+      <p:sp>
+        <p:nvSpPr>
+          <p:cNvPr id="6" name="TextBox 5"/>
+          <p:cNvSpPr txBox="1"/>
+          <p:nvPr/>
+        </p:nvSpPr>
+        <p:spPr>
+          <a:xfrm>
+            <a:off x="749808" y="1280160"/>
+            <a:ext cx="10652760" cy="365760"/>
+          </a:xfrm>
+          <a:prstGeom prst="rect">
+            <a:avLst/>
+          </a:prstGeom>
+          <a:noFill/>
+        </p:spPr>
+        <p:txBody>
+          <a:bodyPr wrap="none">
+            <a:spAutoFit/>
+          </a:bodyPr>
+          <a:lstStyle/>
+          <a:p>
+            <a:pPr>
+              <a:defRPr sz="1700" b="1">
+                <a:solidFill>
+                  <a:srgbClr val="142238"/>
+                </a:solidFill>
+              </a:defRPr>
+            </a:pPr>
+            <a:r>
+              <a:t>GOAL  •  Build a clean local foundation before creating the real business microservices.</a:t>
+            </a:r>
+          </a:p>
+        </p:txBody>
+      </p:sp>
+      <p:sp>
+        <p:nvSpPr>
+          <p:cNvPr id="7" name="Rounded Rectangle 6"/>
+          <p:cNvSpPr/>
+          <p:nvPr/>
+        </p:nvSpPr>
+        <p:spPr>
+          <a:xfrm>
+            <a:off x="502920" y="1993392"/>
+            <a:ext cx="2633472" cy="1417320"/>
+          </a:xfrm>
+          <a:prstGeom prst="roundRect">
+            <a:avLst/>
+          </a:prstGeom>
+          <a:solidFill>
+            <a:srgbClr val="FFFFFF"/>
+          </a:solidFill>
+          <a:ln>
+            <a:solidFill>
+              <a:srgbClr val="CDD8E6"/>
+            </a:solidFill>
+          </a:ln>
+        </p:spPr>
+        <p:style>
+          <a:lnRef idx="1">
+            <a:schemeClr val="accent1"/>
+          </a:lnRef>
+          <a:fillRef idx="3">
+            <a:schemeClr val="accent1"/>
+          </a:fillRef>
+          <a:effectRef idx="2">
+            <a:schemeClr val="accent1"/>
+          </a:effectRef>
+          <a:fontRef idx="minor">
+            <a:schemeClr val="lt1"/>
+          </a:fontRef>
+        </p:style>
+        <p:txBody>
+          <a:bodyPr rtlCol="0" anchor="ctr"/>
+          <a:lstStyle/>
+          <a:p>
+            <a:pPr algn="ctr"/>
+            <a:endParaRPr/>
+          </a:p>
+        </p:txBody>
+      </p:sp>
+      <p:sp>
+        <p:nvSpPr>
+          <p:cNvPr id="8" name="TextBox 7"/>
+          <p:cNvSpPr txBox="1"/>
+          <p:nvPr/>
+        </p:nvSpPr>
+        <p:spPr>
+          <a:xfrm>
+            <a:off x="667512" y="2139696"/>
+            <a:ext cx="2304288" cy="292608"/>
+          </a:xfrm>
+          <a:prstGeom prst="rect">
+            <a:avLst/>
+          </a:prstGeom>
+          <a:noFill/>
+        </p:spPr>
+        <p:txBody>
+          <a:bodyPr wrap="none">
+            <a:spAutoFit/>
+          </a:bodyPr>
+          <a:lstStyle/>
+          <a:p>
+            <a:pPr>
+              <a:defRPr sz="1500" b="1">
+                <a:solidFill>
+                  <a:srgbClr val="2D68C4"/>
+                </a:solidFill>
+              </a:defRPr>
+            </a:pPr>
+            <a:r>
+              <a:t>1  ORGANIZE</a:t>
+            </a:r>
+          </a:p>
+        </p:txBody>
+      </p:sp>
+      <p:sp>
+        <p:nvSpPr>
+          <p:cNvPr id="9" name="TextBox 8"/>
+          <p:cNvSpPr txBox="1"/>
+          <p:nvPr/>
+        </p:nvSpPr>
+        <p:spPr>
+          <a:xfrm>
+            <a:off x="667512" y="2505456"/>
+            <a:ext cx="2304288" cy="713232"/>
+          </a:xfrm>
+          <a:prstGeom prst="rect">
+            <a:avLst/>
+          </a:prstGeom>
+          <a:noFill/>
+        </p:spPr>
+        <p:txBody>
+          <a:bodyPr wrap="none">
+            <a:spAutoFit/>
+          </a:bodyPr>
+          <a:lstStyle/>
+          <a:p>
+            <a:pPr>
+              <a:spcAft>
+                <a:spcPts val="400"/>
+              </a:spcAft>
+              <a:defRPr sz="1300">
+                <a:solidFill>
+                  <a:srgbClr val="232A34"/>
+                </a:solidFill>
+              </a:defRPr>
+            </a:pPr>
+            <a:r>
+              <a:t>Git repository</a:t>
+            </a:r>
+          </a:p>
+          <a:p>
+            <a:pPr>
+              <a:spcAft>
+                <a:spcPts val="400"/>
+              </a:spcAft>
+              <a:defRPr sz="1300">
+                <a:solidFill>
+                  <a:srgbClr val="232A34"/>
+                </a:solidFill>
+              </a:defRPr>
+            </a:pPr>
+            <a:r>
+              <a:t>LearningPath + Webapp</a:t>
+            </a:r>
+          </a:p>
+          <a:p>
+            <a:pPr>
+              <a:spcAft>
+                <a:spcPts val="400"/>
+              </a:spcAft>
+              <a:defRPr sz="1300">
+                <a:solidFill>
+                  <a:srgbClr val="232A34"/>
+                </a:solidFill>
+              </a:defRPr>
+            </a:pPr>
+            <a:r>
+              <a:t>.gitignore protection</a:t>
+            </a:r>
+          </a:p>
+        </p:txBody>
+      </p:sp>
+      <p:sp>
+        <p:nvSpPr>
+          <p:cNvPr id="10" name="Rounded Rectangle 9"/>
+          <p:cNvSpPr/>
+          <p:nvPr/>
+        </p:nvSpPr>
+        <p:spPr>
+          <a:xfrm>
+            <a:off x="3346704" y="1993392"/>
+            <a:ext cx="2633472" cy="1417320"/>
+          </a:xfrm>
+          <a:prstGeom prst="roundRect">
+            <a:avLst/>
+          </a:prstGeom>
+          <a:solidFill>
+            <a:srgbClr val="FFFFFF"/>
+          </a:solidFill>
+          <a:ln>
+            <a:solidFill>
+              <a:srgbClr val="CDD8E6"/>
+            </a:solidFill>
+          </a:ln>
+        </p:spPr>
+        <p:style>
+          <a:lnRef idx="1">
+            <a:schemeClr val="accent1"/>
+          </a:lnRef>
+          <a:fillRef idx="3">
+            <a:schemeClr val="accent1"/>
+          </a:fillRef>
+          <a:effectRef idx="2">
+            <a:schemeClr val="accent1"/>
+          </a:effectRef>
+          <a:fontRef idx="minor">
+            <a:schemeClr val="lt1"/>
+          </a:fontRef>
+        </p:style>
+        <p:txBody>
+          <a:bodyPr rtlCol="0" anchor="ctr"/>
+          <a:lstStyle/>
+          <a:p>
+            <a:pPr algn="ctr"/>
+            <a:endParaRPr/>
+          </a:p>
+        </p:txBody>
+      </p:sp>
+      <p:sp>
+        <p:nvSpPr>
+          <p:cNvPr id="11" name="TextBox 10"/>
+          <p:cNvSpPr txBox="1"/>
+          <p:nvPr/>
+        </p:nvSpPr>
+        <p:spPr>
+          <a:xfrm>
+            <a:off x="3511296" y="2139696"/>
+            <a:ext cx="2304288" cy="292608"/>
+          </a:xfrm>
+          <a:prstGeom prst="rect">
+            <a:avLst/>
+          </a:prstGeom>
+          <a:noFill/>
+        </p:spPr>
+        <p:txBody>
+          <a:bodyPr wrap="none">
+            <a:spAutoFit/>
+          </a:bodyPr>
+          <a:lstStyle/>
+          <a:p>
+            <a:pPr>
+              <a:defRPr sz="1500" b="1">
+                <a:solidFill>
+                  <a:srgbClr val="2D68C4"/>
+                </a:solidFill>
+              </a:defRPr>
+            </a:pPr>
+            <a:r>
+              <a:t>2  BUILD</a:t>
+            </a:r>
+          </a:p>
+        </p:txBody>
+      </p:sp>
+      <p:sp>
+        <p:nvSpPr>
+          <p:cNvPr id="12" name="TextBox 11"/>
+          <p:cNvSpPr txBox="1"/>
+          <p:nvPr/>
+        </p:nvSpPr>
+        <p:spPr>
+          <a:xfrm>
+            <a:off x="3511296" y="2505456"/>
+            <a:ext cx="2304288" cy="713232"/>
+          </a:xfrm>
+          <a:prstGeom prst="rect">
+            <a:avLst/>
+          </a:prstGeom>
+          <a:noFill/>
+        </p:spPr>
+        <p:txBody>
+          <a:bodyPr wrap="none">
+            <a:spAutoFit/>
+          </a:bodyPr>
+          <a:lstStyle/>
+          <a:p>
+            <a:pPr>
+              <a:spcAft>
+                <a:spcPts val="400"/>
+              </a:spcAft>
+              <a:defRPr sz="1300">
+                <a:solidFill>
+                  <a:srgbClr val="232A34"/>
+                </a:solidFill>
+              </a:defRPr>
+            </a:pPr>
+            <a:r>
+              <a:t>Python virtual env</a:t>
+            </a:r>
+          </a:p>
+          <a:p>
+            <a:pPr>
+              <a:spcAft>
+                <a:spcPts val="400"/>
+              </a:spcAft>
+              <a:defRPr sz="1300">
+                <a:solidFill>
+                  <a:srgbClr val="232A34"/>
+                </a:solidFill>
+              </a:defRPr>
+            </a:pPr>
+            <a:r>
+              <a:t>FastAPI application</a:t>
+            </a:r>
+          </a:p>
+          <a:p>
+            <a:pPr>
+              <a:spcAft>
+                <a:spcPts val="400"/>
+              </a:spcAft>
+              <a:defRPr sz="1300">
+                <a:solidFill>
+                  <a:srgbClr val="232A34"/>
+                </a:solidFill>
+              </a:defRPr>
+            </a:pPr>
+            <a:r>
+              <a:t>Platform health service</a:t>
+            </a:r>
+          </a:p>
+        </p:txBody>
+      </p:sp>
+      <p:sp>
+        <p:nvSpPr>
+          <p:cNvPr id="13" name="Rounded Rectangle 12"/>
+          <p:cNvSpPr/>
+          <p:nvPr/>
+        </p:nvSpPr>
+        <p:spPr>
+          <a:xfrm>
+            <a:off x="6190488" y="1993392"/>
+            <a:ext cx="2633472" cy="1417320"/>
+          </a:xfrm>
+          <a:prstGeom prst="roundRect">
+            <a:avLst/>
+          </a:prstGeom>
+          <a:solidFill>
+            <a:srgbClr val="FFFFFF"/>
+          </a:solidFill>
+          <a:ln>
+            <a:solidFill>
+              <a:srgbClr val="CDD8E6"/>
+            </a:solidFill>
+          </a:ln>
+        </p:spPr>
+        <p:style>
+          <a:lnRef idx="1">
+            <a:schemeClr val="accent1"/>
+          </a:lnRef>
+          <a:fillRef idx="3">
+            <a:schemeClr val="accent1"/>
+          </a:fillRef>
+          <a:effectRef idx="2">
+            <a:schemeClr val="accent1"/>
+          </a:effectRef>
+          <a:fontRef idx="minor">
+            <a:schemeClr val="lt1"/>
+          </a:fontRef>
+        </p:style>
+        <p:txBody>
+          <a:bodyPr rtlCol="0" anchor="ctr"/>
+          <a:lstStyle/>
+          <a:p>
+            <a:pPr algn="ctr"/>
+            <a:endParaRPr/>
+          </a:p>
+        </p:txBody>
+      </p:sp>
+      <p:sp>
+        <p:nvSpPr>
+          <p:cNvPr id="14" name="TextBox 13"/>
+          <p:cNvSpPr txBox="1"/>
+          <p:nvPr/>
+        </p:nvSpPr>
+        <p:spPr>
+          <a:xfrm>
+            <a:off x="6355080" y="2139696"/>
+            <a:ext cx="2304288" cy="292608"/>
+          </a:xfrm>
+          <a:prstGeom prst="rect">
+            <a:avLst/>
+          </a:prstGeom>
+          <a:noFill/>
+        </p:spPr>
+        <p:txBody>
+          <a:bodyPr wrap="none">
+            <a:spAutoFit/>
+          </a:bodyPr>
+          <a:lstStyle/>
+          <a:p>
+            <a:pPr>
+              <a:defRPr sz="1500" b="1">
+                <a:solidFill>
+                  <a:srgbClr val="2D68C4"/>
+                </a:solidFill>
+              </a:defRPr>
+            </a:pPr>
+            <a:r>
+              <a:t>3  TEST</a:t>
+            </a:r>
+          </a:p>
+        </p:txBody>
+      </p:sp>
+      <p:sp>
+        <p:nvSpPr>
+          <p:cNvPr id="15" name="TextBox 14"/>
+          <p:cNvSpPr txBox="1"/>
+          <p:nvPr/>
+        </p:nvSpPr>
+        <p:spPr>
+          <a:xfrm>
+            <a:off x="6355080" y="2505456"/>
+            <a:ext cx="2304288" cy="713232"/>
+          </a:xfrm>
+          <a:prstGeom prst="rect">
+            <a:avLst/>
+          </a:prstGeom>
+          <a:noFill/>
+        </p:spPr>
+        <p:txBody>
+          <a:bodyPr wrap="none">
+            <a:spAutoFit/>
+          </a:bodyPr>
+          <a:lstStyle/>
+          <a:p>
+            <a:pPr>
+              <a:spcAft>
+                <a:spcPts val="400"/>
+              </a:spcAft>
+              <a:defRPr sz="1300">
+                <a:solidFill>
+                  <a:srgbClr val="232A34"/>
+                </a:solidFill>
+              </a:defRPr>
+            </a:pPr>
+            <a:r>
+              <a:t>Uvicorn :8000</a:t>
+            </a:r>
+          </a:p>
+          <a:p>
+            <a:pPr>
+              <a:spcAft>
+                <a:spcPts val="400"/>
+              </a:spcAft>
+              <a:defRPr sz="1300">
+                <a:solidFill>
+                  <a:srgbClr val="232A34"/>
+                </a:solidFill>
+              </a:defRPr>
+            </a:pPr>
+            <a:r>
+              <a:t>/  •  /health  •  /docs</a:t>
+            </a:r>
+          </a:p>
+          <a:p>
+            <a:pPr>
+              <a:spcAft>
+                <a:spcPts val="400"/>
+              </a:spcAft>
+              <a:defRPr sz="1300">
+                <a:solidFill>
+                  <a:srgbClr val="232A34"/>
+                </a:solidFill>
+              </a:defRPr>
+            </a:pPr>
+            <a:r>
+              <a:t>Browser + Swagger + curl</a:t>
+            </a:r>
+          </a:p>
+        </p:txBody>
+      </p:sp>
+      <p:sp>
+        <p:nvSpPr>
+          <p:cNvPr id="16" name="Rounded Rectangle 15"/>
+          <p:cNvSpPr/>
+          <p:nvPr/>
+        </p:nvSpPr>
+        <p:spPr>
+          <a:xfrm>
+            <a:off x="9034272" y="1993392"/>
+            <a:ext cx="2633472" cy="1417320"/>
+          </a:xfrm>
+          <a:prstGeom prst="roundRect">
+            <a:avLst/>
+          </a:prstGeom>
+          <a:solidFill>
+            <a:srgbClr val="FFFFFF"/>
+          </a:solidFill>
+          <a:ln>
+            <a:solidFill>
+              <a:srgbClr val="CDD8E6"/>
+            </a:solidFill>
+          </a:ln>
+        </p:spPr>
+        <p:style>
+          <a:lnRef idx="1">
+            <a:schemeClr val="accent1"/>
+          </a:lnRef>
+          <a:fillRef idx="3">
+            <a:schemeClr val="accent1"/>
+          </a:fillRef>
+          <a:effectRef idx="2">
+            <a:schemeClr val="accent1"/>
+          </a:effectRef>
+          <a:fontRef idx="minor">
+            <a:schemeClr val="lt1"/>
+          </a:fontRef>
+        </p:style>
+        <p:txBody>
+          <a:bodyPr rtlCol="0" anchor="ctr"/>
+          <a:lstStyle/>
+          <a:p>
+            <a:pPr algn="ctr"/>
+            <a:endParaRPr/>
+          </a:p>
+        </p:txBody>
+      </p:sp>
+      <p:sp>
+        <p:nvSpPr>
+          <p:cNvPr id="17" name="TextBox 16"/>
+          <p:cNvSpPr txBox="1"/>
+          <p:nvPr/>
+        </p:nvSpPr>
+        <p:spPr>
+          <a:xfrm>
+            <a:off x="9198864" y="2139696"/>
+            <a:ext cx="2304288" cy="292608"/>
+          </a:xfrm>
+          <a:prstGeom prst="rect">
+            <a:avLst/>
+          </a:prstGeom>
+          <a:noFill/>
+        </p:spPr>
+        <p:txBody>
+          <a:bodyPr wrap="none">
+            <a:spAutoFit/>
+          </a:bodyPr>
+          <a:lstStyle/>
+          <a:p>
+            <a:pPr>
+              <a:defRPr sz="1500" b="1">
+                <a:solidFill>
+                  <a:srgbClr val="2D68C4"/>
+                </a:solidFill>
+              </a:defRPr>
+            </a:pPr>
+            <a:r>
+              <a:t>4  SAVE</a:t>
+            </a:r>
+          </a:p>
+        </p:txBody>
+      </p:sp>
+      <p:sp>
+        <p:nvSpPr>
+          <p:cNvPr id="18" name="TextBox 17"/>
+          <p:cNvSpPr txBox="1"/>
+          <p:nvPr/>
+        </p:nvSpPr>
+        <p:spPr>
+          <a:xfrm>
+            <a:off x="9198864" y="2505456"/>
+            <a:ext cx="2304288" cy="713232"/>
+          </a:xfrm>
+          <a:prstGeom prst="rect">
+            <a:avLst/>
+          </a:prstGeom>
+          <a:noFill/>
+        </p:spPr>
+        <p:txBody>
+          <a:bodyPr wrap="none">
+            <a:spAutoFit/>
+          </a:bodyPr>
+          <a:lstStyle/>
+          <a:p>
+            <a:pPr>
+              <a:spcAft>
+                <a:spcPts val="400"/>
+              </a:spcAft>
+              <a:defRPr sz="1300">
+                <a:solidFill>
+                  <a:srgbClr val="232A34"/>
+                </a:solidFill>
+              </a:defRPr>
+            </a:pPr>
+            <a:r>
+              <a:t>Stage intentionally</a:t>
+            </a:r>
+          </a:p>
+          <a:p>
+            <a:pPr>
+              <a:spcAft>
+                <a:spcPts val="400"/>
+              </a:spcAft>
+              <a:defRPr sz="1300">
+                <a:solidFill>
+                  <a:srgbClr val="232A34"/>
+                </a:solidFill>
+              </a:defRPr>
+            </a:pPr>
+            <a:r>
+              <a:t>Commit to main</a:t>
+            </a:r>
+          </a:p>
+          <a:p>
+            <a:pPr>
+              <a:spcAft>
+                <a:spcPts val="400"/>
+              </a:spcAft>
+              <a:defRPr sz="1300">
+                <a:solidFill>
+                  <a:srgbClr val="232A34"/>
+                </a:solidFill>
+              </a:defRPr>
+            </a:pPr>
+            <a:r>
+              <a:t>Verify clean Git status</a:t>
+            </a:r>
+          </a:p>
+        </p:txBody>
+      </p:sp>
+      <p:sp>
+        <p:nvSpPr>
+          <p:cNvPr id="19" name="Rounded Rectangle 18"/>
+          <p:cNvSpPr/>
+          <p:nvPr/>
+        </p:nvSpPr>
+        <p:spPr>
+          <a:xfrm>
+            <a:off x="502920" y="3703320"/>
+            <a:ext cx="5349240" cy="2103120"/>
+          </a:xfrm>
+          <a:prstGeom prst="roundRect">
+            <a:avLst/>
+          </a:prstGeom>
+          <a:solidFill>
+            <a:srgbClr val="F2F6FB"/>
+          </a:solidFill>
+          <a:ln>
+            <a:solidFill>
+              <a:srgbClr val="D7E1EE"/>
+            </a:solidFill>
+          </a:ln>
+        </p:spPr>
+        <p:style>
+          <a:lnRef idx="1">
+            <a:schemeClr val="accent1"/>
+          </a:lnRef>
+          <a:fillRef idx="3">
+            <a:schemeClr val="accent1"/>
+          </a:fillRef>
+          <a:effectRef idx="2">
+            <a:schemeClr val="accent1"/>
+          </a:effectRef>
+          <a:fontRef idx="minor">
+            <a:schemeClr val="lt1"/>
+          </a:fontRef>
+        </p:style>
+        <p:txBody>
+          <a:bodyPr rtlCol="0" anchor="ctr"/>
+          <a:lstStyle/>
+          <a:p>
+            <a:pPr algn="ctr"/>
+            <a:endParaRPr/>
+          </a:p>
+        </p:txBody>
+      </p:sp>
+      <p:sp>
+        <p:nvSpPr>
+          <p:cNvPr id="20" name="TextBox 19"/>
+          <p:cNvSpPr txBox="1"/>
+          <p:nvPr/>
+        </p:nvSpPr>
+        <p:spPr>
+          <a:xfrm>
+            <a:off x="731520" y="3886200"/>
+            <a:ext cx="4846320" cy="320040"/>
+          </a:xfrm>
+          <a:prstGeom prst="rect">
+            <a:avLst/>
+          </a:prstGeom>
+          <a:noFill/>
+        </p:spPr>
+        <p:txBody>
+          <a:bodyPr wrap="none">
+            <a:spAutoFit/>
+          </a:bodyPr>
+          <a:lstStyle/>
+          <a:p>
+            <a:pPr>
+              <a:defRPr sz="1600" b="1">
+                <a:solidFill>
+                  <a:srgbClr val="142238"/>
+                </a:solidFill>
+              </a:defRPr>
+            </a:pPr>
+            <a:r>
+              <a:t>MENTAL MODEL</a:t>
+            </a:r>
+          </a:p>
+        </p:txBody>
+      </p:sp>
+      <p:sp>
+        <p:nvSpPr>
+          <p:cNvPr id="21" name="TextBox 20"/>
+          <p:cNvSpPr txBox="1"/>
+          <p:nvPr/>
+        </p:nvSpPr>
+        <p:spPr>
+          <a:xfrm>
+            <a:off x="777240" y="4279392"/>
+            <a:ext cx="4709160" cy="1280160"/>
+          </a:xfrm>
+          <a:prstGeom prst="rect">
+            <a:avLst/>
+          </a:prstGeom>
+          <a:noFill/>
+        </p:spPr>
+        <p:txBody>
+          <a:bodyPr wrap="none">
+            <a:spAutoFit/>
+          </a:bodyPr>
+          <a:lstStyle/>
+          <a:p>
+            <a:pPr>
+              <a:spcAft>
+                <a:spcPts val="500"/>
+              </a:spcAft>
+              <a:defRPr sz="1300">
+                <a:solidFill>
+                  <a:srgbClr val="232A34"/>
+                </a:solidFill>
+              </a:defRPr>
+            </a:pPr>
+            <a:r>
+              <a:t>• FastAPI = Python API framework</a:t>
+            </a:r>
+          </a:p>
+          <a:p>
+            <a:pPr>
+              <a:spcAft>
+                <a:spcPts val="500"/>
+              </a:spcAft>
+              <a:defRPr sz="1300">
+                <a:solidFill>
+                  <a:srgbClr val="232A34"/>
+                </a:solidFill>
+              </a:defRPr>
+            </a:pPr>
+            <a:r>
+              <a:t>• Uvicorn = server that runs the app</a:t>
+            </a:r>
+          </a:p>
+          <a:p>
+            <a:pPr>
+              <a:spcAft>
+                <a:spcPts val="500"/>
+              </a:spcAft>
+              <a:defRPr sz="1300">
+                <a:solidFill>
+                  <a:srgbClr val="232A34"/>
+                </a:solidFill>
+              </a:defRPr>
+            </a:pPr>
+            <a:r>
+              <a:t>• Endpoint = URL such as /health</a:t>
+            </a:r>
+          </a:p>
+          <a:p>
+            <a:pPr>
+              <a:spcAft>
+                <a:spcPts val="500"/>
+              </a:spcAft>
+              <a:defRPr sz="1300">
+                <a:solidFill>
+                  <a:srgbClr val="232A34"/>
+                </a:solidFill>
+              </a:defRPr>
+            </a:pPr>
+            <a:r>
+              <a:t>• .venv = isolated local dependencies</a:t>
+            </a:r>
+          </a:p>
+          <a:p>
+            <a:pPr>
+              <a:spcAft>
+                <a:spcPts val="500"/>
+              </a:spcAft>
+              <a:defRPr sz="1300">
+                <a:solidFill>
+                  <a:srgbClr val="232A34"/>
+                </a:solidFill>
+              </a:defRPr>
+            </a:pPr>
+            <a:r>
+              <a:t>• git add → staging  |  git commit → checkpoint</a:t>
+            </a:r>
+          </a:p>
+        </p:txBody>
+      </p:sp>
+      <p:sp>
+        <p:nvSpPr>
+          <p:cNvPr id="22" name="Rounded Rectangle 21"/>
+          <p:cNvSpPr/>
+          <p:nvPr/>
+        </p:nvSpPr>
+        <p:spPr>
+          <a:xfrm>
+            <a:off x="6080760" y="3703320"/>
+            <a:ext cx="5577840" cy="2103120"/>
+          </a:xfrm>
+          <a:prstGeom prst="roundRect">
+            <a:avLst/>
+          </a:prstGeom>
+          <a:solidFill>
+            <a:srgbClr val="F9FAFC"/>
+          </a:solidFill>
+          <a:ln>
+            <a:solidFill>
+              <a:srgbClr val="D7E1EE"/>
+            </a:solidFill>
+          </a:ln>
+        </p:spPr>
+        <p:style>
+          <a:lnRef idx="1">
+            <a:schemeClr val="accent1"/>
+          </a:lnRef>
+          <a:fillRef idx="3">
+            <a:schemeClr val="accent1"/>
+          </a:fillRef>
+          <a:effectRef idx="2">
+            <a:schemeClr val="accent1"/>
+          </a:effectRef>
+          <a:fontRef idx="minor">
+            <a:schemeClr val="lt1"/>
+          </a:fontRef>
+        </p:style>
+        <p:txBody>
+          <a:bodyPr rtlCol="0" anchor="ctr"/>
+          <a:lstStyle/>
+          <a:p>
+            <a:pPr algn="ctr"/>
+            <a:endParaRPr/>
+          </a:p>
+        </p:txBody>
+      </p:sp>
+      <p:sp>
+        <p:nvSpPr>
+          <p:cNvPr id="23" name="TextBox 22"/>
+          <p:cNvSpPr txBox="1"/>
+          <p:nvPr/>
+        </p:nvSpPr>
+        <p:spPr>
+          <a:xfrm>
+            <a:off x="6309360" y="3886200"/>
+            <a:ext cx="5074920" cy="320040"/>
+          </a:xfrm>
+          <a:prstGeom prst="rect">
+            <a:avLst/>
+          </a:prstGeom>
+          <a:noFill/>
+        </p:spPr>
+        <p:txBody>
+          <a:bodyPr wrap="none">
+            <a:spAutoFit/>
+          </a:bodyPr>
+          <a:lstStyle/>
+          <a:p>
+            <a:pPr>
+              <a:defRPr sz="1600" b="1">
+                <a:solidFill>
+                  <a:srgbClr val="142238"/>
+                </a:solidFill>
+              </a:defRPr>
+            </a:pPr>
+            <a:r>
+              <a:t>COMMANDS TO REMEMBER</a:t>
+            </a:r>
+          </a:p>
+        </p:txBody>
+      </p:sp>
+      <p:sp>
+        <p:nvSpPr>
+          <p:cNvPr id="24" name="TextBox 23"/>
+          <p:cNvSpPr txBox="1"/>
+          <p:nvPr/>
+        </p:nvSpPr>
+        <p:spPr>
+          <a:xfrm>
+            <a:off x="6355080" y="4279392"/>
+            <a:ext cx="4983480" cy="1325880"/>
+          </a:xfrm>
+          <a:prstGeom prst="rect">
+            <a:avLst/>
+          </a:prstGeom>
+          <a:noFill/>
+        </p:spPr>
+        <p:txBody>
+          <a:bodyPr wrap="none">
+            <a:spAutoFit/>
+          </a:bodyPr>
+          <a:lstStyle/>
+          <a:p>
+            <a:pPr>
+              <a:spcAft>
+                <a:spcPts val="500"/>
+              </a:spcAft>
+              <a:defRPr sz="1150">
+                <a:solidFill>
+                  <a:srgbClr val="232A34"/>
+                </a:solidFill>
+                <a:latin typeface="Consolas"/>
+              </a:defRPr>
+            </a:pPr>
+            <a:r>
+              <a:t>source .venv/Scripts/activate</a:t>
+            </a:r>
+          </a:p>
+          <a:p>
+            <a:pPr>
+              <a:spcAft>
+                <a:spcPts val="500"/>
+              </a:spcAft>
+              <a:defRPr sz="1150">
+                <a:solidFill>
+                  <a:srgbClr val="232A34"/>
+                </a:solidFill>
+                <a:latin typeface="Consolas"/>
+              </a:defRPr>
+            </a:pPr>
+            <a:r>
+              <a:t>uvicorn main:app --reload</a:t>
+            </a:r>
+          </a:p>
+          <a:p>
+            <a:pPr>
+              <a:spcAft>
+                <a:spcPts val="500"/>
+              </a:spcAft>
+              <a:defRPr sz="1150">
+                <a:solidFill>
+                  <a:srgbClr val="232A34"/>
+                </a:solidFill>
+                <a:latin typeface="Consolas"/>
+              </a:defRPr>
+            </a:pPr>
+            <a:r>
+              <a:t>curl.exe http://127.0.0.1:8000/health</a:t>
+            </a:r>
+          </a:p>
+          <a:p>
+            <a:pPr>
+              <a:spcAft>
+                <a:spcPts val="500"/>
+              </a:spcAft>
+              <a:defRPr sz="1150">
+                <a:solidFill>
+                  <a:srgbClr val="232A34"/>
+                </a:solidFill>
+                <a:latin typeface="Consolas"/>
+              </a:defRPr>
+            </a:pPr>
+            <a:r>
+              <a:t>git status --ignored</a:t>
+            </a:r>
+          </a:p>
+          <a:p>
+            <a:pPr>
+              <a:spcAft>
+                <a:spcPts val="500"/>
+              </a:spcAft>
+              <a:defRPr sz="1150">
+                <a:solidFill>
+                  <a:srgbClr val="232A34"/>
+                </a:solidFill>
+                <a:latin typeface="Consolas"/>
+              </a:defRPr>
+            </a:pPr>
+            <a:r>
+              <a:t>git commit -m "Complete Project 01 - microservices foundation"</a:t>
+            </a:r>
+          </a:p>
+        </p:txBody>
+      </p:sp>
+      <p:sp>
+        <p:nvSpPr>
+          <p:cNvPr id="25" name="Rectangle 24"/>
+          <p:cNvSpPr/>
+          <p:nvPr/>
+        </p:nvSpPr>
+        <p:spPr>
+          <a:xfrm>
+            <a:off x="0" y="6144768"/>
+            <a:ext cx="12191695" cy="713232"/>
+          </a:xfrm>
+          <a:prstGeom prst="rect">
+            <a:avLst/>
+          </a:prstGeom>
+          <a:solidFill>
+            <a:srgbClr val="268957"/>
+          </a:solidFill>
+          <a:ln>
+            <a:noFill/>
+          </a:ln>
+        </p:spPr>
+        <p:style>
+          <a:lnRef idx="1">
+            <a:schemeClr val="accent1"/>
+          </a:lnRef>
+          <a:fillRef idx="3">
+            <a:schemeClr val="accent1"/>
+          </a:fillRef>
+          <a:effectRef idx="2">
+            <a:schemeClr val="accent1"/>
+          </a:effectRef>
+          <a:fontRef idx="minor">
+            <a:schemeClr val="lt1"/>
+          </a:fontRef>
+        </p:style>
+        <p:txBody>
+          <a:bodyPr rtlCol="0" anchor="ctr"/>
+          <a:lstStyle/>
+          <a:p>
+            <a:pPr algn="ctr"/>
+            <a:endParaRPr/>
+          </a:p>
+        </p:txBody>
+      </p:sp>
+      <p:sp>
+        <p:nvSpPr>
+          <p:cNvPr id="26" name="TextBox 25"/>
+          <p:cNvSpPr txBox="1"/>
+          <p:nvPr/>
+        </p:nvSpPr>
+        <p:spPr>
+          <a:xfrm>
+            <a:off x="502920" y="6318504"/>
+            <a:ext cx="11155680" cy="347472"/>
+          </a:xfrm>
+          <a:prstGeom prst="rect">
+            <a:avLst/>
+          </a:prstGeom>
+          <a:noFill/>
+        </p:spPr>
+        <p:txBody>
+          <a:bodyPr wrap="none">
+            <a:spAutoFit/>
+          </a:bodyPr>
+          <a:lstStyle/>
+          <a:p>
+            <a:pPr algn="ctr">
+              <a:defRPr sz="1400" b="1">
+                <a:solidFill>
+                  <a:srgbClr val="FFFFFF"/>
+                </a:solidFill>
+              </a:defRPr>
+            </a:pPr>
+            <a:r>
+              <a:t>✓ EXIT CHECK: /health = 200  •  Swagger works  •  requirements.txt exists  •  Project 1 committed on main     →     NEXT: PROJECT 2 — USER SERVICE</a:t>
+            </a:r>
+          </a:p>
+        </p:txBody>
+      </p:sp>
+    </p:spTree>
+  </p:cSld>
+  <p:clrMapOvr>
+    <a:masterClrMapping/>
+  </p:clrMapOvr>
+</p:sld>
+</file>
+
+<file path=ppt/slides/slide20.xml><?xml version="1.0" encoding="utf-8"?>
+<p:sld xmlns:a="http://schemas.openxmlformats.org/drawingml/2006/main" xmlns:r="http://schemas.openxmlformats.org/officeDocument/2006/relationships" xmlns:p="http://schemas.openxmlformats.org/presentationml/2006/main">
+  <p:cSld>
+    <p:bg>
+      <p:bgPr>
+        <a:solidFill>
+          <a:srgbClr val="FFFFFF"/>
+        </a:solidFill>
+        <a:effectLst/>
+      </p:bgPr>
+    </p:bg>
+    <p:spTree>
+      <p:nvGrpSpPr>
+        <p:cNvPr id="1" name="">
+          <a:extLst>
+            <a:ext uri="{FF2B5EF4-FFF2-40B4-BE49-F238E27FC236}">
+              <a16:creationId xmlns:a16="http://schemas.microsoft.com/office/drawing/2014/main" id="{BDAA8768-6511-7394-7CB3-E24716745FF4}"/>
+            </a:ext>
+          </a:extLst>
+        </p:cNvPr>
+        <p:cNvGrpSpPr/>
+        <p:nvPr/>
+      </p:nvGrpSpPr>
+      <p:grpSpPr>
+        <a:xfrm>
+          <a:off x="0" y="0"/>
+          <a:ext cx="0" cy="0"/>
+          <a:chOff x="0" y="0"/>
+          <a:chExt cx="0" cy="0"/>
+        </a:xfrm>
+      </p:grpSpPr>
+      <p:sp>
+        <p:nvSpPr>
+          <p:cNvPr id="2" name="TextBox 1">
+            <a:extLst>
+              <a:ext uri="{FF2B5EF4-FFF2-40B4-BE49-F238E27FC236}">
+                <a16:creationId xmlns:a16="http://schemas.microsoft.com/office/drawing/2014/main" id="{41EBEFBF-4022-2DB7-38F7-A2B6F7B81034}"/>
+              </a:ext>
+            </a:extLst>
+          </p:cNvPr>
+          <p:cNvSpPr txBox="1"/>
+          <p:nvPr/>
+        </p:nvSpPr>
+        <p:spPr>
+          <a:xfrm>
+            <a:off x="548640" y="320040"/>
+            <a:ext cx="11064240" cy="640080"/>
+          </a:xfrm>
+          <a:prstGeom prst="rect">
+            <a:avLst/>
+          </a:prstGeom>
+          <a:noFill/>
+        </p:spPr>
+        <p:txBody>
+          <a:bodyPr wrap="none">
+            <a:spAutoFit/>
+          </a:bodyPr>
+          <a:lstStyle/>
+          <a:p>
+            <a:pPr>
+              <a:defRPr sz="2800" b="1">
+                <a:solidFill>
+                  <a:srgbClr val="14233C"/>
+                </a:solidFill>
+              </a:defRPr>
+            </a:pPr>
+            <a:r>
+              <a:t>Project 1 Completion Checklist</a:t>
+            </a:r>
+          </a:p>
+        </p:txBody>
+      </p:sp>
+      <p:sp>
+        <p:nvSpPr>
+          <p:cNvPr id="3" name="Rectangle 2">
+            <a:extLst>
+              <a:ext uri="{FF2B5EF4-FFF2-40B4-BE49-F238E27FC236}">
+                <a16:creationId xmlns:a16="http://schemas.microsoft.com/office/drawing/2014/main" id="{4650EF05-774B-5349-FDCC-088AB5ABCE51}"/>
+              </a:ext>
+            </a:extLst>
+          </p:cNvPr>
+          <p:cNvSpPr/>
+          <p:nvPr/>
+        </p:nvSpPr>
+        <p:spPr>
+          <a:xfrm>
+            <a:off x="548640" y="6510528"/>
+            <a:ext cx="11064240" cy="18288"/>
+          </a:xfrm>
+          <a:prstGeom prst="rect">
+            <a:avLst/>
+          </a:prstGeom>
+          <a:solidFill>
+            <a:srgbClr val="DCE4EE"/>
+          </a:solidFill>
+          <a:ln>
+            <a:noFill/>
+          </a:ln>
+        </p:spPr>
+        <p:style>
+          <a:lnRef idx="1">
+            <a:schemeClr val="accent1"/>
+          </a:lnRef>
+          <a:fillRef idx="3">
+            <a:schemeClr val="accent1"/>
+          </a:fillRef>
+          <a:effectRef idx="2">
+            <a:schemeClr val="accent1"/>
+          </a:effectRef>
+          <a:fontRef idx="minor">
+            <a:schemeClr val="lt1"/>
+          </a:fontRef>
+        </p:style>
+        <p:txBody>
+          <a:bodyPr rtlCol="0" anchor="ctr"/>
+          <a:lstStyle/>
+          <a:p>
+            <a:pPr algn="ctr"/>
+            <a:endParaRPr/>
+          </a:p>
+        </p:txBody>
+      </p:sp>
+      <p:sp>
+        <p:nvSpPr>
+          <p:cNvPr id="4" name="TextBox 3">
+            <a:extLst>
+              <a:ext uri="{FF2B5EF4-FFF2-40B4-BE49-F238E27FC236}">
+                <a16:creationId xmlns:a16="http://schemas.microsoft.com/office/drawing/2014/main" id="{01BC83A4-A863-D059-7ABA-9A4828BE4400}"/>
+              </a:ext>
+            </a:extLst>
+          </p:cNvPr>
+          <p:cNvSpPr txBox="1"/>
+          <p:nvPr/>
+        </p:nvSpPr>
+        <p:spPr>
+          <a:xfrm>
+            <a:off x="10881360" y="6537960"/>
+            <a:ext cx="731520" cy="182880"/>
+          </a:xfrm>
+          <a:prstGeom prst="rect">
+            <a:avLst/>
+          </a:prstGeom>
+          <a:noFill/>
+        </p:spPr>
+        <p:txBody>
+          <a:bodyPr wrap="none">
+            <a:spAutoFit/>
+          </a:bodyPr>
+          <a:lstStyle/>
+          <a:p>
+            <a:pPr algn="r">
+              <a:defRPr sz="900">
+                <a:solidFill>
+                  <a:srgbClr val="6E6E6E"/>
+                </a:solidFill>
+              </a:defRPr>
+            </a:pPr>
+            <a:r>
+              <a:t>20</a:t>
+            </a:r>
+          </a:p>
+        </p:txBody>
+      </p:sp>
+      <p:sp>
+        <p:nvSpPr>
+          <p:cNvPr id="5" name="TextBox 4">
+            <a:extLst>
+              <a:ext uri="{FF2B5EF4-FFF2-40B4-BE49-F238E27FC236}">
+                <a16:creationId xmlns:a16="http://schemas.microsoft.com/office/drawing/2014/main" id="{735B027B-AC35-9F20-9AF4-3A6717A0B7EE}"/>
+              </a:ext>
+            </a:extLst>
+          </p:cNvPr>
+          <p:cNvSpPr txBox="1"/>
+          <p:nvPr/>
+        </p:nvSpPr>
+        <p:spPr>
+          <a:xfrm>
+            <a:off x="731520" y="1417320"/>
+            <a:ext cx="10789920" cy="8956298"/>
+          </a:xfrm>
+          <a:prstGeom prst="rect">
+            <a:avLst/>
+          </a:prstGeom>
+          <a:noFill/>
+        </p:spPr>
+        <p:txBody>
+          <a:bodyPr wrap="square">
+            <a:spAutoFit/>
+          </a:bodyPr>
+          <a:lstStyle/>
+          <a:p>
+            <a:r>
+              <a:rPr lang="en-US" dirty="0"/>
+              <a:t># Confirm we are on the correct branch.</a:t>
+            </a:r>
+          </a:p>
+          <a:p>
+            <a:r>
+              <a:rPr lang="en-US" dirty="0"/>
+              <a:t>git branch --show-current</a:t>
+            </a:r>
+          </a:p>
+          <a:p>
+            <a:endParaRPr lang="en-US" dirty="0"/>
+          </a:p>
+          <a:p>
+            <a:r>
+              <a:rPr lang="en-US" dirty="0"/>
+              <a:t># Review modified, untracked and ignored files.</a:t>
+            </a:r>
+          </a:p>
+          <a:p>
+            <a:r>
+              <a:rPr lang="en-US" dirty="0"/>
+              <a:t>git status --ignored</a:t>
+            </a:r>
+          </a:p>
+          <a:p>
+            <a:endParaRPr lang="en-US" dirty="0"/>
+          </a:p>
+          <a:p>
+            <a:r>
+              <a:rPr lang="en-US" dirty="0"/>
+              <a:t># Verify Python virtual environment files are ignored.</a:t>
+            </a:r>
+          </a:p>
+          <a:p>
+            <a:r>
+              <a:rPr lang="en-US" dirty="0"/>
+              <a:t>git check-ignore -v Webapp/services/platform-health/.</a:t>
+            </a:r>
+            <a:r>
+              <a:rPr lang="en-US" dirty="0" err="1"/>
+              <a:t>venv</a:t>
+            </a:r>
+            <a:r>
+              <a:rPr lang="en-US" dirty="0"/>
+              <a:t>/</a:t>
+            </a:r>
+            <a:r>
+              <a:rPr lang="en-US" dirty="0" err="1"/>
+              <a:t>pyvenv.cfg</a:t>
+            </a:r>
+            <a:endParaRPr lang="en-US" dirty="0"/>
+          </a:p>
+          <a:p>
+            <a:endParaRPr lang="en-US" dirty="0"/>
+          </a:p>
+          <a:p>
+            <a:r>
+              <a:rPr lang="en-US" dirty="0"/>
+              <a:t># Verify Python cache files are ignored.</a:t>
+            </a:r>
+          </a:p>
+          <a:p>
+            <a:r>
+              <a:rPr lang="en-US" dirty="0"/>
+              <a:t>git check-ignore -v Webapp/services/platform-health/__</a:t>
+            </a:r>
+            <a:r>
+              <a:rPr lang="en-US" dirty="0" err="1"/>
+              <a:t>pycache</a:t>
+            </a:r>
+            <a:r>
+              <a:rPr lang="en-US" dirty="0"/>
+              <a:t>__/main.cpython-313.pyc</a:t>
+            </a:r>
+          </a:p>
+          <a:p>
+            <a:endParaRPr lang="en-US" dirty="0"/>
+          </a:p>
+          <a:p>
+            <a:r>
+              <a:rPr lang="en-US" dirty="0"/>
+              <a:t># Stage only the Project 1 learning material.</a:t>
+            </a:r>
+          </a:p>
+          <a:p>
+            <a:r>
+              <a:rPr lang="en-US" dirty="0"/>
+              <a:t>git add </a:t>
+            </a:r>
+            <a:r>
+              <a:rPr lang="en-US" dirty="0" err="1"/>
+              <a:t>LearningPath</a:t>
+            </a:r>
+            <a:r>
+              <a:rPr lang="en-US" dirty="0"/>
+              <a:t>/Project-01-Foundation</a:t>
+            </a:r>
+          </a:p>
+          <a:p>
+            <a:endParaRPr lang="en-US" dirty="0"/>
+          </a:p>
+          <a:p>
+            <a:r>
+              <a:rPr lang="en-US" dirty="0"/>
+              <a:t># Stage the Platform Health service.</a:t>
+            </a:r>
+          </a:p>
+          <a:p>
+            <a:r>
+              <a:rPr lang="en-US" dirty="0"/>
+              <a:t>git add Webapp/services/platform-health</a:t>
+            </a:r>
+          </a:p>
+          <a:p>
+            <a:endParaRPr lang="en-US" dirty="0"/>
+          </a:p>
+          <a:p>
+            <a:r>
+              <a:rPr lang="en-US" dirty="0"/>
+              <a:t># Review exactly what is staged.</a:t>
+            </a:r>
+          </a:p>
+          <a:p>
+            <a:r>
+              <a:rPr lang="en-US" dirty="0"/>
+              <a:t>git status</a:t>
+            </a:r>
+          </a:p>
+          <a:p>
+            <a:endParaRPr lang="en-US" dirty="0"/>
+          </a:p>
+          <a:p>
+            <a:r>
+              <a:rPr lang="en-US" dirty="0"/>
+              <a:t># Optional: list only the files that will be committed.</a:t>
+            </a:r>
+          </a:p>
+          <a:p>
+            <a:r>
+              <a:rPr lang="en-US" dirty="0"/>
+              <a:t>git diff --cached --name-only</a:t>
+            </a:r>
+          </a:p>
+          <a:p>
+            <a:endParaRPr lang="en-US" dirty="0"/>
+          </a:p>
+          <a:p>
+            <a:r>
+              <a:rPr lang="en-US" dirty="0"/>
+              <a:t># Create the Project 1 checkpoint.</a:t>
+            </a:r>
+          </a:p>
+          <a:p>
+            <a:r>
+              <a:rPr lang="en-US" dirty="0"/>
+              <a:t>git commit -m "Complete Project 01 - microservices foundation"</a:t>
+            </a:r>
+          </a:p>
+          <a:p>
+            <a:endParaRPr lang="en-US" dirty="0"/>
+          </a:p>
+          <a:p>
+            <a:r>
+              <a:rPr lang="en-US" dirty="0"/>
+              <a:t># Verify the commit exists on main.</a:t>
+            </a:r>
+          </a:p>
+          <a:p>
+            <a:r>
+              <a:rPr lang="en-US" dirty="0"/>
+              <a:t>git log --</a:t>
+            </a:r>
+            <a:r>
+              <a:rPr lang="en-US" dirty="0" err="1"/>
+              <a:t>oneline</a:t>
+            </a:r>
+            <a:r>
+              <a:rPr lang="en-US" dirty="0"/>
+              <a:t> --decorate -5</a:t>
+            </a:r>
+          </a:p>
+          <a:p>
+            <a:endParaRPr lang="en-US" dirty="0"/>
+          </a:p>
+          <a:p>
+            <a:r>
+              <a:rPr lang="en-US" dirty="0"/>
+              <a:t># Confirm there are no remaining changes.</a:t>
+            </a:r>
+          </a:p>
+          <a:p>
+            <a:r>
+              <a:rPr lang="en-US" dirty="0"/>
+              <a:t>git status</a:t>
+            </a:r>
+            <a:endParaRPr dirty="0"/>
+          </a:p>
+        </p:txBody>
+      </p:sp>
+    </p:spTree>
+    <p:extLst>
+      <p:ext uri="{BB962C8B-B14F-4D97-AF65-F5344CB8AC3E}">
+        <p14:creationId xmlns:p14="http://schemas.microsoft.com/office/powerpoint/2010/main" val="3884225287"/>
+      </p:ext>
+    </p:extLst>
+  </p:cSld>
+  <p:clrMapOvr>
+    <a:masterClrMapping/>
+  </p:clrMapOvr>
+</p:sld>
+</file>
+
+<file path=ppt/slides/slide21.xml><?xml version="1.0" encoding="utf-8"?>
 <p:sld xmlns:a="http://schemas.openxmlformats.org/drawingml/2006/main" xmlns:r="http://schemas.openxmlformats.org/officeDocument/2006/relationships" xmlns:p="http://schemas.openxmlformats.org/presentationml/2006/main">
   <p:cSld>
     <p:bg>
@@ -6821,7 +8426,7 @@
               </a:defRPr>
             </a:pPr>
             <a:r>
-              <a:t>Project 1 Goal</a:t>
+              <a:t>Break/Fix Exercises</a:t>
             </a:r>
           </a:p>
         </p:txBody>
@@ -6900,7 +8505,7 @@
               </a:defRPr>
             </a:pPr>
             <a:r>
-              <a:t>2</a:t>
+              <a:t>19</a:t>
             </a:r>
           </a:p>
         </p:txBody>
@@ -6927,33 +8532,108 @@
           </a:bodyPr>
           <a:lstStyle/>
           <a:p>
-            <a:r>
-              <a:t>Build the foundation before building business microservices.</a:t>
-            </a:r>
-          </a:p>
-          <a:p>
-            <a:r>
-              <a:t>Use LearningPath/ to learn each project in sequence with slides, notes and hands-on labs.</a:t>
-            </a:r>
-          </a:p>
-          <a:p>
-            <a:r>
-              <a:t>Use Webapp/ for the actual car-rental application as concepts are mastered.</a:t>
-            </a:r>
-          </a:p>
-          <a:p>
-            <a:r>
-              <a:t>Document the system architecture and the reason for choosing microservices.</a:t>
-            </a:r>
-          </a:p>
-          <a:p>
-            <a:r>
-              <a:t>Verify Python, FastAPI, Uvicorn, Git, Swagger/OpenAPI and curl work locally.</a:t>
-            </a:r>
-          </a:p>
-          <a:p>
-            <a:r>
-              <a:t>Finish with a Git checkpoint that becomes the starting point for Project 2.</a:t>
+            <a:pPr>
+              <a:spcAft>
+                <a:spcPts val="800"/>
+              </a:spcAft>
+              <a:defRPr sz="1800">
+                <a:solidFill>
+                  <a:srgbClr val="222222"/>
+                </a:solidFill>
+              </a:defRPr>
+            </a:pPr>
+            <a:r>
+              <a:t>Visit /wrong-url → expect HTTP 404.</a:t>
+            </a:r>
+          </a:p>
+          <a:p>
+            <a:pPr>
+              <a:spcAft>
+                <a:spcPts val="800"/>
+              </a:spcAft>
+              <a:defRPr sz="1800">
+                <a:solidFill>
+                  <a:srgbClr val="222222"/>
+                </a:solidFill>
+              </a:defRPr>
+            </a:pPr>
+            <a:r>
+              <a:t>Stop Uvicorn and visit /health → expect a connection failure.</a:t>
+            </a:r>
+          </a:p>
+          <a:p>
+            <a:pPr>
+              <a:spcAft>
+                <a:spcPts val="800"/>
+              </a:spcAft>
+              <a:defRPr sz="1800">
+                <a:solidFill>
+                  <a:srgbClr val="222222"/>
+                </a:solidFill>
+              </a:defRPr>
+            </a:pPr>
+            <a:r>
+              <a:t>Restart Uvicorn → API should become available again.</a:t>
+            </a:r>
+          </a:p>
+          <a:p>
+            <a:pPr>
+              <a:spcAft>
+                <a:spcPts val="800"/>
+              </a:spcAft>
+              <a:defRPr sz="1800">
+                <a:solidFill>
+                  <a:srgbClr val="222222"/>
+                </a:solidFill>
+              </a:defRPr>
+            </a:pPr>
+            <a:r>
+              <a:t>Change health status from healthy to testing and save → --reload should restart the service automatically.</a:t>
+            </a:r>
+          </a:p>
+          <a:p>
+            <a:pPr>
+              <a:spcAft>
+                <a:spcPts val="800"/>
+              </a:spcAft>
+              <a:defRPr sz="1800">
+                <a:solidFill>
+                  <a:srgbClr val="222222"/>
+                </a:solidFill>
+              </a:defRPr>
+            </a:pPr>
+            <a:r>
+              <a:t>Run the request again from /docs.</a:t>
+            </a:r>
+          </a:p>
+          <a:p>
+            <a:pPr>
+              <a:spcAft>
+                <a:spcPts val="800"/>
+              </a:spcAft>
+              <a:defRPr sz="1800">
+                <a:solidFill>
+                  <a:srgbClr val="222222"/>
+                </a:solidFill>
+              </a:defRPr>
+            </a:pPr>
+            <a:r>
+              <a:t>Run curl.exe against /health.</a:t>
+            </a:r>
+          </a:p>
+          <a:p>
+            <a:pPr>
+              <a:spcAft>
+                <a:spcPts val="800"/>
+              </a:spcAft>
+              <a:defRPr sz="1800">
+                <a:solidFill>
+                  <a:srgbClr val="222222"/>
+                </a:solidFill>
+              </a:defRPr>
+            </a:pPr>
+            <a:r>
+              <a:t>Run git status and explain every changed/untracked file you see.</a:t>
             </a:r>
           </a:p>
         </p:txBody>
@@ -6966,7 +8646,7 @@
 </p:sld>
 </file>
 
-<file path=ppt/slides/slide20.xml><?xml version="1.0" encoding="utf-8"?>
+<file path=ppt/slides/slide22.xml><?xml version="1.0" encoding="utf-8"?>
 <p:sld xmlns:a="http://schemas.openxmlformats.org/drawingml/2006/main" xmlns:r="http://schemas.openxmlformats.org/officeDocument/2006/relationships" xmlns:p="http://schemas.openxmlformats.org/presentationml/2006/main">
   <p:cSld>
     <p:bg>
@@ -7128,66 +8808,103 @@
           <a:lstStyle/>
           <a:p>
             <a:r>
+              <a:rPr dirty="0"/>
               <a:t>Git, Python and VS Code work.</a:t>
             </a:r>
           </a:p>
           <a:p>
             <a:r>
+              <a:rPr dirty="0"/>
               <a:t>car-rental-microservices is confirmed as the Git repository root.</a:t>
             </a:r>
           </a:p>
           <a:p>
             <a:r>
-              <a:t>LearningPath/Project-01-Foundation contains slides, notes and labs.</a:t>
-            </a:r>
-          </a:p>
-          <a:p>
-            <a:r>
+              <a:rPr dirty="0" err="1"/>
+              <a:t>LearningPath</a:t>
+            </a:r>
+            <a:r>
+              <a:rPr dirty="0"/>
+              <a:t>/Project-01-Foundation contains slides, notes and labs.</a:t>
+            </a:r>
+          </a:p>
+          <a:p>
+            <a:r>
+              <a:rPr dirty="0"/>
               <a:t>Webapp/ is separated from the learning material.</a:t>
             </a:r>
           </a:p>
           <a:p>
             <a:r>
-              <a:t>.gitignore excludes virtual environments, secrets and Office temporary files.</a:t>
-            </a:r>
-          </a:p>
-          <a:p>
-            <a:r>
+              <a:rPr dirty="0"/>
+              <a:t>.</a:t>
+            </a:r>
+            <a:r>
+              <a:rPr dirty="0" err="1"/>
+              <a:t>gitignore</a:t>
+            </a:r>
+            <a:r>
+              <a:rPr dirty="0"/>
+              <a:t> excludes virtual environments, secrets and Office temporary files.</a:t>
+            </a:r>
+          </a:p>
+          <a:p>
+            <a:r>
+              <a:rPr dirty="0"/>
               <a:t>Architecture documentation and ADR exist.</a:t>
             </a:r>
           </a:p>
           <a:p>
             <a:r>
+              <a:rPr dirty="0"/>
               <a:t>Virtual environment activates successfully.</a:t>
             </a:r>
           </a:p>
           <a:p>
             <a:r>
-              <a:t>FastAPI and Uvicorn install successfully.</a:t>
-            </a:r>
-          </a:p>
-          <a:p>
-            <a:r>
+              <a:rPr dirty="0" err="1"/>
+              <a:t>FastAPI</a:t>
+            </a:r>
+            <a:r>
+              <a:rPr dirty="0"/>
+              <a:t> and </a:t>
+            </a:r>
+            <a:r>
+              <a:rPr dirty="0" err="1"/>
+              <a:t>Uvicorn</a:t>
+            </a:r>
+            <a:r>
+              <a:rPr dirty="0"/>
+              <a:t> install successfully.</a:t>
+            </a:r>
+          </a:p>
+          <a:p>
+            <a:r>
+              <a:rPr dirty="0"/>
               <a:t>/ and /health return HTTP 200.</a:t>
             </a:r>
           </a:p>
           <a:p>
             <a:r>
+              <a:rPr dirty="0"/>
               <a:t>/docs works and can execute GET /health.</a:t>
             </a:r>
           </a:p>
           <a:p>
             <a:r>
+              <a:rPr dirty="0"/>
               <a:t>curl.exe successfully calls the API.</a:t>
             </a:r>
           </a:p>
           <a:p>
             <a:r>
+              <a:rPr dirty="0"/>
               <a:t>requirements.txt exists.</a:t>
             </a:r>
           </a:p>
           <a:p>
             <a:r>
+              <a:rPr dirty="0"/>
               <a:t>Project 1 Git commit succeeds on main.</a:t>
             </a:r>
           </a:p>
@@ -7201,7 +8918,7 @@
 </p:sld>
 </file>
 
-<file path=ppt/slides/slide21.xml><?xml version="1.0" encoding="utf-8"?>
+<file path=ppt/slides/slide23.xml><?xml version="1.0" encoding="utf-8"?>
 <p:sld xmlns:a="http://schemas.openxmlformats.org/drawingml/2006/main" xmlns:r="http://schemas.openxmlformats.org/officeDocument/2006/relationships" xmlns:p="http://schemas.openxmlformats.org/presentationml/2006/main">
   <p:cSld>
     <p:bg>
@@ -7907,7 +9624,7 @@
               </a:defRPr>
             </a:pPr>
             <a:r>
-              <a:t>What You Will Learn</a:t>
+              <a:t>Project 1 Goal</a:t>
             </a:r>
           </a:p>
         </p:txBody>
@@ -7986,7 +9703,7 @@
               </a:defRPr>
             </a:pPr>
             <a:r>
-              <a:t>3</a:t>
+              <a:t>2</a:t>
             </a:r>
           </a:p>
         </p:txBody>
@@ -8013,108 +9730,33 @@
           </a:bodyPr>
           <a:lstStyle/>
           <a:p>
-            <a:pPr>
-              <a:spcAft>
-                <a:spcPts val="800"/>
-              </a:spcAft>
-              <a:defRPr sz="2000">
-                <a:solidFill>
-                  <a:srgbClr val="222222"/>
-                </a:solidFill>
-              </a:defRPr>
-            </a:pPr>
-            <a:r>
-              <a:t>Microservices vs. a single monolithic backend.</a:t>
-            </a:r>
-          </a:p>
-          <a:p>
-            <a:pPr>
-              <a:spcAft>
-                <a:spcPts val="800"/>
-              </a:spcAft>
-              <a:defRPr sz="2000">
-                <a:solidFill>
-                  <a:srgbClr val="222222"/>
-                </a:solidFill>
-              </a:defRPr>
-            </a:pPr>
-            <a:r>
-              <a:t>Service boundaries and business responsibilities.</a:t>
-            </a:r>
-          </a:p>
-          <a:p>
-            <a:pPr>
-              <a:spcAft>
-                <a:spcPts val="800"/>
-              </a:spcAft>
-              <a:defRPr sz="2000">
-                <a:solidFill>
-                  <a:srgbClr val="222222"/>
-                </a:solidFill>
-              </a:defRPr>
-            </a:pPr>
-            <a:r>
-              <a:t>Basic HTTP request/response flow.</a:t>
-            </a:r>
-          </a:p>
-          <a:p>
-            <a:pPr>
-              <a:spcAft>
-                <a:spcPts val="800"/>
-              </a:spcAft>
-              <a:defRPr sz="2000">
-                <a:solidFill>
-                  <a:srgbClr val="222222"/>
-                </a:solidFill>
-              </a:defRPr>
-            </a:pPr>
-            <a:r>
-              <a:t>Git repository organization and .gitignore.</a:t>
-            </a:r>
-          </a:p>
-          <a:p>
-            <a:pPr>
-              <a:spcAft>
-                <a:spcPts val="800"/>
-              </a:spcAft>
-              <a:defRPr sz="2000">
-                <a:solidFill>
-                  <a:srgbClr val="222222"/>
-                </a:solidFill>
-              </a:defRPr>
-            </a:pPr>
-            <a:r>
-              <a:t>Python virtual environments and dependency isolation.</a:t>
-            </a:r>
-          </a:p>
-          <a:p>
-            <a:pPr>
-              <a:spcAft>
-                <a:spcPts val="800"/>
-              </a:spcAft>
-              <a:defRPr sz="2000">
-                <a:solidFill>
-                  <a:srgbClr val="222222"/>
-                </a:solidFill>
-              </a:defRPr>
-            </a:pPr>
-            <a:r>
-              <a:t>FastAPI endpoints, Uvicorn and automatic API documentation.</a:t>
-            </a:r>
-          </a:p>
-          <a:p>
-            <a:pPr>
-              <a:spcAft>
-                <a:spcPts val="800"/>
-              </a:spcAft>
-              <a:defRPr sz="2000">
-                <a:solidFill>
-                  <a:srgbClr val="222222"/>
-                </a:solidFill>
-              </a:defRPr>
-            </a:pPr>
-            <a:r>
-              <a:t>Health endpoints and why infrastructure uses them.</a:t>
+            <a:r>
+              <a:t>Build the foundation before building business microservices.</a:t>
+            </a:r>
+          </a:p>
+          <a:p>
+            <a:r>
+              <a:t>Use LearningPath/ to learn each project in sequence with slides, notes and hands-on labs.</a:t>
+            </a:r>
+          </a:p>
+          <a:p>
+            <a:r>
+              <a:t>Use Webapp/ for the actual car-rental application as concepts are mastered.</a:t>
+            </a:r>
+          </a:p>
+          <a:p>
+            <a:r>
+              <a:t>Document the system architecture and the reason for choosing microservices.</a:t>
+            </a:r>
+          </a:p>
+          <a:p>
+            <a:r>
+              <a:t>Verify Python, FastAPI, Uvicorn, Git, Swagger/OpenAPI and curl work locally.</a:t>
+            </a:r>
+          </a:p>
+          <a:p>
+            <a:r>
+              <a:t>Finish with a Git checkpoint that becomes the starting point for Project 2.</a:t>
             </a:r>
           </a:p>
         </p:txBody>
@@ -8182,49 +9824,14 @@
               </a:defRPr>
             </a:pPr>
             <a:r>
-              <a:t>Target Application Architecture</a:t>
-            </a:r>
-          </a:p>
-        </p:txBody>
-      </p:sp>
-      <p:sp>
-        <p:nvSpPr>
-          <p:cNvPr id="3" name="TextBox 2"/>
-          <p:cNvSpPr txBox="1"/>
-          <p:nvPr/>
-        </p:nvSpPr>
-        <p:spPr>
-          <a:xfrm>
-            <a:off x="566928" y="932688"/>
-            <a:ext cx="10972800" cy="384048"/>
-          </a:xfrm>
-          <a:prstGeom prst="rect">
-            <a:avLst/>
-          </a:prstGeom>
-          <a:noFill/>
-        </p:spPr>
-        <p:txBody>
-          <a:bodyPr wrap="none">
-            <a:spAutoFit/>
-          </a:bodyPr>
-          <a:lstStyle/>
-          <a:p>
-            <a:pPr>
-              <a:defRPr sz="1300">
-                <a:solidFill>
-                  <a:srgbClr val="2B68B2"/>
-                </a:solidFill>
-              </a:defRPr>
-            </a:pPr>
-            <a:r>
-              <a:t>This is the architecture we are working toward—not everything is built in Project 1.</a:t>
-            </a:r>
-          </a:p>
-        </p:txBody>
-      </p:sp>
-      <p:sp>
-        <p:nvSpPr>
-          <p:cNvPr id="4" name="Rectangle 3"/>
+              <a:t>What You Will Learn</a:t>
+            </a:r>
+          </a:p>
+        </p:txBody>
+      </p:sp>
+      <p:sp>
+        <p:nvSpPr>
+          <p:cNvPr id="3" name="Rectangle 2"/>
           <p:cNvSpPr/>
           <p:nvPr/>
         </p:nvSpPr>
@@ -8268,7 +9875,7 @@
       </p:sp>
       <p:sp>
         <p:nvSpPr>
-          <p:cNvPr id="5" name="TextBox 4"/>
+          <p:cNvPr id="4" name="TextBox 3"/>
           <p:cNvSpPr txBox="1"/>
           <p:nvPr/>
         </p:nvSpPr>
@@ -8296,471 +9903,21 @@
               </a:defRPr>
             </a:pPr>
             <a:r>
-              <a:t>4</a:t>
-            </a:r>
-          </a:p>
-        </p:txBody>
-      </p:sp>
-      <p:sp>
-        <p:nvSpPr>
-          <p:cNvPr id="6" name="Rounded Rectangle 5"/>
-          <p:cNvSpPr/>
-          <p:nvPr/>
-        </p:nvSpPr>
-        <p:spPr>
-          <a:xfrm>
-            <a:off x="822960" y="1920240"/>
-            <a:ext cx="1971446" cy="914400"/>
-          </a:xfrm>
-          <a:prstGeom prst="roundRect">
-            <a:avLst/>
-          </a:prstGeom>
-          <a:solidFill>
-            <a:srgbClr val="F4F7FB"/>
-          </a:solidFill>
-          <a:ln>
-            <a:solidFill>
-              <a:srgbClr val="2B68B2"/>
-            </a:solidFill>
-          </a:ln>
-        </p:spPr>
-        <p:style>
-          <a:lnRef idx="1">
-            <a:schemeClr val="accent1"/>
-          </a:lnRef>
-          <a:fillRef idx="3">
-            <a:schemeClr val="accent1"/>
-          </a:fillRef>
-          <a:effectRef idx="2">
-            <a:schemeClr val="accent1"/>
-          </a:effectRef>
-          <a:fontRef idx="minor">
-            <a:schemeClr val="lt1"/>
-          </a:fontRef>
-        </p:style>
-        <p:txBody>
-          <a:bodyPr rtlCol="0" anchor="ctr"/>
-          <a:lstStyle/>
-          <a:p>
-            <a:pPr algn="ctr">
-              <a:defRPr sz="1600" b="1">
-                <a:solidFill>
-                  <a:srgbClr val="14233C"/>
-                </a:solidFill>
-              </a:defRPr>
-            </a:pPr>
-            <a:r>
-              <a:t>User</a:t>
-            </a:r>
-          </a:p>
-        </p:txBody>
-      </p:sp>
-      <p:sp>
-        <p:nvSpPr>
-          <p:cNvPr id="7" name="Right Arrow 6"/>
-          <p:cNvSpPr/>
-          <p:nvPr/>
-        </p:nvSpPr>
-        <p:spPr>
-          <a:xfrm>
-            <a:off x="2812694" y="2221992"/>
-            <a:ext cx="128015" cy="292608"/>
-          </a:xfrm>
-          <a:prstGeom prst="rightArrow">
-            <a:avLst/>
-          </a:prstGeom>
-          <a:solidFill>
-            <a:srgbClr val="2B68B2"/>
-          </a:solidFill>
-          <a:ln>
-            <a:noFill/>
-          </a:ln>
-        </p:spPr>
-        <p:style>
-          <a:lnRef idx="1">
-            <a:schemeClr val="accent1"/>
-          </a:lnRef>
-          <a:fillRef idx="3">
-            <a:schemeClr val="accent1"/>
-          </a:fillRef>
-          <a:effectRef idx="2">
-            <a:schemeClr val="accent1"/>
-          </a:effectRef>
-          <a:fontRef idx="minor">
-            <a:schemeClr val="lt1"/>
-          </a:fontRef>
-        </p:style>
-        <p:txBody>
-          <a:bodyPr rtlCol="0" anchor="ctr"/>
-          <a:lstStyle/>
-          <a:p>
-            <a:pPr algn="ctr"/>
-            <a:endParaRPr/>
-          </a:p>
-        </p:txBody>
-      </p:sp>
-      <p:sp>
-        <p:nvSpPr>
-          <p:cNvPr id="8" name="Rounded Rectangle 7"/>
-          <p:cNvSpPr/>
-          <p:nvPr/>
-        </p:nvSpPr>
-        <p:spPr>
-          <a:xfrm>
-            <a:off x="2958998" y="1920240"/>
-            <a:ext cx="1971446" cy="914400"/>
-          </a:xfrm>
-          <a:prstGeom prst="roundRect">
-            <a:avLst/>
-          </a:prstGeom>
-          <a:solidFill>
-            <a:srgbClr val="F4F7FB"/>
-          </a:solidFill>
-          <a:ln>
-            <a:solidFill>
-              <a:srgbClr val="2B68B2"/>
-            </a:solidFill>
-          </a:ln>
-        </p:spPr>
-        <p:style>
-          <a:lnRef idx="1">
-            <a:schemeClr val="accent1"/>
-          </a:lnRef>
-          <a:fillRef idx="3">
-            <a:schemeClr val="accent1"/>
-          </a:fillRef>
-          <a:effectRef idx="2">
-            <a:schemeClr val="accent1"/>
-          </a:effectRef>
-          <a:fontRef idx="minor">
-            <a:schemeClr val="lt1"/>
-          </a:fontRef>
-        </p:style>
-        <p:txBody>
-          <a:bodyPr rtlCol="0" anchor="ctr"/>
-          <a:lstStyle/>
-          <a:p>
-            <a:pPr algn="ctr">
-              <a:defRPr sz="1600" b="1">
-                <a:solidFill>
-                  <a:srgbClr val="14233C"/>
-                </a:solidFill>
-              </a:defRPr>
-            </a:pPr>
-            <a:r>
-              <a:t>Next.js</a:t>
-            </a:r>
-            <a:br/>
-            <a:r>
-              <a:t>Frontend</a:t>
-            </a:r>
-          </a:p>
-        </p:txBody>
-      </p:sp>
-      <p:sp>
-        <p:nvSpPr>
-          <p:cNvPr id="9" name="Right Arrow 8"/>
-          <p:cNvSpPr/>
-          <p:nvPr/>
-        </p:nvSpPr>
-        <p:spPr>
-          <a:xfrm>
-            <a:off x="4948732" y="2221992"/>
-            <a:ext cx="128015" cy="292608"/>
-          </a:xfrm>
-          <a:prstGeom prst="rightArrow">
-            <a:avLst/>
-          </a:prstGeom>
-          <a:solidFill>
-            <a:srgbClr val="2B68B2"/>
-          </a:solidFill>
-          <a:ln>
-            <a:noFill/>
-          </a:ln>
-        </p:spPr>
-        <p:style>
-          <a:lnRef idx="1">
-            <a:schemeClr val="accent1"/>
-          </a:lnRef>
-          <a:fillRef idx="3">
-            <a:schemeClr val="accent1"/>
-          </a:fillRef>
-          <a:effectRef idx="2">
-            <a:schemeClr val="accent1"/>
-          </a:effectRef>
-          <a:fontRef idx="minor">
-            <a:schemeClr val="lt1"/>
-          </a:fontRef>
-        </p:style>
-        <p:txBody>
-          <a:bodyPr rtlCol="0" anchor="ctr"/>
-          <a:lstStyle/>
-          <a:p>
-            <a:pPr algn="ctr"/>
-            <a:endParaRPr/>
-          </a:p>
-        </p:txBody>
-      </p:sp>
-      <p:sp>
-        <p:nvSpPr>
-          <p:cNvPr id="10" name="Rounded Rectangle 9"/>
-          <p:cNvSpPr/>
-          <p:nvPr/>
-        </p:nvSpPr>
-        <p:spPr>
-          <a:xfrm>
-            <a:off x="5095036" y="1920240"/>
-            <a:ext cx="1971446" cy="914400"/>
-          </a:xfrm>
-          <a:prstGeom prst="roundRect">
-            <a:avLst/>
-          </a:prstGeom>
-          <a:solidFill>
-            <a:srgbClr val="F4F7FB"/>
-          </a:solidFill>
-          <a:ln>
-            <a:solidFill>
-              <a:srgbClr val="2B68B2"/>
-            </a:solidFill>
-          </a:ln>
-        </p:spPr>
-        <p:style>
-          <a:lnRef idx="1">
-            <a:schemeClr val="accent1"/>
-          </a:lnRef>
-          <a:fillRef idx="3">
-            <a:schemeClr val="accent1"/>
-          </a:fillRef>
-          <a:effectRef idx="2">
-            <a:schemeClr val="accent1"/>
-          </a:effectRef>
-          <a:fontRef idx="minor">
-            <a:schemeClr val="lt1"/>
-          </a:fontRef>
-        </p:style>
-        <p:txBody>
-          <a:bodyPr rtlCol="0" anchor="ctr"/>
-          <a:lstStyle/>
-          <a:p>
-            <a:pPr algn="ctr">
-              <a:defRPr sz="1600" b="1">
-                <a:solidFill>
-                  <a:srgbClr val="14233C"/>
-                </a:solidFill>
-              </a:defRPr>
-            </a:pPr>
-            <a:r>
-              <a:t>API Layer</a:t>
-            </a:r>
-          </a:p>
-        </p:txBody>
-      </p:sp>
-      <p:sp>
-        <p:nvSpPr>
-          <p:cNvPr id="11" name="Right Arrow 10"/>
-          <p:cNvSpPr/>
-          <p:nvPr/>
-        </p:nvSpPr>
-        <p:spPr>
-          <a:xfrm>
-            <a:off x="7084771" y="2221992"/>
-            <a:ext cx="128015" cy="292608"/>
-          </a:xfrm>
-          <a:prstGeom prst="rightArrow">
-            <a:avLst/>
-          </a:prstGeom>
-          <a:solidFill>
-            <a:srgbClr val="2B68B2"/>
-          </a:solidFill>
-          <a:ln>
-            <a:noFill/>
-          </a:ln>
-        </p:spPr>
-        <p:style>
-          <a:lnRef idx="1">
-            <a:schemeClr val="accent1"/>
-          </a:lnRef>
-          <a:fillRef idx="3">
-            <a:schemeClr val="accent1"/>
-          </a:fillRef>
-          <a:effectRef idx="2">
-            <a:schemeClr val="accent1"/>
-          </a:effectRef>
-          <a:fontRef idx="minor">
-            <a:schemeClr val="lt1"/>
-          </a:fontRef>
-        </p:style>
-        <p:txBody>
-          <a:bodyPr rtlCol="0" anchor="ctr"/>
-          <a:lstStyle/>
-          <a:p>
-            <a:pPr algn="ctr"/>
-            <a:endParaRPr/>
-          </a:p>
-        </p:txBody>
-      </p:sp>
-      <p:sp>
-        <p:nvSpPr>
-          <p:cNvPr id="12" name="Rounded Rectangle 11"/>
-          <p:cNvSpPr/>
-          <p:nvPr/>
-        </p:nvSpPr>
-        <p:spPr>
-          <a:xfrm>
-            <a:off x="7231075" y="1920240"/>
-            <a:ext cx="1971446" cy="914400"/>
-          </a:xfrm>
-          <a:prstGeom prst="roundRect">
-            <a:avLst/>
-          </a:prstGeom>
-          <a:solidFill>
-            <a:srgbClr val="F4F7FB"/>
-          </a:solidFill>
-          <a:ln>
-            <a:solidFill>
-              <a:srgbClr val="2B68B2"/>
-            </a:solidFill>
-          </a:ln>
-        </p:spPr>
-        <p:style>
-          <a:lnRef idx="1">
-            <a:schemeClr val="accent1"/>
-          </a:lnRef>
-          <a:fillRef idx="3">
-            <a:schemeClr val="accent1"/>
-          </a:fillRef>
-          <a:effectRef idx="2">
-            <a:schemeClr val="accent1"/>
-          </a:effectRef>
-          <a:fontRef idx="minor">
-            <a:schemeClr val="lt1"/>
-          </a:fontRef>
-        </p:style>
-        <p:txBody>
-          <a:bodyPr rtlCol="0" anchor="ctr"/>
-          <a:lstStyle/>
-          <a:p>
-            <a:pPr algn="ctr">
-              <a:defRPr sz="1600" b="1">
-                <a:solidFill>
-                  <a:srgbClr val="14233C"/>
-                </a:solidFill>
-              </a:defRPr>
-            </a:pPr>
-            <a:r>
-              <a:t>Microservices</a:t>
-            </a:r>
-          </a:p>
-        </p:txBody>
-      </p:sp>
-      <p:sp>
-        <p:nvSpPr>
-          <p:cNvPr id="13" name="Right Arrow 12"/>
-          <p:cNvSpPr/>
-          <p:nvPr/>
-        </p:nvSpPr>
-        <p:spPr>
-          <a:xfrm>
-            <a:off x="9220809" y="2221992"/>
-            <a:ext cx="128015" cy="292608"/>
-          </a:xfrm>
-          <a:prstGeom prst="rightArrow">
-            <a:avLst/>
-          </a:prstGeom>
-          <a:solidFill>
-            <a:srgbClr val="2B68B2"/>
-          </a:solidFill>
-          <a:ln>
-            <a:noFill/>
-          </a:ln>
-        </p:spPr>
-        <p:style>
-          <a:lnRef idx="1">
-            <a:schemeClr val="accent1"/>
-          </a:lnRef>
-          <a:fillRef idx="3">
-            <a:schemeClr val="accent1"/>
-          </a:fillRef>
-          <a:effectRef idx="2">
-            <a:schemeClr val="accent1"/>
-          </a:effectRef>
-          <a:fontRef idx="minor">
-            <a:schemeClr val="lt1"/>
-          </a:fontRef>
-        </p:style>
-        <p:txBody>
-          <a:bodyPr rtlCol="0" anchor="ctr"/>
-          <a:lstStyle/>
-          <a:p>
-            <a:pPr algn="ctr"/>
-            <a:endParaRPr/>
-          </a:p>
-        </p:txBody>
-      </p:sp>
-      <p:sp>
-        <p:nvSpPr>
-          <p:cNvPr id="14" name="Rounded Rectangle 13"/>
-          <p:cNvSpPr/>
-          <p:nvPr/>
-        </p:nvSpPr>
-        <p:spPr>
-          <a:xfrm>
-            <a:off x="9367113" y="1920240"/>
-            <a:ext cx="1971446" cy="914400"/>
-          </a:xfrm>
-          <a:prstGeom prst="roundRect">
-            <a:avLst/>
-          </a:prstGeom>
-          <a:solidFill>
-            <a:srgbClr val="F4F7FB"/>
-          </a:solidFill>
-          <a:ln>
-            <a:solidFill>
-              <a:srgbClr val="2B68B2"/>
-            </a:solidFill>
-          </a:ln>
-        </p:spPr>
-        <p:style>
-          <a:lnRef idx="1">
-            <a:schemeClr val="accent1"/>
-          </a:lnRef>
-          <a:fillRef idx="3">
-            <a:schemeClr val="accent1"/>
-          </a:fillRef>
-          <a:effectRef idx="2">
-            <a:schemeClr val="accent1"/>
-          </a:effectRef>
-          <a:fontRef idx="minor">
-            <a:schemeClr val="lt1"/>
-          </a:fontRef>
-        </p:style>
-        <p:txBody>
-          <a:bodyPr rtlCol="0" anchor="ctr"/>
-          <a:lstStyle/>
-          <a:p>
-            <a:pPr algn="ctr">
-              <a:defRPr sz="1600" b="1">
-                <a:solidFill>
-                  <a:srgbClr val="14233C"/>
-                </a:solidFill>
-              </a:defRPr>
-            </a:pPr>
-            <a:r>
-              <a:t>Data / Events</a:t>
-            </a:r>
-          </a:p>
-        </p:txBody>
-      </p:sp>
-      <p:sp>
-        <p:nvSpPr>
-          <p:cNvPr id="15" name="TextBox 14"/>
+              <a:t>3</a:t>
+            </a:r>
+          </a:p>
+        </p:txBody>
+      </p:sp>
+      <p:sp>
+        <p:nvSpPr>
+          <p:cNvPr id="5" name="TextBox 4"/>
           <p:cNvSpPr txBox="1"/>
           <p:nvPr/>
         </p:nvSpPr>
         <p:spPr>
           <a:xfrm>
-            <a:off x="731520" y="3337560"/>
-            <a:ext cx="10789920" cy="2194560"/>
+            <a:off x="731520" y="1417320"/>
+            <a:ext cx="10789920" cy="4800600"/>
           </a:xfrm>
           <a:prstGeom prst="rect">
             <a:avLst/>
@@ -8777,14 +9934,14 @@
               <a:spcAft>
                 <a:spcPts val="800"/>
               </a:spcAft>
-              <a:defRPr sz="1800">
+              <a:defRPr sz="2000">
                 <a:solidFill>
                   <a:srgbClr val="222222"/>
                 </a:solidFill>
               </a:defRPr>
             </a:pPr>
             <a:r>
-              <a:t>Core services: User, Vehicle, Search, Booking, Payment and Notification.</a:t>
+              <a:t>Microservices vs. a single monolithic backend.</a:t>
             </a:r>
           </a:p>
           <a:p>
@@ -8792,14 +9949,14 @@
               <a:spcAft>
                 <a:spcPts val="800"/>
               </a:spcAft>
-              <a:defRPr sz="1800">
+              <a:defRPr sz="2000">
                 <a:solidFill>
                   <a:srgbClr val="222222"/>
                 </a:solidFill>
               </a:defRPr>
             </a:pPr>
             <a:r>
-              <a:t>Each service should have a clear responsibility and controlled interfaces.</a:t>
+              <a:t>Service boundaries and business responsibilities.</a:t>
             </a:r>
           </a:p>
           <a:p>
@@ -8807,14 +9964,74 @@
               <a:spcAft>
                 <a:spcPts val="800"/>
               </a:spcAft>
-              <a:defRPr sz="1800">
+              <a:defRPr sz="2000">
                 <a:solidFill>
                   <a:srgbClr val="222222"/>
                 </a:solidFill>
               </a:defRPr>
             </a:pPr>
             <a:r>
-              <a:t>Later: PostgreSQL, Redis, S3, SQS/EventBridge, Docker, Kubernetes and AWS.</a:t>
+              <a:t>Basic HTTP request/response flow.</a:t>
+            </a:r>
+          </a:p>
+          <a:p>
+            <a:pPr>
+              <a:spcAft>
+                <a:spcPts val="800"/>
+              </a:spcAft>
+              <a:defRPr sz="2000">
+                <a:solidFill>
+                  <a:srgbClr val="222222"/>
+                </a:solidFill>
+              </a:defRPr>
+            </a:pPr>
+            <a:r>
+              <a:t>Git repository organization and .gitignore.</a:t>
+            </a:r>
+          </a:p>
+          <a:p>
+            <a:pPr>
+              <a:spcAft>
+                <a:spcPts val="800"/>
+              </a:spcAft>
+              <a:defRPr sz="2000">
+                <a:solidFill>
+                  <a:srgbClr val="222222"/>
+                </a:solidFill>
+              </a:defRPr>
+            </a:pPr>
+            <a:r>
+              <a:t>Python virtual environments and dependency isolation.</a:t>
+            </a:r>
+          </a:p>
+          <a:p>
+            <a:pPr>
+              <a:spcAft>
+                <a:spcPts val="800"/>
+              </a:spcAft>
+              <a:defRPr sz="2000">
+                <a:solidFill>
+                  <a:srgbClr val="222222"/>
+                </a:solidFill>
+              </a:defRPr>
+            </a:pPr>
+            <a:r>
+              <a:t>FastAPI endpoints, Uvicorn and automatic API documentation.</a:t>
+            </a:r>
+          </a:p>
+          <a:p>
+            <a:pPr>
+              <a:spcAft>
+                <a:spcPts val="800"/>
+              </a:spcAft>
+              <a:defRPr sz="2000">
+                <a:solidFill>
+                  <a:srgbClr val="222222"/>
+                </a:solidFill>
+              </a:defRPr>
+            </a:pPr>
+            <a:r>
+              <a:t>Health endpoints and why infrastructure uses them.</a:t>
             </a:r>
           </a:p>
         </p:txBody>
@@ -8882,14 +10099,49 @@
               </a:defRPr>
             </a:pPr>
             <a:r>
-              <a:t>Future AWS Architecture</a:t>
-            </a:r>
-          </a:p>
-        </p:txBody>
-      </p:sp>
-      <p:sp>
-        <p:nvSpPr>
-          <p:cNvPr id="3" name="Rectangle 2"/>
+              <a:t>Target Application Architecture</a:t>
+            </a:r>
+          </a:p>
+        </p:txBody>
+      </p:sp>
+      <p:sp>
+        <p:nvSpPr>
+          <p:cNvPr id="3" name="TextBox 2"/>
+          <p:cNvSpPr txBox="1"/>
+          <p:nvPr/>
+        </p:nvSpPr>
+        <p:spPr>
+          <a:xfrm>
+            <a:off x="566928" y="932688"/>
+            <a:ext cx="10972800" cy="384048"/>
+          </a:xfrm>
+          <a:prstGeom prst="rect">
+            <a:avLst/>
+          </a:prstGeom>
+          <a:noFill/>
+        </p:spPr>
+        <p:txBody>
+          <a:bodyPr wrap="none">
+            <a:spAutoFit/>
+          </a:bodyPr>
+          <a:lstStyle/>
+          <a:p>
+            <a:pPr>
+              <a:defRPr sz="1300">
+                <a:solidFill>
+                  <a:srgbClr val="2B68B2"/>
+                </a:solidFill>
+              </a:defRPr>
+            </a:pPr>
+            <a:r>
+              <a:t>This is the architecture we are working toward—not everything is built in Project 1.</a:t>
+            </a:r>
+          </a:p>
+        </p:txBody>
+      </p:sp>
+      <p:sp>
+        <p:nvSpPr>
+          <p:cNvPr id="4" name="Rectangle 3"/>
           <p:cNvSpPr/>
           <p:nvPr/>
         </p:nvSpPr>
@@ -8933,7 +10185,7 @@
       </p:sp>
       <p:sp>
         <p:nvSpPr>
-          <p:cNvPr id="4" name="TextBox 3"/>
+          <p:cNvPr id="5" name="TextBox 4"/>
           <p:cNvSpPr txBox="1"/>
           <p:nvPr/>
         </p:nvSpPr>
@@ -8961,20 +10213,20 @@
               </a:defRPr>
             </a:pPr>
             <a:r>
-              <a:t>5</a:t>
-            </a:r>
-          </a:p>
-        </p:txBody>
-      </p:sp>
-      <p:sp>
-        <p:nvSpPr>
-          <p:cNvPr id="5" name="Rounded Rectangle 4"/>
+              <a:t>4</a:t>
+            </a:r>
+          </a:p>
+        </p:txBody>
+      </p:sp>
+      <p:sp>
+        <p:nvSpPr>
+          <p:cNvPr id="6" name="Rounded Rectangle 5"/>
           <p:cNvSpPr/>
           <p:nvPr/>
         </p:nvSpPr>
         <p:spPr>
           <a:xfrm>
-            <a:off x="822960" y="1965960"/>
+            <a:off x="822960" y="1920240"/>
             <a:ext cx="1971446" cy="914400"/>
           </a:xfrm>
           <a:prstGeom prst="roundRect">
@@ -9015,20 +10267,20 @@
               </a:defRPr>
             </a:pPr>
             <a:r>
-              <a:t>Internet</a:t>
-            </a:r>
-          </a:p>
-        </p:txBody>
-      </p:sp>
-      <p:sp>
-        <p:nvSpPr>
-          <p:cNvPr id="6" name="Right Arrow 5"/>
+              <a:t>User</a:t>
+            </a:r>
+          </a:p>
+        </p:txBody>
+      </p:sp>
+      <p:sp>
+        <p:nvSpPr>
+          <p:cNvPr id="7" name="Right Arrow 6"/>
           <p:cNvSpPr/>
           <p:nvPr/>
         </p:nvSpPr>
         <p:spPr>
           <a:xfrm>
-            <a:off x="2812694" y="2267712"/>
+            <a:off x="2812694" y="2221992"/>
             <a:ext cx="128015" cy="292608"/>
           </a:xfrm>
           <a:prstGeom prst="rightArrow">
@@ -9066,13 +10318,13 @@
       </p:sp>
       <p:sp>
         <p:nvSpPr>
-          <p:cNvPr id="7" name="Rounded Rectangle 6"/>
+          <p:cNvPr id="8" name="Rounded Rectangle 7"/>
           <p:cNvSpPr/>
           <p:nvPr/>
         </p:nvSpPr>
         <p:spPr>
           <a:xfrm>
-            <a:off x="2958998" y="1965960"/>
+            <a:off x="2958998" y="1920240"/>
             <a:ext cx="1971446" cy="914400"/>
           </a:xfrm>
           <a:prstGeom prst="roundRect">
@@ -9113,20 +10365,24 @@
               </a:defRPr>
             </a:pPr>
             <a:r>
-              <a:t>CloudFront</a:t>
-            </a:r>
-          </a:p>
-        </p:txBody>
-      </p:sp>
-      <p:sp>
-        <p:nvSpPr>
-          <p:cNvPr id="8" name="Right Arrow 7"/>
+              <a:t>Next.js</a:t>
+            </a:r>
+            <a:br/>
+            <a:r>
+              <a:t>Frontend</a:t>
+            </a:r>
+          </a:p>
+        </p:txBody>
+      </p:sp>
+      <p:sp>
+        <p:nvSpPr>
+          <p:cNvPr id="9" name="Right Arrow 8"/>
           <p:cNvSpPr/>
           <p:nvPr/>
         </p:nvSpPr>
         <p:spPr>
           <a:xfrm>
-            <a:off x="4948732" y="2267712"/>
+            <a:off x="4948732" y="2221992"/>
             <a:ext cx="128015" cy="292608"/>
           </a:xfrm>
           <a:prstGeom prst="rightArrow">
@@ -9164,13 +10420,13 @@
       </p:sp>
       <p:sp>
         <p:nvSpPr>
-          <p:cNvPr id="9" name="Rounded Rectangle 8"/>
+          <p:cNvPr id="10" name="Rounded Rectangle 9"/>
           <p:cNvSpPr/>
           <p:nvPr/>
         </p:nvSpPr>
         <p:spPr>
           <a:xfrm>
-            <a:off x="5095036" y="1965960"/>
+            <a:off x="5095036" y="1920240"/>
             <a:ext cx="1971446" cy="914400"/>
           </a:xfrm>
           <a:prstGeom prst="roundRect">
@@ -9211,20 +10467,20 @@
               </a:defRPr>
             </a:pPr>
             <a:r>
-              <a:t>ALB</a:t>
-            </a:r>
-          </a:p>
-        </p:txBody>
-      </p:sp>
-      <p:sp>
-        <p:nvSpPr>
-          <p:cNvPr id="10" name="Right Arrow 9"/>
+              <a:t>API Layer</a:t>
+            </a:r>
+          </a:p>
+        </p:txBody>
+      </p:sp>
+      <p:sp>
+        <p:nvSpPr>
+          <p:cNvPr id="11" name="Right Arrow 10"/>
           <p:cNvSpPr/>
           <p:nvPr/>
         </p:nvSpPr>
         <p:spPr>
           <a:xfrm>
-            <a:off x="7084771" y="2267712"/>
+            <a:off x="7084771" y="2221992"/>
             <a:ext cx="128015" cy="292608"/>
           </a:xfrm>
           <a:prstGeom prst="rightArrow">
@@ -9262,13 +10518,13 @@
       </p:sp>
       <p:sp>
         <p:nvSpPr>
-          <p:cNvPr id="11" name="Rounded Rectangle 10"/>
+          <p:cNvPr id="12" name="Rounded Rectangle 11"/>
           <p:cNvSpPr/>
           <p:nvPr/>
         </p:nvSpPr>
         <p:spPr>
           <a:xfrm>
-            <a:off x="7231075" y="1965960"/>
+            <a:off x="7231075" y="1920240"/>
             <a:ext cx="1971446" cy="914400"/>
           </a:xfrm>
           <a:prstGeom prst="roundRect">
@@ -9309,20 +10565,20 @@
               </a:defRPr>
             </a:pPr>
             <a:r>
-              <a:t>Amazon EKS</a:t>
-            </a:r>
-          </a:p>
-        </p:txBody>
-      </p:sp>
-      <p:sp>
-        <p:nvSpPr>
-          <p:cNvPr id="12" name="Right Arrow 11"/>
+              <a:t>Microservices</a:t>
+            </a:r>
+          </a:p>
+        </p:txBody>
+      </p:sp>
+      <p:sp>
+        <p:nvSpPr>
+          <p:cNvPr id="13" name="Right Arrow 12"/>
           <p:cNvSpPr/>
           <p:nvPr/>
         </p:nvSpPr>
         <p:spPr>
           <a:xfrm>
-            <a:off x="9220809" y="2267712"/>
+            <a:off x="9220809" y="2221992"/>
             <a:ext cx="128015" cy="292608"/>
           </a:xfrm>
           <a:prstGeom prst="rightArrow">
@@ -9360,13 +10616,13 @@
       </p:sp>
       <p:sp>
         <p:nvSpPr>
-          <p:cNvPr id="13" name="Rounded Rectangle 12"/>
+          <p:cNvPr id="14" name="Rounded Rectangle 13"/>
           <p:cNvSpPr/>
           <p:nvPr/>
         </p:nvSpPr>
         <p:spPr>
           <a:xfrm>
-            <a:off x="9367113" y="1965960"/>
+            <a:off x="9367113" y="1920240"/>
             <a:ext cx="1971446" cy="914400"/>
           </a:xfrm>
           <a:prstGeom prst="roundRect">
@@ -9407,25 +10663,21 @@
               </a:defRPr>
             </a:pPr>
             <a:r>
-              <a:t>RDS / S3 /</a:t>
-            </a:r>
-            <a:br/>
-            <a:r>
-              <a:t>SQS / Redis</a:t>
-            </a:r>
-          </a:p>
-        </p:txBody>
-      </p:sp>
-      <p:sp>
-        <p:nvSpPr>
-          <p:cNvPr id="14" name="TextBox 13"/>
+              <a:t>Data / Events</a:t>
+            </a:r>
+          </a:p>
+        </p:txBody>
+      </p:sp>
+      <p:sp>
+        <p:nvSpPr>
+          <p:cNvPr id="15" name="TextBox 14"/>
           <p:cNvSpPr txBox="1"/>
           <p:nvPr/>
         </p:nvSpPr>
         <p:spPr>
           <a:xfrm>
-            <a:off x="731520" y="3383280"/>
-            <a:ext cx="10789920" cy="2011680"/>
+            <a:off x="731520" y="3337560"/>
+            <a:ext cx="10789920" cy="2194560"/>
           </a:xfrm>
           <a:prstGeom prst="rect">
             <a:avLst/>
@@ -9449,7 +10701,7 @@
               </a:defRPr>
             </a:pPr>
             <a:r>
-              <a:t>Terraform will eventually create the AWS infrastructure.</a:t>
+              <a:t>Core services: User, Vehicle, Search, Booking, Payment and Notification.</a:t>
             </a:r>
           </a:p>
           <a:p>
@@ -9464,7 +10716,7 @@
               </a:defRPr>
             </a:pPr>
             <a:r>
-              <a:t>GitHub Actions will build/test containers and deploy through CI/CD.</a:t>
+              <a:t>Each service should have a clear responsibility and controlled interfaces.</a:t>
             </a:r>
           </a:p>
           <a:p>
@@ -9479,7 +10731,7 @@
               </a:defRPr>
             </a:pPr>
             <a:r>
-              <a:t>CloudWatch, Prometheus, Grafana and OpenTelemetry will provide observability.</a:t>
+              <a:t>Later: PostgreSQL, Redis, S3, SQS/EventBridge, Docker, Kubernetes and AWS.</a:t>
             </a:r>
           </a:p>
         </p:txBody>
@@ -9547,7 +10799,7 @@
               </a:defRPr>
             </a:pPr>
             <a:r>
-              <a:t>Step 1 — Verify Development Tools</a:t>
+              <a:t>Future AWS Architecture</a:t>
             </a:r>
           </a:p>
         </p:txBody>
@@ -9626,7 +10878,7 @@
               </a:defRPr>
             </a:pPr>
             <a:r>
-              <a:t>6</a:t>
+              <a:t>5</a:t>
             </a:r>
           </a:p>
         </p:txBody>
@@ -9639,18 +10891,18 @@
         </p:nvSpPr>
         <p:spPr>
           <a:xfrm>
-            <a:off x="731520" y="1508760"/>
-            <a:ext cx="10789920" cy="3291840"/>
+            <a:off x="822960" y="1965960"/>
+            <a:ext cx="1971446" cy="914400"/>
           </a:xfrm>
           <a:prstGeom prst="roundRect">
             <a:avLst/>
           </a:prstGeom>
           <a:solidFill>
-            <a:srgbClr val="1F2430"/>
+            <a:srgbClr val="F4F7FB"/>
           </a:solidFill>
           <a:ln>
             <a:solidFill>
-              <a:srgbClr val="1F2430"/>
+              <a:srgbClr val="2B68B2"/>
             </a:solidFill>
           </a:ln>
         </p:spPr>
@@ -9669,66 +10921,428 @@
           </a:fontRef>
         </p:style>
         <p:txBody>
-          <a:bodyPr wrap="square" rtlCol="0" anchor="ctr"/>
+          <a:bodyPr rtlCol="0" anchor="ctr"/>
           <a:lstStyle/>
           <a:p>
             <a:pPr algn="ctr">
-              <a:defRPr sz="1700">
-                <a:solidFill>
-                  <a:srgbClr val="FFFFFF"/>
-                </a:solidFill>
-                <a:latin typeface="Consolas"/>
+              <a:defRPr sz="1600" b="1">
+                <a:solidFill>
+                  <a:srgbClr val="14233C"/>
+                </a:solidFill>
               </a:defRPr>
             </a:pPr>
             <a:r>
-              <a:t># Critical for Project 1</a:t>
+              <a:t>Internet</a:t>
+            </a:r>
+          </a:p>
+        </p:txBody>
+      </p:sp>
+      <p:sp>
+        <p:nvSpPr>
+          <p:cNvPr id="6" name="Right Arrow 5"/>
+          <p:cNvSpPr/>
+          <p:nvPr/>
+        </p:nvSpPr>
+        <p:spPr>
+          <a:xfrm>
+            <a:off x="2812694" y="2267712"/>
+            <a:ext cx="128015" cy="292608"/>
+          </a:xfrm>
+          <a:prstGeom prst="rightArrow">
+            <a:avLst/>
+          </a:prstGeom>
+          <a:solidFill>
+            <a:srgbClr val="2B68B2"/>
+          </a:solidFill>
+          <a:ln>
+            <a:noFill/>
+          </a:ln>
+        </p:spPr>
+        <p:style>
+          <a:lnRef idx="1">
+            <a:schemeClr val="accent1"/>
+          </a:lnRef>
+          <a:fillRef idx="3">
+            <a:schemeClr val="accent1"/>
+          </a:fillRef>
+          <a:effectRef idx="2">
+            <a:schemeClr val="accent1"/>
+          </a:effectRef>
+          <a:fontRef idx="minor">
+            <a:schemeClr val="lt1"/>
+          </a:fontRef>
+        </p:style>
+        <p:txBody>
+          <a:bodyPr rtlCol="0" anchor="ctr"/>
+          <a:lstStyle/>
+          <a:p>
+            <a:pPr algn="ctr"/>
+            <a:endParaRPr/>
+          </a:p>
+        </p:txBody>
+      </p:sp>
+      <p:sp>
+        <p:nvSpPr>
+          <p:cNvPr id="7" name="Rounded Rectangle 6"/>
+          <p:cNvSpPr/>
+          <p:nvPr/>
+        </p:nvSpPr>
+        <p:spPr>
+          <a:xfrm>
+            <a:off x="2958998" y="1965960"/>
+            <a:ext cx="1971446" cy="914400"/>
+          </a:xfrm>
+          <a:prstGeom prst="roundRect">
+            <a:avLst/>
+          </a:prstGeom>
+          <a:solidFill>
+            <a:srgbClr val="F4F7FB"/>
+          </a:solidFill>
+          <a:ln>
+            <a:solidFill>
+              <a:srgbClr val="2B68B2"/>
+            </a:solidFill>
+          </a:ln>
+        </p:spPr>
+        <p:style>
+          <a:lnRef idx="1">
+            <a:schemeClr val="accent1"/>
+          </a:lnRef>
+          <a:fillRef idx="3">
+            <a:schemeClr val="accent1"/>
+          </a:fillRef>
+          <a:effectRef idx="2">
+            <a:schemeClr val="accent1"/>
+          </a:effectRef>
+          <a:fontRef idx="minor">
+            <a:schemeClr val="lt1"/>
+          </a:fontRef>
+        </p:style>
+        <p:txBody>
+          <a:bodyPr rtlCol="0" anchor="ctr"/>
+          <a:lstStyle/>
+          <a:p>
+            <a:pPr algn="ctr">
+              <a:defRPr sz="1600" b="1">
+                <a:solidFill>
+                  <a:srgbClr val="14233C"/>
+                </a:solidFill>
+              </a:defRPr>
+            </a:pPr>
+            <a:r>
+              <a:t>CloudFront</a:t>
+            </a:r>
+          </a:p>
+        </p:txBody>
+      </p:sp>
+      <p:sp>
+        <p:nvSpPr>
+          <p:cNvPr id="8" name="Right Arrow 7"/>
+          <p:cNvSpPr/>
+          <p:nvPr/>
+        </p:nvSpPr>
+        <p:spPr>
+          <a:xfrm>
+            <a:off x="4948732" y="2267712"/>
+            <a:ext cx="128015" cy="292608"/>
+          </a:xfrm>
+          <a:prstGeom prst="rightArrow">
+            <a:avLst/>
+          </a:prstGeom>
+          <a:solidFill>
+            <a:srgbClr val="2B68B2"/>
+          </a:solidFill>
+          <a:ln>
+            <a:noFill/>
+          </a:ln>
+        </p:spPr>
+        <p:style>
+          <a:lnRef idx="1">
+            <a:schemeClr val="accent1"/>
+          </a:lnRef>
+          <a:fillRef idx="3">
+            <a:schemeClr val="accent1"/>
+          </a:fillRef>
+          <a:effectRef idx="2">
+            <a:schemeClr val="accent1"/>
+          </a:effectRef>
+          <a:fontRef idx="minor">
+            <a:schemeClr val="lt1"/>
+          </a:fontRef>
+        </p:style>
+        <p:txBody>
+          <a:bodyPr rtlCol="0" anchor="ctr"/>
+          <a:lstStyle/>
+          <a:p>
+            <a:pPr algn="ctr"/>
+            <a:endParaRPr/>
+          </a:p>
+        </p:txBody>
+      </p:sp>
+      <p:sp>
+        <p:nvSpPr>
+          <p:cNvPr id="9" name="Rounded Rectangle 8"/>
+          <p:cNvSpPr/>
+          <p:nvPr/>
+        </p:nvSpPr>
+        <p:spPr>
+          <a:xfrm>
+            <a:off x="5095036" y="1965960"/>
+            <a:ext cx="1971446" cy="914400"/>
+          </a:xfrm>
+          <a:prstGeom prst="roundRect">
+            <a:avLst/>
+          </a:prstGeom>
+          <a:solidFill>
+            <a:srgbClr val="F4F7FB"/>
+          </a:solidFill>
+          <a:ln>
+            <a:solidFill>
+              <a:srgbClr val="2B68B2"/>
+            </a:solidFill>
+          </a:ln>
+        </p:spPr>
+        <p:style>
+          <a:lnRef idx="1">
+            <a:schemeClr val="accent1"/>
+          </a:lnRef>
+          <a:fillRef idx="3">
+            <a:schemeClr val="accent1"/>
+          </a:fillRef>
+          <a:effectRef idx="2">
+            <a:schemeClr val="accent1"/>
+          </a:effectRef>
+          <a:fontRef idx="minor">
+            <a:schemeClr val="lt1"/>
+          </a:fontRef>
+        </p:style>
+        <p:txBody>
+          <a:bodyPr rtlCol="0" anchor="ctr"/>
+          <a:lstStyle/>
+          <a:p>
+            <a:pPr algn="ctr">
+              <a:defRPr sz="1600" b="1">
+                <a:solidFill>
+                  <a:srgbClr val="14233C"/>
+                </a:solidFill>
+              </a:defRPr>
+            </a:pPr>
+            <a:r>
+              <a:t>ALB</a:t>
+            </a:r>
+          </a:p>
+        </p:txBody>
+      </p:sp>
+      <p:sp>
+        <p:nvSpPr>
+          <p:cNvPr id="10" name="Right Arrow 9"/>
+          <p:cNvSpPr/>
+          <p:nvPr/>
+        </p:nvSpPr>
+        <p:spPr>
+          <a:xfrm>
+            <a:off x="7084771" y="2267712"/>
+            <a:ext cx="128015" cy="292608"/>
+          </a:xfrm>
+          <a:prstGeom prst="rightArrow">
+            <a:avLst/>
+          </a:prstGeom>
+          <a:solidFill>
+            <a:srgbClr val="2B68B2"/>
+          </a:solidFill>
+          <a:ln>
+            <a:noFill/>
+          </a:ln>
+        </p:spPr>
+        <p:style>
+          <a:lnRef idx="1">
+            <a:schemeClr val="accent1"/>
+          </a:lnRef>
+          <a:fillRef idx="3">
+            <a:schemeClr val="accent1"/>
+          </a:fillRef>
+          <a:effectRef idx="2">
+            <a:schemeClr val="accent1"/>
+          </a:effectRef>
+          <a:fontRef idx="minor">
+            <a:schemeClr val="lt1"/>
+          </a:fontRef>
+        </p:style>
+        <p:txBody>
+          <a:bodyPr rtlCol="0" anchor="ctr"/>
+          <a:lstStyle/>
+          <a:p>
+            <a:pPr algn="ctr"/>
+            <a:endParaRPr/>
+          </a:p>
+        </p:txBody>
+      </p:sp>
+      <p:sp>
+        <p:nvSpPr>
+          <p:cNvPr id="11" name="Rounded Rectangle 10"/>
+          <p:cNvSpPr/>
+          <p:nvPr/>
+        </p:nvSpPr>
+        <p:spPr>
+          <a:xfrm>
+            <a:off x="7231075" y="1965960"/>
+            <a:ext cx="1971446" cy="914400"/>
+          </a:xfrm>
+          <a:prstGeom prst="roundRect">
+            <a:avLst/>
+          </a:prstGeom>
+          <a:solidFill>
+            <a:srgbClr val="F4F7FB"/>
+          </a:solidFill>
+          <a:ln>
+            <a:solidFill>
+              <a:srgbClr val="2B68B2"/>
+            </a:solidFill>
+          </a:ln>
+        </p:spPr>
+        <p:style>
+          <a:lnRef idx="1">
+            <a:schemeClr val="accent1"/>
+          </a:lnRef>
+          <a:fillRef idx="3">
+            <a:schemeClr val="accent1"/>
+          </a:fillRef>
+          <a:effectRef idx="2">
+            <a:schemeClr val="accent1"/>
+          </a:effectRef>
+          <a:fontRef idx="minor">
+            <a:schemeClr val="lt1"/>
+          </a:fontRef>
+        </p:style>
+        <p:txBody>
+          <a:bodyPr rtlCol="0" anchor="ctr"/>
+          <a:lstStyle/>
+          <a:p>
+            <a:pPr algn="ctr">
+              <a:defRPr sz="1600" b="1">
+                <a:solidFill>
+                  <a:srgbClr val="14233C"/>
+                </a:solidFill>
+              </a:defRPr>
+            </a:pPr>
+            <a:r>
+              <a:t>Amazon EKS</a:t>
+            </a:r>
+          </a:p>
+        </p:txBody>
+      </p:sp>
+      <p:sp>
+        <p:nvSpPr>
+          <p:cNvPr id="12" name="Right Arrow 11"/>
+          <p:cNvSpPr/>
+          <p:nvPr/>
+        </p:nvSpPr>
+        <p:spPr>
+          <a:xfrm>
+            <a:off x="9220809" y="2267712"/>
+            <a:ext cx="128015" cy="292608"/>
+          </a:xfrm>
+          <a:prstGeom prst="rightArrow">
+            <a:avLst/>
+          </a:prstGeom>
+          <a:solidFill>
+            <a:srgbClr val="2B68B2"/>
+          </a:solidFill>
+          <a:ln>
+            <a:noFill/>
+          </a:ln>
+        </p:spPr>
+        <p:style>
+          <a:lnRef idx="1">
+            <a:schemeClr val="accent1"/>
+          </a:lnRef>
+          <a:fillRef idx="3">
+            <a:schemeClr val="accent1"/>
+          </a:fillRef>
+          <a:effectRef idx="2">
+            <a:schemeClr val="accent1"/>
+          </a:effectRef>
+          <a:fontRef idx="minor">
+            <a:schemeClr val="lt1"/>
+          </a:fontRef>
+        </p:style>
+        <p:txBody>
+          <a:bodyPr rtlCol="0" anchor="ctr"/>
+          <a:lstStyle/>
+          <a:p>
+            <a:pPr algn="ctr"/>
+            <a:endParaRPr/>
+          </a:p>
+        </p:txBody>
+      </p:sp>
+      <p:sp>
+        <p:nvSpPr>
+          <p:cNvPr id="13" name="Rounded Rectangle 12"/>
+          <p:cNvSpPr/>
+          <p:nvPr/>
+        </p:nvSpPr>
+        <p:spPr>
+          <a:xfrm>
+            <a:off x="9367113" y="1965960"/>
+            <a:ext cx="1971446" cy="914400"/>
+          </a:xfrm>
+          <a:prstGeom prst="roundRect">
+            <a:avLst/>
+          </a:prstGeom>
+          <a:solidFill>
+            <a:srgbClr val="F4F7FB"/>
+          </a:solidFill>
+          <a:ln>
+            <a:solidFill>
+              <a:srgbClr val="2B68B2"/>
+            </a:solidFill>
+          </a:ln>
+        </p:spPr>
+        <p:style>
+          <a:lnRef idx="1">
+            <a:schemeClr val="accent1"/>
+          </a:lnRef>
+          <a:fillRef idx="3">
+            <a:schemeClr val="accent1"/>
+          </a:fillRef>
+          <a:effectRef idx="2">
+            <a:schemeClr val="accent1"/>
+          </a:effectRef>
+          <a:fontRef idx="minor">
+            <a:schemeClr val="lt1"/>
+          </a:fontRef>
+        </p:style>
+        <p:txBody>
+          <a:bodyPr rtlCol="0" anchor="ctr"/>
+          <a:lstStyle/>
+          <a:p>
+            <a:pPr algn="ctr">
+              <a:defRPr sz="1600" b="1">
+                <a:solidFill>
+                  <a:srgbClr val="14233C"/>
+                </a:solidFill>
+              </a:defRPr>
+            </a:pPr>
+            <a:r>
+              <a:t>RDS / S3 /</a:t>
             </a:r>
             <a:br/>
             <a:r>
-              <a:t>git --version</a:t>
-            </a:r>
-            <a:br/>
-            <a:r>
-              <a:t>python --version</a:t>
-            </a:r>
-            <a:br/>
-            <a:r>
-              <a:t>pip --version</a:t>
-            </a:r>
-            <a:br/>
-            <a:br/>
-            <a:r>
-              <a:t># Used in later projects</a:t>
-            </a:r>
-            <a:br/>
-            <a:r>
-              <a:t>docker --version</a:t>
-            </a:r>
-            <a:br/>
-            <a:r>
-              <a:t>aws --version</a:t>
-            </a:r>
-            <a:br/>
-            <a:r>
-              <a:t>terraform --version</a:t>
-            </a:r>
-            <a:br/>
-            <a:r>
-              <a:t>kubectl version --client</a:t>
-            </a:r>
-          </a:p>
-        </p:txBody>
-      </p:sp>
-      <p:sp>
-        <p:nvSpPr>
-          <p:cNvPr id="6" name="TextBox 5"/>
+              <a:t>SQS / Redis</a:t>
+            </a:r>
+          </a:p>
+        </p:txBody>
+      </p:sp>
+      <p:sp>
+        <p:nvSpPr>
+          <p:cNvPr id="14" name="TextBox 13"/>
           <p:cNvSpPr txBox="1"/>
           <p:nvPr/>
         </p:nvSpPr>
         <p:spPr>
           <a:xfrm>
-            <a:off x="731520" y="5074920"/>
-            <a:ext cx="10789920" cy="731520"/>
+            <a:off x="731520" y="3383280"/>
+            <a:ext cx="10789920" cy="2011680"/>
           </a:xfrm>
           <a:prstGeom prst="rect">
             <a:avLst/>
@@ -9745,14 +11359,44 @@
               <a:spcAft>
                 <a:spcPts val="800"/>
               </a:spcAft>
-              <a:defRPr sz="1700">
+              <a:defRPr sz="1800">
                 <a:solidFill>
                   <a:srgbClr val="222222"/>
                 </a:solidFill>
               </a:defRPr>
             </a:pPr>
             <a:r>
-              <a:t>Project 1 requires Git, Python and VS Code. Python 3.11+ is preferred.</a:t>
+              <a:t>Terraform will eventually create the AWS infrastructure.</a:t>
+            </a:r>
+          </a:p>
+          <a:p>
+            <a:pPr>
+              <a:spcAft>
+                <a:spcPts val="800"/>
+              </a:spcAft>
+              <a:defRPr sz="1800">
+                <a:solidFill>
+                  <a:srgbClr val="222222"/>
+                </a:solidFill>
+              </a:defRPr>
+            </a:pPr>
+            <a:r>
+              <a:t>GitHub Actions will build/test containers and deploy through CI/CD.</a:t>
+            </a:r>
+          </a:p>
+          <a:p>
+            <a:pPr>
+              <a:spcAft>
+                <a:spcPts val="800"/>
+              </a:spcAft>
+              <a:defRPr sz="1800">
+                <a:solidFill>
+                  <a:srgbClr val="222222"/>
+                </a:solidFill>
+              </a:defRPr>
+            </a:pPr>
+            <a:r>
+              <a:t>CloudWatch, Prometheus, Grafana and OpenTelemetry will provide observability.</a:t>
             </a:r>
           </a:p>
         </p:txBody>
@@ -9820,7 +11464,7 @@
               </a:defRPr>
             </a:pPr>
             <a:r>
-              <a:t>Steps 2–4 — Create the Repository</a:t>
+              <a:t>Step 1 — Verify Development Tools</a:t>
             </a:r>
           </a:p>
         </p:txBody>
@@ -9899,7 +11543,7 @@
               </a:defRPr>
             </a:pPr>
             <a:r>
-              <a:t>7</a:t>
+              <a:t>6</a:t>
             </a:r>
           </a:p>
         </p:txBody>
@@ -9912,8 +11556,8 @@
         </p:nvSpPr>
         <p:spPr>
           <a:xfrm>
-            <a:off x="731520" y="1463040"/>
-            <a:ext cx="10789920" cy="3931920"/>
+            <a:off x="731520" y="1508760"/>
+            <a:ext cx="10789920" cy="3291840"/>
           </a:xfrm>
           <a:prstGeom prst="roundRect">
             <a:avLst/>
@@ -9945,57 +11589,49 @@
           <a:bodyPr wrap="square" rtlCol="0" anchor="ctr"/>
           <a:lstStyle/>
           <a:p>
-            <a:r>
-              <a:t># Existing repository root</a:t>
-            </a:r>
-          </a:p>
-          <a:p>
-            <a:r>
-              <a:t>cd C:\Users\biome\Documents\PrimeServicesGroupKC\car-rental-microservices</a:t>
-            </a:r>
-          </a:p>
-          <a:p>
-            <a:endParaRPr/>
-          </a:p>
-          <a:p>
-            <a:r>
-              <a:t># Confirm this is the Git repository root</a:t>
-            </a:r>
-          </a:p>
-          <a:p>
-            <a:r>
-              <a:t>git rev-parse --show-toplevel</a:t>
-            </a:r>
-          </a:p>
-          <a:p>
-            <a:r>
-              <a:t>git status</a:t>
-            </a:r>
-          </a:p>
-          <a:p>
-            <a:endParaRPr/>
-          </a:p>
-          <a:p>
-            <a:r>
-              <a:t># Open the repository in VS Code</a:t>
-            </a:r>
-          </a:p>
-          <a:p>
-            <a:r>
-              <a:t>code .</a:t>
-            </a:r>
-          </a:p>
-          <a:p>
-            <a:endParaRPr/>
-          </a:p>
-          <a:p>
-            <a:r>
-              <a:t># Enter the learning path for Project 1</a:t>
-            </a:r>
-          </a:p>
-          <a:p>
-            <a:r>
-              <a:t>cd LearningPath\Project-01-Foundation</a:t>
+            <a:pPr algn="ctr">
+              <a:defRPr sz="1700">
+                <a:solidFill>
+                  <a:srgbClr val="FFFFFF"/>
+                </a:solidFill>
+                <a:latin typeface="Consolas"/>
+              </a:defRPr>
+            </a:pPr>
+            <a:r>
+              <a:t># Critical for Project 1</a:t>
+            </a:r>
+            <a:br/>
+            <a:r>
+              <a:t>git --version</a:t>
+            </a:r>
+            <a:br/>
+            <a:r>
+              <a:t>python --version</a:t>
+            </a:r>
+            <a:br/>
+            <a:r>
+              <a:t>pip --version</a:t>
+            </a:r>
+            <a:br/>
+            <a:br/>
+            <a:r>
+              <a:t># Used in later projects</a:t>
+            </a:r>
+            <a:br/>
+            <a:r>
+              <a:t>docker --version</a:t>
+            </a:r>
+            <a:br/>
+            <a:r>
+              <a:t>aws --version</a:t>
+            </a:r>
+            <a:br/>
+            <a:r>
+              <a:t>terraform --version</a:t>
+            </a:r>
+            <a:br/>
+            <a:r>
+              <a:t>kubectl version --client</a:t>
             </a:r>
           </a:p>
         </p:txBody>
@@ -10008,8 +11644,8 @@
         </p:nvSpPr>
         <p:spPr>
           <a:xfrm>
-            <a:off x="731520" y="5486400"/>
-            <a:ext cx="10789920" cy="640080"/>
+            <a:off x="731520" y="5074920"/>
+            <a:ext cx="10789920" cy="731520"/>
           </a:xfrm>
           <a:prstGeom prst="rect">
             <a:avLst/>
@@ -10022,8 +11658,18 @@
           </a:bodyPr>
           <a:lstStyle/>
           <a:p>
-            <a:r>
-              <a:t>The Git repository already exists at car-rental-microservices/. Do not run git init again inside LearningPath or Project-01-Foundation.</a:t>
+            <a:pPr>
+              <a:spcAft>
+                <a:spcPts val="800"/>
+              </a:spcAft>
+              <a:defRPr sz="1700">
+                <a:solidFill>
+                  <a:srgbClr val="222222"/>
+                </a:solidFill>
+              </a:defRPr>
+            </a:pPr>
+            <a:r>
+              <a:t>Project 1 requires Git, Python and VS Code. Python 3.11+ is preferred.</a:t>
             </a:r>
           </a:p>
         </p:txBody>
@@ -10091,7 +11737,7 @@
               </a:defRPr>
             </a:pPr>
             <a:r>
-              <a:t>Step 5 — Create the Project Structure</a:t>
+              <a:t>Steps 2–4 — Create the Repository</a:t>
             </a:r>
           </a:p>
         </p:txBody>
@@ -10170,7 +11816,7 @@
               </a:defRPr>
             </a:pPr>
             <a:r>
-              <a:t>8</a:t>
+              <a:t>7</a:t>
             </a:r>
           </a:p>
         </p:txBody>
@@ -10183,8 +11829,8 @@
         </p:nvSpPr>
         <p:spPr>
           <a:xfrm>
-            <a:off x="731520" y="1417320"/>
-            <a:ext cx="10789920" cy="4754880"/>
+            <a:off x="731520" y="1463040"/>
+            <a:ext cx="10789920" cy="3931920"/>
           </a:xfrm>
           <a:prstGeom prst="roundRect">
             <a:avLst/>
@@ -10217,92 +11863,84 @@
           <a:lstStyle/>
           <a:p>
             <a:r>
-              <a:t>car-rental-microservices/</a:t>
-            </a:r>
-          </a:p>
-          <a:p>
-            <a:r>
-              <a:t>├── README.md</a:t>
-            </a:r>
-          </a:p>
-          <a:p>
-            <a:r>
-              <a:t>├── .gitignore</a:t>
-            </a:r>
-          </a:p>
-          <a:p>
-            <a:r>
-              <a:t>├── Images/</a:t>
-            </a:r>
-          </a:p>
-          <a:p>
-            <a:r>
-              <a:t>├── LearningPath/</a:t>
-            </a:r>
-          </a:p>
-          <a:p>
-            <a:r>
-              <a:t>│   └── Project-01-Foundation/</a:t>
-            </a:r>
-          </a:p>
-          <a:p>
-            <a:r>
-              <a:t>│       ├── README.md</a:t>
-            </a:r>
-          </a:p>
-          <a:p>
-            <a:r>
-              <a:t>│       ├── labs/</a:t>
-            </a:r>
-          </a:p>
-          <a:p>
-            <a:r>
-              <a:t>│       ├── notes/</a:t>
-            </a:r>
-          </a:p>
-          <a:p>
-            <a:r>
-              <a:t>│       └── slides/</a:t>
-            </a:r>
-          </a:p>
-          <a:p>
-            <a:r>
-              <a:t>└── Webapp/</a:t>
-            </a:r>
-          </a:p>
-          <a:p>
-            <a:r>
-              <a:t>    ├── frontend/</a:t>
-            </a:r>
-          </a:p>
-          <a:p>
-            <a:r>
-              <a:t>    ├── services/</a:t>
-            </a:r>
-          </a:p>
-          <a:p>
-            <a:r>
-              <a:t>    ├── infrastructure/</a:t>
-            </a:r>
-          </a:p>
-          <a:p>
-            <a:r>
-              <a:t>    ├── docker/</a:t>
-            </a:r>
-          </a:p>
-          <a:p>
-            <a:r>
-              <a:t>    ├── scripts/</a:t>
-            </a:r>
-          </a:p>
-          <a:p>
-            <a:r>
-              <a:t>    ├── docs/</a:t>
-            </a:r>
-          </a:p>
-          <a:p>
-            <a:r>
-              <a:t>    └── tests/</a:t>
+              <a:t># Existing repository root</a:t>
+            </a:r>
+          </a:p>
+          <a:p>
+            <a:r>
+              <a:t>cd C:\Users\biome\Documents\PrimeServicesGroupKC\car-rental-microservices</a:t>
+            </a:r>
+          </a:p>
+          <a:p>
+            <a:endParaRPr/>
+          </a:p>
+          <a:p>
+            <a:r>
+              <a:t># Confirm this is the Git repository root</a:t>
+            </a:r>
+          </a:p>
+          <a:p>
+            <a:r>
+              <a:t>git rev-parse --show-toplevel</a:t>
+            </a:r>
+          </a:p>
+          <a:p>
+            <a:r>
+              <a:t>git status</a:t>
+            </a:r>
+          </a:p>
+          <a:p>
+            <a:endParaRPr/>
+          </a:p>
+          <a:p>
+            <a:r>
+              <a:t># Open the repository in VS Code</a:t>
+            </a:r>
+          </a:p>
+          <a:p>
+            <a:r>
+              <a:t>code .</a:t>
+            </a:r>
+          </a:p>
+          <a:p>
+            <a:endParaRPr/>
+          </a:p>
+          <a:p>
+            <a:r>
+              <a:t># Enter the learning path for Project 1</a:t>
+            </a:r>
+          </a:p>
+          <a:p>
+            <a:r>
+              <a:t>cd LearningPath\Project-01-Foundation</a:t>
+            </a:r>
+          </a:p>
+        </p:txBody>
+      </p:sp>
+      <p:sp>
+        <p:nvSpPr>
+          <p:cNvPr id="6" name="TextBox 5"/>
+          <p:cNvSpPr txBox="1"/>
+          <p:nvPr/>
+        </p:nvSpPr>
+        <p:spPr>
+          <a:xfrm>
+            <a:off x="731520" y="5486400"/>
+            <a:ext cx="10789920" cy="640080"/>
+          </a:xfrm>
+          <a:prstGeom prst="rect">
+            <a:avLst/>
+          </a:prstGeom>
+          <a:noFill/>
+        </p:spPr>
+        <p:txBody>
+          <a:bodyPr wrap="square">
+            <a:spAutoFit/>
+          </a:bodyPr>
+          <a:lstStyle/>
+          <a:p>
+            <a:r>
+              <a:t>The Git repository already exists at car-rental-microservices/. Do not run git init again inside LearningPath or Project-01-Foundation.</a:t>
             </a:r>
           </a:p>
         </p:txBody>
@@ -10370,7 +12008,7 @@
               </a:defRPr>
             </a:pPr>
             <a:r>
-              <a:t>Why These Folders Exist</a:t>
+              <a:t>Step 5 — Create the Project Structure</a:t>
             </a:r>
           </a:p>
         </p:txBody>
@@ -10449,75 +12087,139 @@
               </a:defRPr>
             </a:pPr>
             <a:r>
-              <a:t>9</a:t>
-            </a:r>
-          </a:p>
-        </p:txBody>
-      </p:sp>
-      <p:sp>
-        <p:nvSpPr>
-          <p:cNvPr id="5" name="TextBox 4"/>
-          <p:cNvSpPr txBox="1"/>
+              <a:t>8</a:t>
+            </a:r>
+          </a:p>
+        </p:txBody>
+      </p:sp>
+      <p:sp>
+        <p:nvSpPr>
+          <p:cNvPr id="5" name="Rounded Rectangle 4"/>
+          <p:cNvSpPr/>
           <p:nvPr/>
         </p:nvSpPr>
         <p:spPr>
           <a:xfrm>
             <a:off x="731520" y="1417320"/>
-            <a:ext cx="10789920" cy="4800600"/>
-          </a:xfrm>
-          <a:prstGeom prst="rect">
-            <a:avLst/>
-          </a:prstGeom>
-          <a:noFill/>
-        </p:spPr>
-        <p:txBody>
-          <a:bodyPr wrap="square">
-            <a:spAutoFit/>
-          </a:bodyPr>
-          <a:lstStyle/>
-          <a:p>
-            <a:r>
-              <a:t>LearningPath/ — structured training area; complete projects one at a time.</a:t>
-            </a:r>
-          </a:p>
-          <a:p>
-            <a:r>
-              <a:t>Project-01-Foundation/slides/ — Project 1 presentation material.</a:t>
-            </a:r>
-          </a:p>
-          <a:p>
-            <a:r>
-              <a:t>Project-01-Foundation/notes/ — explanations and personal learning notes.</a:t>
-            </a:r>
-          </a:p>
-          <a:p>
-            <a:r>
-              <a:t>Project-01-Foundation/labs/ — hands-on exercises and experimental code.</a:t>
-            </a:r>
-          </a:p>
-          <a:p>
-            <a:r>
-              <a:t>Webapp/ — the real application that grows as each concept is mastered.</a:t>
-            </a:r>
-          </a:p>
-          <a:p>
-            <a:r>
-              <a:t>Webapp/frontend/ — future Next.js + React + TypeScript user interface.</a:t>
-            </a:r>
-          </a:p>
-          <a:p>
-            <a:r>
-              <a:t>Webapp/services/ — backend microservices such as User, Vehicle and Booking.</a:t>
-            </a:r>
-          </a:p>
-          <a:p>
-            <a:r>
-              <a:t>Webapp/infrastructure/ — Terraform, Kubernetes and cloud infrastructure.</a:t>
-            </a:r>
-          </a:p>
-          <a:p>
-            <a:r>
-              <a:t>Images/ — shared architecture diagrams and project images.</a:t>
+            <a:ext cx="10789920" cy="4754880"/>
+          </a:xfrm>
+          <a:prstGeom prst="roundRect">
+            <a:avLst/>
+          </a:prstGeom>
+          <a:solidFill>
+            <a:srgbClr val="1F2430"/>
+          </a:solidFill>
+          <a:ln>
+            <a:solidFill>
+              <a:srgbClr val="1F2430"/>
+            </a:solidFill>
+          </a:ln>
+        </p:spPr>
+        <p:style>
+          <a:lnRef idx="1">
+            <a:schemeClr val="accent1"/>
+          </a:lnRef>
+          <a:fillRef idx="3">
+            <a:schemeClr val="accent1"/>
+          </a:fillRef>
+          <a:effectRef idx="2">
+            <a:schemeClr val="accent1"/>
+          </a:effectRef>
+          <a:fontRef idx="minor">
+            <a:schemeClr val="lt1"/>
+          </a:fontRef>
+        </p:style>
+        <p:txBody>
+          <a:bodyPr wrap="square" rtlCol="0" anchor="ctr"/>
+          <a:lstStyle/>
+          <a:p>
+            <a:r>
+              <a:t>car-rental-microservices/</a:t>
+            </a:r>
+          </a:p>
+          <a:p>
+            <a:r>
+              <a:t>├── README.md</a:t>
+            </a:r>
+          </a:p>
+          <a:p>
+            <a:r>
+              <a:t>├── .gitignore</a:t>
+            </a:r>
+          </a:p>
+          <a:p>
+            <a:r>
+              <a:t>├── Images/</a:t>
+            </a:r>
+          </a:p>
+          <a:p>
+            <a:r>
+              <a:t>├── LearningPath/</a:t>
+            </a:r>
+          </a:p>
+          <a:p>
+            <a:r>
+              <a:t>│   └── Project-01-Foundation/</a:t>
+            </a:r>
+          </a:p>
+          <a:p>
+            <a:r>
+              <a:t>│       ├── README.md</a:t>
+            </a:r>
+          </a:p>
+          <a:p>
+            <a:r>
+              <a:t>│       ├── labs/</a:t>
+            </a:r>
+          </a:p>
+          <a:p>
+            <a:r>
+              <a:t>│       ├── notes/</a:t>
+            </a:r>
+          </a:p>
+          <a:p>
+            <a:r>
+              <a:t>│       └── slides/</a:t>
+            </a:r>
+          </a:p>
+          <a:p>
+            <a:r>
+              <a:t>└── Webapp/</a:t>
+            </a:r>
+          </a:p>
+          <a:p>
+            <a:r>
+              <a:t>    ├── frontend/</a:t>
+            </a:r>
+          </a:p>
+          <a:p>
+            <a:r>
+              <a:t>    ├── services/</a:t>
+            </a:r>
+          </a:p>
+          <a:p>
+            <a:r>
+              <a:t>    ├── infrastructure/</a:t>
+            </a:r>
+          </a:p>
+          <a:p>
+            <a:r>
+              <a:t>    ├── docker/</a:t>
+            </a:r>
+          </a:p>
+          <a:p>
+            <a:r>
+              <a:t>    ├── scripts/</a:t>
+            </a:r>
+          </a:p>
+          <a:p>
+            <a:r>
+              <a:t>    ├── docs/</a:t>
+            </a:r>
+          </a:p>
+          <a:p>
+            <a:r>
+              <a:t>    └── tests/</a:t>
             </a:r>
           </a:p>
         </p:txBody>
